--- a/proposals/week2-git-architecture.pptx
+++ b/proposals/week2-git-architecture.pptx
@@ -28,9 +28,10 @@
     <p:sldId id="276" r:id="rId22"/>
     <p:sldId id="277" r:id="rId23"/>
     <p:sldId id="278" r:id="rId24"/>
+    <p:sldId id="279" r:id="rId25"/>
   </p:sldIdLst>
   <p:notesMasterIdLst>
-    <p:notesMasterId r:id="rId25"/>
+    <p:notesMasterId r:id="rId26"/>
   </p:notesMasterIdLst>
   <p:sldSz cx="9144000" cy="5715000"/>
   <p:notesSz cx="5715000" cy="9144000"/>
@@ -1868,6 +1869,94 @@
             <a:fld id="{F7021451-1387-4CA6-816F-3879F97B5CBC}" type="slidenum">
               <a:rPr lang="en-US"/>
               <a:t>23</a:t>
+            </a:fld>
+            <a:endParaRPr lang="en-US"/>
+          </a:p>
+        </p:txBody>
+      </p:sp>
+    </p:spTree>
+    <p:extLst>
+      <p:ext uri="{BB962C8B-B14F-4D97-AF65-F5344CB8AC3E}">
+        <p14:creationId xmlns:p14="http://schemas.microsoft.com/office/powerpoint/2010/main" val="1024086991"/>
+      </p:ext>
+    </p:extLst>
+  </p:cSld>
+  <p:clrMapOvr>
+    <a:masterClrMapping/>
+  </p:clrMapOvr>
+</p:notes>
+</file>
+
+<file path=ppt/notesSlides/notesSlide24.xml><?xml version="1.0" encoding="utf-8"?>
+<p:notes xmlns:a="http://schemas.openxmlformats.org/drawingml/2006/main" xmlns:r="http://schemas.openxmlformats.org/officeDocument/2006/relationships" xmlns:p="http://schemas.openxmlformats.org/presentationml/2006/main">
+  <p:cSld>
+    <p:spTree>
+      <p:nvGrpSpPr>
+        <p:cNvPr id="1" name=""/>
+        <p:cNvGrpSpPr/>
+        <p:nvPr/>
+      </p:nvGrpSpPr>
+      <p:grpSpPr>
+        <a:xfrm>
+          <a:off x="0" y="0"/>
+          <a:ext cx="0" cy="0"/>
+          <a:chOff x="0" y="0"/>
+          <a:chExt cx="0" cy="0"/>
+        </a:xfrm>
+      </p:grpSpPr>
+      <p:sp>
+        <p:nvSpPr>
+          <p:cNvPr id="2" name="Slide Image Placeholder 1"/>
+          <p:cNvSpPr>
+            <a:spLocks noGrp="1" noRot="1" noChangeAspect="1"/>
+          </p:cNvSpPr>
+          <p:nvPr>
+            <p:ph type="sldImg"/>
+          </p:nvPr>
+        </p:nvSpPr>
+        <p:spPr/>
+      </p:sp>
+      <p:sp>
+        <p:nvSpPr>
+          <p:cNvPr id="3" name="Notes Placeholder 2"/>
+          <p:cNvSpPr>
+            <a:spLocks noGrp="1"/>
+          </p:cNvSpPr>
+          <p:nvPr>
+            <p:ph type="body" idx="1"/>
+          </p:nvPr>
+        </p:nvSpPr>
+        <p:spPr/>
+        <p:txBody>
+          <a:bodyPr/>
+          <a:lstStyle/>
+          <a:p>
+            <a:r>
+              <a:rPr lang="en-US" dirty="0"/>
+              <a:t/>
+            </a:r>
+            <a:endParaRPr lang="en-US" dirty="0"/>
+          </a:p>
+        </p:txBody>
+      </p:sp>
+      <p:sp>
+        <p:nvSpPr>
+          <p:cNvPr id="4" name="Slide Number Placeholder 3"/>
+          <p:cNvSpPr>
+            <a:spLocks noGrp="1"/>
+          </p:cNvSpPr>
+          <p:nvPr>
+            <p:ph type="sldNum" sz="quarter" idx="10"/>
+          </p:nvPr>
+        </p:nvSpPr>
+        <p:spPr/>
+        <p:txBody>
+          <a:bodyPr/>
+          <a:lstStyle/>
+          <a:p>
+            <a:fld id="{F7021451-1387-4CA6-816F-3879F97B5CBC}" type="slidenum">
+              <a:rPr lang="en-US"/>
+              <a:t>24</a:t>
             </a:fld>
             <a:endParaRPr lang="en-US"/>
           </a:p>
@@ -7233,7 +7322,7 @@
                 <a:ea typeface="Calibri" pitchFamily="34" charset="-122"/>
                 <a:cs typeface="Calibri" pitchFamily="34" charset="-120"/>
               </a:rPr>
-              <a:t>還沒確定，先給 PM 看</a:t>
+              <a:t>團隊多人協作</a:t>
             </a:r>
             <a:endParaRPr lang="en-US" sz="1200" dirty="0"/>
           </a:p>
@@ -7272,7 +7361,7 @@
                 <a:ea typeface="Calibri" pitchFamily="34" charset="-122"/>
                 <a:cs typeface="Calibri" pitchFamily="34" charset="-120"/>
               </a:rPr>
-              <a:t>Show PM before merging</a:t>
+              <a:t>Team collaboration</a:t>
             </a:r>
             <a:endParaRPr lang="en-US" sz="1000" dirty="0"/>
           </a:p>
@@ -7629,7 +7718,7 @@
                 <a:ea typeface="Calibri" pitchFamily="34" charset="-122"/>
                 <a:cs typeface="Calibri" pitchFamily="34" charset="-120"/>
               </a:rPr>
-              <a:t>Naming conventions — type/short-description, lowercase with hyphens</a:t>
+              <a:t>name/type/short-description — name first in team repos, lowercase with hyphens</a:t>
             </a:r>
             <a:endParaRPr lang="en-US" sz="1400" dirty="0"/>
           </a:p>
@@ -7837,7 +7926,7 @@
                 <a:ea typeface="Consolas" pitchFamily="34" charset="-122"/>
                 <a:cs typeface="Consolas" pitchFamily="34" charset="-120"/>
               </a:rPr>
-              <a:t>feature/user-profile</a:t>
+              <a:t>karen/feature/user-profile</a:t>
             </a:r>
             <a:endParaRPr lang="en-US" sz="1200" dirty="0"/>
           </a:p>
@@ -8045,7 +8134,7 @@
                 <a:ea typeface="Consolas" pitchFamily="34" charset="-122"/>
                 <a:cs typeface="Consolas" pitchFamily="34" charset="-120"/>
               </a:rPr>
-              <a:t>fix/carousel-overflow</a:t>
+              <a:t>kevin/fix/carousel-overflow</a:t>
             </a:r>
             <a:endParaRPr lang="en-US" sz="1200" dirty="0"/>
           </a:p>
@@ -8253,7 +8342,7 @@
                 <a:ea typeface="Consolas" pitchFamily="34" charset="-122"/>
                 <a:cs typeface="Consolas" pitchFamily="34" charset="-120"/>
               </a:rPr>
-              <a:t>experiment/dark-mode-test</a:t>
+              <a:t>shuhan/experiment/dark-mode-test</a:t>
             </a:r>
             <a:endParaRPr lang="en-US" sz="1200" dirty="0"/>
           </a:p>
@@ -8461,9 +8550,114 @@
                 <a:ea typeface="Consolas" pitchFamily="34" charset="-122"/>
                 <a:cs typeface="Consolas" pitchFamily="34" charset="-120"/>
               </a:rPr>
-              <a:t>refactor/component-structure</a:t>
+              <a:t>peter/refactor/component-structure</a:t>
             </a:r>
             <a:endParaRPr lang="en-US" sz="1200" dirty="0"/>
+          </a:p>
+        </p:txBody>
+      </p:sp>
+      <p:sp>
+        <p:nvSpPr>
+          <p:cNvPr id="29" name="Shape 27"/>
+          <p:cNvSpPr/>
+          <p:nvPr/>
+        </p:nvSpPr>
+        <p:spPr>
+          <a:xfrm>
+            <a:off x="548640" y="5349240"/>
+            <a:ext cx="8229600" cy="594360"/>
+          </a:xfrm>
+          <a:prstGeom prst="roundRect">
+            <a:avLst>
+              <a:gd name="adj" fmla="val 7692"/>
+            </a:avLst>
+          </a:prstGeom>
+          <a:solidFill>
+            <a:srgbClr val="DBEAFE"/>
+          </a:solidFill>
+          <a:ln w="12700">
+            <a:solidFill>
+              <a:srgbClr val="DBEAFE"/>
+            </a:solidFill>
+            <a:prstDash val="solid"/>
+          </a:ln>
+        </p:spPr>
+      </p:sp>
+      <p:sp>
+        <p:nvSpPr>
+          <p:cNvPr id="30" name="Text 28"/>
+          <p:cNvSpPr/>
+          <p:nvPr/>
+        </p:nvSpPr>
+        <p:spPr>
+          <a:xfrm>
+            <a:off x="777240" y="5394960"/>
+            <a:ext cx="7772400" cy="274320"/>
+          </a:xfrm>
+          <a:prstGeom prst="rect">
+            <a:avLst/>
+          </a:prstGeom>
+          <a:noFill/>
+          <a:ln/>
+        </p:spPr>
+        <p:txBody>
+          <a:bodyPr wrap="square" lIns="0" tIns="0" rIns="0" bIns="0" rtlCol="0" anchor="ctr"/>
+          <a:lstStyle/>
+          <a:p>
+            <a:pPr algn="l" indent="0" marL="0">
+              <a:buNone/>
+            </a:pPr>
+            <a:r>
+              <a:rPr lang="en-US" sz="1150" b="1" dirty="0">
+                <a:solidFill>
+                  <a:srgbClr val="1A66FF"/>
+                </a:solidFill>
+                <a:latin typeface="Calibri" pitchFamily="34" charset="0"/>
+                <a:ea typeface="Calibri" pitchFamily="34" charset="-122"/>
+                <a:cs typeface="Calibri" pitchFamily="34" charset="-120"/>
+              </a:rPr>
+              <a:t>團隊 repo 把自己名字放最前面，避免和別人撞名、也方便 review 時一眼認出是誰的 branch</a:t>
+            </a:r>
+            <a:endParaRPr lang="en-US" sz="1150" dirty="0"/>
+          </a:p>
+        </p:txBody>
+      </p:sp>
+      <p:sp>
+        <p:nvSpPr>
+          <p:cNvPr id="31" name="Text 29"/>
+          <p:cNvSpPr/>
+          <p:nvPr/>
+        </p:nvSpPr>
+        <p:spPr>
+          <a:xfrm>
+            <a:off x="777240" y="5669280"/>
+            <a:ext cx="7772400" cy="256032"/>
+          </a:xfrm>
+          <a:prstGeom prst="rect">
+            <a:avLst/>
+          </a:prstGeom>
+          <a:noFill/>
+          <a:ln/>
+        </p:spPr>
+        <p:txBody>
+          <a:bodyPr wrap="square" lIns="0" tIns="0" rIns="0" bIns="0" rtlCol="0" anchor="ctr"/>
+          <a:lstStyle/>
+          <a:p>
+            <a:pPr algn="l" indent="0" marL="0">
+              <a:buNone/>
+            </a:pPr>
+            <a:r>
+              <a:rPr lang="en-US" sz="1000" dirty="0">
+                <a:solidFill>
+                  <a:srgbClr val="6B7280"/>
+                </a:solidFill>
+                <a:latin typeface="Calibri" pitchFamily="34" charset="0"/>
+                <a:ea typeface="Calibri" pitchFamily="34" charset="-122"/>
+                <a:cs typeface="Calibri" pitchFamily="34" charset="-120"/>
+              </a:rPr>
+              <a:t>In team repos, put your name first — prevents name clashes and makes ownership obvious during review.</a:t>
+            </a:r>
+            <a:endParaRPr lang="en-US" sz="1000" dirty="0"/>
           </a:p>
         </p:txBody>
       </p:sp>
@@ -12234,7 +12428,7 @@
     <p:bg>
       <p:bgPr>
         <a:solidFill>
-          <a:srgbClr val="F8FAFC"/>
+          <a:srgbClr val="EAF2FF"/>
         </a:solidFill>
       </p:bgPr>
     </p:bg>
@@ -12285,7 +12479,7 @@
                 <a:ea typeface="Calibri" pitchFamily="34" charset="-122"/>
                 <a:cs typeface="Calibri" pitchFamily="34" charset="-120"/>
               </a:rPr>
-              <a:t>ADVANCED CONCEPT</a:t>
+              <a:t>PART 2 · PUSH REJECTED</a:t>
             </a:r>
             <a:endParaRPr lang="en-US" sz="1000" dirty="0"/>
           </a:p>
@@ -12324,7 +12518,7 @@
                 <a:ea typeface="Calibri" pitchFamily="34" charset="-122"/>
                 <a:cs typeface="Calibri" pitchFamily="34" charset="-120"/>
               </a:rPr>
-              <a:t>Rebase ≠ Merge</a:t>
+              <a:t>如果 push 被擋了，怎麼辦？</a:t>
             </a:r>
             <a:endParaRPr lang="en-US" sz="3000" dirty="0"/>
           </a:p>
@@ -12363,7 +12557,7 @@
                 <a:ea typeface="Calibri" pitchFamily="34" charset="-122"/>
                 <a:cs typeface="Calibri" pitchFamily="34" charset="-120"/>
               </a:rPr>
-              <a:t>Two ways to bring in main's latest changes</a:t>
+              <a:t>When commit &amp; push gets rejected</a:t>
             </a:r>
             <a:endParaRPr lang="en-US" sz="1400" dirty="0"/>
           </a:p>
@@ -12371,182 +12565,287 @@
       </p:sp>
       <p:sp>
         <p:nvSpPr>
-          <p:cNvPr id="5" name="Text 3"/>
-          <p:cNvSpPr/>
-          <p:nvPr/>
-        </p:nvSpPr>
-        <p:spPr>
-          <a:xfrm>
-            <a:off x="548640" y="1691640"/>
-            <a:ext cx="8229600" cy="274320"/>
-          </a:xfrm>
-          <a:prstGeom prst="rect">
-            <a:avLst/>
-          </a:prstGeom>
-          <a:noFill/>
-          <a:ln/>
-        </p:spPr>
-        <p:txBody>
-          <a:bodyPr wrap="square" lIns="0" tIns="0" rIns="0" bIns="0" rtlCol="0" anchor="ctr"/>
-          <a:lstStyle/>
-          <a:p>
-            <a:pPr algn="l" indent="0" marL="0">
-              <a:buNone/>
-            </a:pPr>
-            <a:r>
-              <a:rPr lang="en-US" sz="1400" b="1" dirty="0">
-                <a:solidFill>
-                  <a:srgbClr val="1A66FF"/>
-                </a:solidFill>
-                <a:latin typeface="Calibri" pitchFamily="34" charset="0"/>
-                <a:ea typeface="Calibri" pitchFamily="34" charset="-122"/>
-                <a:cs typeface="Calibri" pitchFamily="34" charset="-120"/>
-              </a:rPr>
-              <a:t>把我的 commit「重做一次」，接到 main 最新位置上</a:t>
-            </a:r>
-            <a:endParaRPr lang="en-US" sz="1400" dirty="0"/>
-          </a:p>
-        </p:txBody>
-      </p:sp>
-      <p:sp>
-        <p:nvSpPr>
-          <p:cNvPr id="6" name="Text 4"/>
-          <p:cNvSpPr/>
-          <p:nvPr/>
-        </p:nvSpPr>
-        <p:spPr>
-          <a:xfrm>
-            <a:off x="548640" y="1965960"/>
-            <a:ext cx="8229600" cy="219456"/>
-          </a:xfrm>
-          <a:prstGeom prst="rect">
-            <a:avLst/>
-          </a:prstGeom>
-          <a:noFill/>
-          <a:ln/>
-        </p:spPr>
-        <p:txBody>
-          <a:bodyPr wrap="square" lIns="0" tIns="0" rIns="0" bIns="0" rtlCol="0" anchor="ctr"/>
-          <a:lstStyle/>
-          <a:p>
-            <a:pPr algn="l" indent="0" marL="0">
-              <a:buNone/>
-            </a:pPr>
-            <a:r>
-              <a:rPr lang="en-US" sz="1100" i="1" dirty="0">
-                <a:solidFill>
-                  <a:srgbClr val="6B7280"/>
-                </a:solidFill>
-                <a:latin typeface="Calibri" pitchFamily="34" charset="0"/>
-                <a:ea typeface="Calibri" pitchFamily="34" charset="-122"/>
-                <a:cs typeface="Calibri" pitchFamily="34" charset="-120"/>
-              </a:rPr>
-              <a:t>Replay my commits onto the latest main</a:t>
-            </a:r>
-            <a:endParaRPr lang="en-US" sz="1100" dirty="0"/>
-          </a:p>
-        </p:txBody>
-      </p:sp>
-      <p:sp>
-        <p:nvSpPr>
-          <p:cNvPr id="7" name="Text 5"/>
-          <p:cNvSpPr/>
-          <p:nvPr/>
-        </p:nvSpPr>
-        <p:spPr>
-          <a:xfrm>
-            <a:off x="548640" y="2377440"/>
-            <a:ext cx="4023360" cy="256032"/>
-          </a:xfrm>
-          <a:prstGeom prst="rect">
-            <a:avLst/>
-          </a:prstGeom>
-          <a:noFill/>
-          <a:ln/>
-        </p:spPr>
-        <p:txBody>
-          <a:bodyPr wrap="square" lIns="0" tIns="0" rIns="0" bIns="0" rtlCol="0" anchor="ctr"/>
-          <a:lstStyle/>
-          <a:p>
-            <a:pPr algn="l" indent="0" marL="0">
-              <a:buNone/>
-            </a:pPr>
-            <a:r>
-              <a:rPr lang="en-US" sz="1300" b="1" dirty="0">
-                <a:solidFill>
-                  <a:srgbClr val="111827"/>
-                </a:solidFill>
-                <a:latin typeface="Calibri" pitchFamily="34" charset="0"/>
-                <a:ea typeface="Calibri" pitchFamily="34" charset="-122"/>
-                <a:cs typeface="Calibri" pitchFamily="34" charset="-120"/>
-              </a:rPr>
-              <a:t>Merge — 保留分岔歷史</a:t>
-            </a:r>
-            <a:endParaRPr lang="en-US" sz="1300" dirty="0"/>
-          </a:p>
-        </p:txBody>
-      </p:sp>
-      <p:sp>
-        <p:nvSpPr>
-          <p:cNvPr id="8" name="Text 6"/>
-          <p:cNvSpPr/>
-          <p:nvPr/>
-        </p:nvSpPr>
-        <p:spPr>
-          <a:xfrm>
-            <a:off x="548640" y="2615184"/>
-            <a:ext cx="4023360" cy="201168"/>
-          </a:xfrm>
-          <a:prstGeom prst="rect">
-            <a:avLst/>
-          </a:prstGeom>
-          <a:noFill/>
-          <a:ln/>
-        </p:spPr>
-        <p:txBody>
-          <a:bodyPr wrap="square" lIns="0" tIns="0" rIns="0" bIns="0" rtlCol="0" anchor="ctr"/>
-          <a:lstStyle/>
-          <a:p>
-            <a:pPr algn="l" indent="0" marL="0">
-              <a:buNone/>
-            </a:pPr>
-            <a:r>
-              <a:rPr lang="en-US" sz="1000" dirty="0">
-                <a:solidFill>
-                  <a:srgbClr val="6B7280"/>
-                </a:solidFill>
-                <a:latin typeface="Calibri" pitchFamily="34" charset="0"/>
-                <a:ea typeface="Calibri" pitchFamily="34" charset="-122"/>
-                <a:cs typeface="Calibri" pitchFamily="34" charset="-120"/>
-              </a:rPr>
-              <a:t>Keeps the branch history</a:t>
-            </a:r>
-            <a:endParaRPr lang="en-US" sz="1000" dirty="0"/>
-          </a:p>
-        </p:txBody>
-      </p:sp>
-      <p:sp>
-        <p:nvSpPr>
-          <p:cNvPr id="9" name="Shape 7"/>
-          <p:cNvSpPr/>
-          <p:nvPr/>
-        </p:nvSpPr>
-        <p:spPr>
-          <a:xfrm>
-            <a:off x="548640" y="2880360"/>
-            <a:ext cx="4023360" cy="1371600"/>
+          <p:cNvPr id="5" name="Shape 3"/>
+          <p:cNvSpPr/>
+          <p:nvPr/>
+        </p:nvSpPr>
+        <p:spPr>
+          <a:xfrm>
+            <a:off x="914400" y="1920240"/>
+            <a:ext cx="7315200" cy="1371600"/>
           </a:xfrm>
           <a:prstGeom prst="roundRect">
             <a:avLst>
-              <a:gd name="adj" fmla="val 3333"/>
+              <a:gd name="adj" fmla="val 4000"/>
             </a:avLst>
           </a:prstGeom>
           <a:solidFill>
-            <a:srgbClr val="F3F4F6"/>
+            <a:srgbClr val="1F2937"/>
+          </a:solidFill>
+          <a:ln w="12700">
+            <a:solidFill>
+              <a:srgbClr val="1F2937"/>
+            </a:solidFill>
+            <a:prstDash val="solid"/>
+          </a:ln>
+        </p:spPr>
+      </p:sp>
+      <p:sp>
+        <p:nvSpPr>
+          <p:cNvPr id="6" name="Text 4"/>
+          <p:cNvSpPr/>
+          <p:nvPr/>
+        </p:nvSpPr>
+        <p:spPr>
+          <a:xfrm>
+            <a:off x="1143000" y="2011680"/>
+            <a:ext cx="6858000" cy="256032"/>
+          </a:xfrm>
+          <a:prstGeom prst="rect">
+            <a:avLst/>
+          </a:prstGeom>
+          <a:noFill/>
+          <a:ln/>
+        </p:spPr>
+        <p:txBody>
+          <a:bodyPr wrap="square" lIns="0" tIns="0" rIns="0" bIns="0" rtlCol="0" anchor="ctr"/>
+          <a:lstStyle/>
+          <a:p>
+            <a:pPr algn="l" indent="0" marL="0">
+              <a:buNone/>
+            </a:pPr>
+            <a:r>
+              <a:rPr lang="en-US" sz="1200" dirty="0">
+                <a:solidFill>
+                  <a:srgbClr val="9CA3AF"/>
+                </a:solidFill>
+                <a:latin typeface="Consolas" pitchFamily="34" charset="0"/>
+                <a:ea typeface="Consolas" pitchFamily="34" charset="-122"/>
+                <a:cs typeface="Consolas" pitchFamily="34" charset="-120"/>
+              </a:rPr>
+              <a:t>$ git push</a:t>
+            </a:r>
+            <a:endParaRPr lang="en-US" sz="1200" dirty="0"/>
+          </a:p>
+        </p:txBody>
+      </p:sp>
+      <p:sp>
+        <p:nvSpPr>
+          <p:cNvPr id="7" name="Text 5"/>
+          <p:cNvSpPr/>
+          <p:nvPr/>
+        </p:nvSpPr>
+        <p:spPr>
+          <a:xfrm>
+            <a:off x="1143000" y="2331720"/>
+            <a:ext cx="6858000" cy="274320"/>
+          </a:xfrm>
+          <a:prstGeom prst="rect">
+            <a:avLst/>
+          </a:prstGeom>
+          <a:noFill/>
+          <a:ln/>
+        </p:spPr>
+        <p:txBody>
+          <a:bodyPr wrap="square" lIns="0" tIns="0" rIns="0" bIns="0" rtlCol="0" anchor="ctr"/>
+          <a:lstStyle/>
+          <a:p>
+            <a:pPr algn="l" indent="0" marL="0">
+              <a:buNone/>
+            </a:pPr>
+            <a:r>
+              <a:rPr lang="en-US" sz="1300" b="1" dirty="0">
+                <a:solidFill>
+                  <a:srgbClr val="FCA5A5"/>
+                </a:solidFill>
+                <a:latin typeface="Consolas" pitchFamily="34" charset="0"/>
+                <a:ea typeface="Consolas" pitchFamily="34" charset="-122"/>
+                <a:cs typeface="Consolas" pitchFamily="34" charset="-120"/>
+              </a:rPr>
+              <a:t>! [rejected]    main -&gt; main (non-fast-forward)</a:t>
+            </a:r>
+            <a:endParaRPr lang="en-US" sz="1300" dirty="0"/>
+          </a:p>
+        </p:txBody>
+      </p:sp>
+      <p:sp>
+        <p:nvSpPr>
+          <p:cNvPr id="8" name="Text 6"/>
+          <p:cNvSpPr/>
+          <p:nvPr/>
+        </p:nvSpPr>
+        <p:spPr>
+          <a:xfrm>
+            <a:off x="1143000" y="2670048"/>
+            <a:ext cx="6858000" cy="237744"/>
+          </a:xfrm>
+          <a:prstGeom prst="rect">
+            <a:avLst/>
+          </a:prstGeom>
+          <a:noFill/>
+          <a:ln/>
+        </p:spPr>
+        <p:txBody>
+          <a:bodyPr wrap="square" lIns="0" tIns="0" rIns="0" bIns="0" rtlCol="0" anchor="ctr"/>
+          <a:lstStyle/>
+          <a:p>
+            <a:pPr algn="l" indent="0" marL="0">
+              <a:buNone/>
+            </a:pPr>
+            <a:r>
+              <a:rPr lang="en-US" sz="1100" dirty="0">
+                <a:solidFill>
+                  <a:srgbClr val="D1D5DB"/>
+                </a:solidFill>
+                <a:latin typeface="Consolas" pitchFamily="34" charset="0"/>
+                <a:ea typeface="Consolas" pitchFamily="34" charset="-122"/>
+                <a:cs typeface="Consolas" pitchFamily="34" charset="-120"/>
+              </a:rPr>
+              <a:t>hint: Updates were rejected because the remote contains work</a:t>
+            </a:r>
+            <a:endParaRPr lang="en-US" sz="1100" dirty="0"/>
+          </a:p>
+        </p:txBody>
+      </p:sp>
+      <p:sp>
+        <p:nvSpPr>
+          <p:cNvPr id="9" name="Text 7"/>
+          <p:cNvSpPr/>
+          <p:nvPr/>
+        </p:nvSpPr>
+        <p:spPr>
+          <a:xfrm>
+            <a:off x="1143000" y="2907792"/>
+            <a:ext cx="6858000" cy="237744"/>
+          </a:xfrm>
+          <a:prstGeom prst="rect">
+            <a:avLst/>
+          </a:prstGeom>
+          <a:noFill/>
+          <a:ln/>
+        </p:spPr>
+        <p:txBody>
+          <a:bodyPr wrap="square" lIns="0" tIns="0" rIns="0" bIns="0" rtlCol="0" anchor="ctr"/>
+          <a:lstStyle/>
+          <a:p>
+            <a:pPr algn="l" indent="0" marL="0">
+              <a:buNone/>
+            </a:pPr>
+            <a:r>
+              <a:rPr lang="en-US" sz="1100" dirty="0">
+                <a:solidFill>
+                  <a:srgbClr val="D1D5DB"/>
+                </a:solidFill>
+                <a:latin typeface="Consolas" pitchFamily="34" charset="0"/>
+                <a:ea typeface="Consolas" pitchFamily="34" charset="-122"/>
+                <a:cs typeface="Consolas" pitchFamily="34" charset="-120"/>
+              </a:rPr>
+              <a:t>      that you do not have locally.</a:t>
+            </a:r>
+            <a:endParaRPr lang="en-US" sz="1100" dirty="0"/>
+          </a:p>
+        </p:txBody>
+      </p:sp>
+      <p:sp>
+        <p:nvSpPr>
+          <p:cNvPr id="10" name="Text 8"/>
+          <p:cNvSpPr/>
+          <p:nvPr/>
+        </p:nvSpPr>
+        <p:spPr>
+          <a:xfrm>
+            <a:off x="548640" y="3657600"/>
+            <a:ext cx="8229600" cy="329184"/>
+          </a:xfrm>
+          <a:prstGeom prst="rect">
+            <a:avLst/>
+          </a:prstGeom>
+          <a:noFill/>
+          <a:ln/>
+        </p:spPr>
+        <p:txBody>
+          <a:bodyPr wrap="square" lIns="0" tIns="0" rIns="0" bIns="0" rtlCol="0" anchor="ctr"/>
+          <a:lstStyle/>
+          <a:p>
+            <a:pPr algn="l" indent="0" marL="0">
+              <a:buNone/>
+            </a:pPr>
+            <a:r>
+              <a:rPr lang="en-US" sz="1600" b="1" dirty="0">
+                <a:solidFill>
+                  <a:srgbClr val="111827"/>
+                </a:solidFill>
+                <a:latin typeface="Calibri" pitchFamily="34" charset="0"/>
+                <a:ea typeface="Calibri" pitchFamily="34" charset="-122"/>
+                <a:cs typeface="Calibri" pitchFamily="34" charset="-120"/>
+              </a:rPr>
+              <a:t>這不是失敗——是 Git 在保護你不要蓋掉別人剛 push 的東西</a:t>
+            </a:r>
+            <a:endParaRPr lang="en-US" sz="1600" dirty="0"/>
+          </a:p>
+        </p:txBody>
+      </p:sp>
+      <p:sp>
+        <p:nvSpPr>
+          <p:cNvPr id="11" name="Text 9"/>
+          <p:cNvSpPr/>
+          <p:nvPr/>
+        </p:nvSpPr>
+        <p:spPr>
+          <a:xfrm>
+            <a:off x="548640" y="4005072"/>
+            <a:ext cx="8229600" cy="237744"/>
+          </a:xfrm>
+          <a:prstGeom prst="rect">
+            <a:avLst/>
+          </a:prstGeom>
+          <a:noFill/>
+          <a:ln/>
+        </p:spPr>
+        <p:txBody>
+          <a:bodyPr wrap="square" lIns="0" tIns="0" rIns="0" bIns="0" rtlCol="0" anchor="ctr"/>
+          <a:lstStyle/>
+          <a:p>
+            <a:pPr algn="l" indent="0" marL="0">
+              <a:buNone/>
+            </a:pPr>
+            <a:r>
+              <a:rPr lang="en-US" sz="1100" i="1" dirty="0">
+                <a:solidFill>
+                  <a:srgbClr val="6B7280"/>
+                </a:solidFill>
+                <a:latin typeface="Calibri" pitchFamily="34" charset="0"/>
+                <a:ea typeface="Calibri" pitchFamily="34" charset="-122"/>
+                <a:cs typeface="Calibri" pitchFamily="34" charset="-120"/>
+              </a:rPr>
+              <a:t>This isn't failure — it's Git protecting you from overwriting others</a:t>
+            </a:r>
+            <a:endParaRPr lang="en-US" sz="1100" dirty="0"/>
+          </a:p>
+        </p:txBody>
+      </p:sp>
+      <p:sp>
+        <p:nvSpPr>
+          <p:cNvPr id="12" name="Shape 10"/>
+          <p:cNvSpPr/>
+          <p:nvPr/>
+        </p:nvSpPr>
+        <p:spPr>
+          <a:xfrm>
+            <a:off x="548640" y="4617720"/>
+            <a:ext cx="8229600" cy="868680"/>
+          </a:xfrm>
+          <a:prstGeom prst="roundRect">
+            <a:avLst>
+              <a:gd name="adj" fmla="val 6316"/>
+            </a:avLst>
+          </a:prstGeom>
+          <a:solidFill>
+            <a:srgbClr val="DBEAFE"/>
           </a:solidFill>
           <a:ln w="9525">
             <a:solidFill>
-              <a:srgbClr val="E5E7EB"/>
+              <a:srgbClr val="93C5FD"/>
             </a:solidFill>
             <a:prstDash val="solid"/>
           </a:ln>
@@ -12554,338 +12853,24 @@
       </p:sp>
       <p:sp>
         <p:nvSpPr>
-          <p:cNvPr id="10" name="Text 8"/>
-          <p:cNvSpPr/>
-          <p:nvPr/>
-        </p:nvSpPr>
-        <p:spPr>
-          <a:xfrm>
-            <a:off x="731520" y="3017520"/>
-            <a:ext cx="731520" cy="228600"/>
-          </a:xfrm>
-          <a:prstGeom prst="rect">
-            <a:avLst/>
-          </a:prstGeom>
-          <a:noFill/>
-          <a:ln/>
-        </p:spPr>
-        <p:txBody>
-          <a:bodyPr wrap="square" lIns="0" tIns="0" rIns="0" bIns="0" rtlCol="0" anchor="ctr"/>
-          <a:lstStyle/>
-          <a:p>
-            <a:pPr algn="l" indent="0" marL="0">
-              <a:buNone/>
-            </a:pPr>
-            <a:r>
-              <a:rPr lang="en-US" sz="1100" dirty="0">
-                <a:solidFill>
-                  <a:srgbClr val="6B7280"/>
-                </a:solidFill>
-                <a:latin typeface="Consolas" pitchFamily="34" charset="0"/>
-                <a:ea typeface="Consolas" pitchFamily="34" charset="-122"/>
-                <a:cs typeface="Consolas" pitchFamily="34" charset="-120"/>
-              </a:rPr>
-              <a:t>main:</a:t>
-            </a:r>
-            <a:endParaRPr lang="en-US" sz="1100" dirty="0"/>
-          </a:p>
-        </p:txBody>
-      </p:sp>
-      <p:sp>
-        <p:nvSpPr>
-          <p:cNvPr id="11" name="Text 9"/>
-          <p:cNvSpPr/>
-          <p:nvPr/>
-        </p:nvSpPr>
-        <p:spPr>
-          <a:xfrm>
-            <a:off x="1371600" y="3017520"/>
-            <a:ext cx="3108960" cy="228600"/>
-          </a:xfrm>
-          <a:prstGeom prst="rect">
-            <a:avLst/>
-          </a:prstGeom>
-          <a:noFill/>
-          <a:ln/>
-        </p:spPr>
-        <p:txBody>
-          <a:bodyPr wrap="square" lIns="0" tIns="0" rIns="0" bIns="0" rtlCol="0" anchor="ctr"/>
-          <a:lstStyle/>
-          <a:p>
-            <a:pPr algn="l" indent="0" marL="0">
-              <a:buNone/>
-            </a:pPr>
-            <a:r>
-              <a:rPr lang="en-US" sz="1400" dirty="0">
-                <a:solidFill>
-                  <a:srgbClr val="1A66FF"/>
-                </a:solidFill>
-                <a:latin typeface="Consolas" pitchFamily="34" charset="0"/>
-                <a:ea typeface="Consolas" pitchFamily="34" charset="-122"/>
-                <a:cs typeface="Consolas" pitchFamily="34" charset="-120"/>
-              </a:rPr>
-              <a:t>● ── ● ── ● ── ●         ◆</a:t>
-            </a:r>
-            <a:endParaRPr lang="en-US" sz="1400" dirty="0"/>
-          </a:p>
-        </p:txBody>
-      </p:sp>
-      <p:sp>
-        <p:nvSpPr>
-          <p:cNvPr id="12" name="Text 10"/>
-          <p:cNvSpPr/>
-          <p:nvPr/>
-        </p:nvSpPr>
-        <p:spPr>
-          <a:xfrm>
-            <a:off x="731520" y="3520440"/>
-            <a:ext cx="731520" cy="228600"/>
-          </a:xfrm>
-          <a:prstGeom prst="rect">
-            <a:avLst/>
-          </a:prstGeom>
-          <a:noFill/>
-          <a:ln/>
-        </p:spPr>
-        <p:txBody>
-          <a:bodyPr wrap="square" lIns="0" tIns="0" rIns="0" bIns="0" rtlCol="0" anchor="ctr"/>
-          <a:lstStyle/>
-          <a:p>
-            <a:pPr algn="l" indent="0" marL="0">
-              <a:buNone/>
-            </a:pPr>
-            <a:r>
-              <a:rPr lang="en-US" sz="1100" dirty="0">
-                <a:solidFill>
-                  <a:srgbClr val="6B7280"/>
-                </a:solidFill>
-                <a:latin typeface="Consolas" pitchFamily="34" charset="0"/>
-                <a:ea typeface="Consolas" pitchFamily="34" charset="-122"/>
-                <a:cs typeface="Consolas" pitchFamily="34" charset="-120"/>
-              </a:rPr>
-              <a:t>branch:</a:t>
-            </a:r>
-            <a:endParaRPr lang="en-US" sz="1100" dirty="0"/>
-          </a:p>
-        </p:txBody>
-      </p:sp>
-      <p:sp>
-        <p:nvSpPr>
-          <p:cNvPr id="13" name="Text 11"/>
-          <p:cNvSpPr/>
-          <p:nvPr/>
-        </p:nvSpPr>
-        <p:spPr>
-          <a:xfrm>
-            <a:off x="1371600" y="3310128"/>
-            <a:ext cx="3108960" cy="201168"/>
-          </a:xfrm>
-          <a:prstGeom prst="rect">
-            <a:avLst/>
-          </a:prstGeom>
-          <a:noFill/>
-          <a:ln/>
-        </p:spPr>
-        <p:txBody>
-          <a:bodyPr wrap="square" lIns="0" tIns="0" rIns="0" bIns="0" rtlCol="0" anchor="ctr"/>
-          <a:lstStyle/>
-          <a:p>
-            <a:pPr algn="l" indent="0" marL="0">
-              <a:buNone/>
-            </a:pPr>
-            <a:r>
-              <a:rPr lang="en-US" sz="1300" dirty="0">
-                <a:solidFill>
-                  <a:srgbClr val="9CA3AF"/>
-                </a:solidFill>
-                <a:latin typeface="Consolas" pitchFamily="34" charset="0"/>
-                <a:ea typeface="Consolas" pitchFamily="34" charset="-122"/>
-                <a:cs typeface="Consolas" pitchFamily="34" charset="-120"/>
-              </a:rPr>
-              <a:t>    ╲             ╱</a:t>
-            </a:r>
-            <a:endParaRPr lang="en-US" sz="1300" dirty="0"/>
-          </a:p>
-        </p:txBody>
-      </p:sp>
-      <p:sp>
-        <p:nvSpPr>
-          <p:cNvPr id="14" name="Text 12"/>
-          <p:cNvSpPr/>
-          <p:nvPr/>
-        </p:nvSpPr>
-        <p:spPr>
-          <a:xfrm>
-            <a:off x="1371600" y="3520440"/>
-            <a:ext cx="3108960" cy="228600"/>
-          </a:xfrm>
-          <a:prstGeom prst="rect">
-            <a:avLst/>
-          </a:prstGeom>
-          <a:noFill/>
-          <a:ln/>
-        </p:spPr>
-        <p:txBody>
-          <a:bodyPr wrap="square" lIns="0" tIns="0" rIns="0" bIns="0" rtlCol="0" anchor="ctr"/>
-          <a:lstStyle/>
-          <a:p>
-            <a:pPr algn="l" indent="0" marL="0">
-              <a:buNone/>
-            </a:pPr>
-            <a:r>
-              <a:rPr lang="en-US" sz="1400" dirty="0">
-                <a:solidFill>
-                  <a:srgbClr val="8B5CF6"/>
-                </a:solidFill>
-                <a:latin typeface="Consolas" pitchFamily="34" charset="0"/>
-                <a:ea typeface="Consolas" pitchFamily="34" charset="-122"/>
-                <a:cs typeface="Consolas" pitchFamily="34" charset="-120"/>
-              </a:rPr>
-              <a:t>       F ── G ──</a:t>
-            </a:r>
-            <a:endParaRPr lang="en-US" sz="1400" dirty="0"/>
-          </a:p>
-        </p:txBody>
-      </p:sp>
-      <p:sp>
-        <p:nvSpPr>
-          <p:cNvPr id="15" name="Text 13"/>
-          <p:cNvSpPr/>
-          <p:nvPr/>
-        </p:nvSpPr>
-        <p:spPr>
-          <a:xfrm>
-            <a:off x="731520" y="3886200"/>
-            <a:ext cx="3657600" cy="228600"/>
-          </a:xfrm>
-          <a:prstGeom prst="rect">
-            <a:avLst/>
-          </a:prstGeom>
-          <a:noFill/>
-          <a:ln/>
-        </p:spPr>
-        <p:txBody>
-          <a:bodyPr wrap="square" lIns="0" tIns="0" rIns="0" bIns="0" rtlCol="0" anchor="ctr"/>
-          <a:lstStyle/>
-          <a:p>
-            <a:pPr algn="l" indent="0" marL="0">
-              <a:buNone/>
-            </a:pPr>
-            <a:r>
-              <a:rPr lang="en-US" sz="1000" i="1" dirty="0">
-                <a:solidFill>
-                  <a:srgbClr val="6B7280"/>
-                </a:solidFill>
-                <a:latin typeface="Calibri" pitchFamily="34" charset="0"/>
-                <a:ea typeface="Calibri" pitchFamily="34" charset="-122"/>
-                <a:cs typeface="Calibri" pitchFamily="34" charset="-120"/>
-              </a:rPr>
-              <a:t>◆ = merge commit（多一個節點）</a:t>
-            </a:r>
-            <a:endParaRPr lang="en-US" sz="1000" dirty="0"/>
-          </a:p>
-        </p:txBody>
-      </p:sp>
-      <p:sp>
-        <p:nvSpPr>
-          <p:cNvPr id="16" name="Text 14"/>
-          <p:cNvSpPr/>
-          <p:nvPr/>
-        </p:nvSpPr>
-        <p:spPr>
-          <a:xfrm>
-            <a:off x="4754880" y="2377440"/>
-            <a:ext cx="4023360" cy="256032"/>
-          </a:xfrm>
-          <a:prstGeom prst="rect">
-            <a:avLst/>
-          </a:prstGeom>
-          <a:noFill/>
-          <a:ln/>
-        </p:spPr>
-        <p:txBody>
-          <a:bodyPr wrap="square" lIns="0" tIns="0" rIns="0" bIns="0" rtlCol="0" anchor="ctr"/>
-          <a:lstStyle/>
-          <a:p>
-            <a:pPr algn="l" indent="0" marL="0">
-              <a:buNone/>
-            </a:pPr>
-            <a:r>
-              <a:rPr lang="en-US" sz="1300" b="1" dirty="0">
-                <a:solidFill>
-                  <a:srgbClr val="111827"/>
-                </a:solidFill>
-                <a:latin typeface="Calibri" pitchFamily="34" charset="0"/>
-                <a:ea typeface="Calibri" pitchFamily="34" charset="-122"/>
-                <a:cs typeface="Calibri" pitchFamily="34" charset="-120"/>
-              </a:rPr>
-              <a:t>Rebase — 拉成一條直線</a:t>
-            </a:r>
-            <a:endParaRPr lang="en-US" sz="1300" dirty="0"/>
-          </a:p>
-        </p:txBody>
-      </p:sp>
-      <p:sp>
-        <p:nvSpPr>
-          <p:cNvPr id="17" name="Text 15"/>
-          <p:cNvSpPr/>
-          <p:nvPr/>
-        </p:nvSpPr>
-        <p:spPr>
-          <a:xfrm>
-            <a:off x="4754880" y="2615184"/>
-            <a:ext cx="4023360" cy="201168"/>
-          </a:xfrm>
-          <a:prstGeom prst="rect">
-            <a:avLst/>
-          </a:prstGeom>
-          <a:noFill/>
-          <a:ln/>
-        </p:spPr>
-        <p:txBody>
-          <a:bodyPr wrap="square" lIns="0" tIns="0" rIns="0" bIns="0" rtlCol="0" anchor="ctr"/>
-          <a:lstStyle/>
-          <a:p>
-            <a:pPr algn="l" indent="0" marL="0">
-              <a:buNone/>
-            </a:pPr>
-            <a:r>
-              <a:rPr lang="en-US" sz="1000" dirty="0">
-                <a:solidFill>
-                  <a:srgbClr val="6B7280"/>
-                </a:solidFill>
-                <a:latin typeface="Calibri" pitchFamily="34" charset="0"/>
-                <a:ea typeface="Calibri" pitchFamily="34" charset="-122"/>
-                <a:cs typeface="Calibri" pitchFamily="34" charset="-120"/>
-              </a:rPr>
-              <a:t>Rewrites into a clean line</a:t>
-            </a:r>
-            <a:endParaRPr lang="en-US" sz="1000" dirty="0"/>
-          </a:p>
-        </p:txBody>
-      </p:sp>
-      <p:sp>
-        <p:nvSpPr>
-          <p:cNvPr id="18" name="Shape 16"/>
-          <p:cNvSpPr/>
-          <p:nvPr/>
-        </p:nvSpPr>
-        <p:spPr>
-          <a:xfrm>
-            <a:off x="4754880" y="2880360"/>
-            <a:ext cx="4023360" cy="1371600"/>
-          </a:xfrm>
-          <a:prstGeom prst="roundRect">
-            <a:avLst>
-              <a:gd name="adj" fmla="val 3333"/>
-            </a:avLst>
+          <p:cNvPr id="13" name="Shape 11"/>
+          <p:cNvSpPr/>
+          <p:nvPr/>
+        </p:nvSpPr>
+        <p:spPr>
+          <a:xfrm>
+            <a:off x="548640" y="4617720"/>
+            <a:ext cx="54864" cy="868680"/>
+          </a:xfrm>
+          <a:prstGeom prst="rect">
+            <a:avLst/>
           </a:prstGeom>
           <a:solidFill>
-            <a:srgbClr val="F3F4F6"/>
+            <a:srgbClr val="1E40AF"/>
           </a:solidFill>
-          <a:ln w="9525">
+          <a:ln w="12700">
             <a:solidFill>
-              <a:srgbClr val="E5E7EB"/>
+              <a:srgbClr val="1E40AF"/>
             </a:solidFill>
             <a:prstDash val="solid"/>
           </a:ln>
@@ -12893,38 +12878,77 @@
       </p:sp>
       <p:sp>
         <p:nvSpPr>
-          <p:cNvPr id="19" name="Text 17"/>
-          <p:cNvSpPr/>
-          <p:nvPr/>
-        </p:nvSpPr>
-        <p:spPr>
-          <a:xfrm>
-            <a:off x="4937760" y="3017520"/>
-            <a:ext cx="731520" cy="228600"/>
-          </a:xfrm>
-          <a:prstGeom prst="rect">
-            <a:avLst/>
-          </a:prstGeom>
-          <a:noFill/>
-          <a:ln/>
-        </p:spPr>
-        <p:txBody>
-          <a:bodyPr wrap="square" lIns="0" tIns="0" rIns="0" bIns="0" rtlCol="0" anchor="ctr"/>
-          <a:lstStyle/>
-          <a:p>
-            <a:pPr algn="l" indent="0" marL="0">
-              <a:buNone/>
-            </a:pPr>
-            <a:r>
-              <a:rPr lang="en-US" sz="1100" dirty="0">
-                <a:solidFill>
-                  <a:srgbClr val="6B7280"/>
-                </a:solidFill>
-                <a:latin typeface="Consolas" pitchFamily="34" charset="0"/>
-                <a:ea typeface="Consolas" pitchFamily="34" charset="-122"/>
-                <a:cs typeface="Consolas" pitchFamily="34" charset="-120"/>
-              </a:rPr>
-              <a:t>main:</a:t>
+          <p:cNvPr id="14" name="Text 12"/>
+          <p:cNvSpPr/>
+          <p:nvPr/>
+        </p:nvSpPr>
+        <p:spPr>
+          <a:xfrm>
+            <a:off x="777240" y="4709160"/>
+            <a:ext cx="7772400" cy="329184"/>
+          </a:xfrm>
+          <a:prstGeom prst="rect">
+            <a:avLst/>
+          </a:prstGeom>
+          <a:noFill/>
+          <a:ln/>
+        </p:spPr>
+        <p:txBody>
+          <a:bodyPr wrap="square" lIns="0" tIns="0" rIns="0" bIns="0" rtlCol="0" anchor="ctr"/>
+          <a:lstStyle/>
+          <a:p>
+            <a:pPr algn="l" indent="0" marL="0">
+              <a:buNone/>
+            </a:pPr>
+            <a:r>
+              <a:rPr lang="en-US" sz="1500" b="1" dirty="0">
+                <a:solidFill>
+                  <a:srgbClr val="1E3A8A"/>
+                </a:solidFill>
+                <a:latin typeface="Calibri" pitchFamily="34" charset="0"/>
+                <a:ea typeface="Calibri" pitchFamily="34" charset="-122"/>
+                <a:cs typeface="Calibri" pitchFamily="34" charset="-120"/>
+              </a:rPr>
+              <a:t>90% 情況下，對 AI 說「push 被擋了，幫我處理」就解決</a:t>
+            </a:r>
+            <a:endParaRPr lang="en-US" sz="1500" dirty="0"/>
+          </a:p>
+        </p:txBody>
+      </p:sp>
+      <p:sp>
+        <p:nvSpPr>
+          <p:cNvPr id="15" name="Text 13"/>
+          <p:cNvSpPr/>
+          <p:nvPr/>
+        </p:nvSpPr>
+        <p:spPr>
+          <a:xfrm>
+            <a:off x="777240" y="5047488"/>
+            <a:ext cx="7772400" cy="256032"/>
+          </a:xfrm>
+          <a:prstGeom prst="rect">
+            <a:avLst/>
+          </a:prstGeom>
+          <a:noFill/>
+          <a:ln/>
+        </p:spPr>
+        <p:txBody>
+          <a:bodyPr wrap="square" lIns="0" tIns="0" rIns="0" bIns="0" rtlCol="0" anchor="ctr"/>
+          <a:lstStyle/>
+          <a:p>
+            <a:pPr algn="l" indent="0" marL="0">
+              <a:buNone/>
+            </a:pPr>
+            <a:r>
+              <a:rPr lang="en-US" sz="1100" i="1" dirty="0">
+                <a:solidFill>
+                  <a:srgbClr val="1E40AF"/>
+                </a:solidFill>
+                <a:latin typeface="Calibri" pitchFamily="34" charset="0"/>
+                <a:ea typeface="Calibri" pitchFamily="34" charset="-122"/>
+                <a:cs typeface="Calibri" pitchFamily="34" charset="-120"/>
+              </a:rPr>
+              <a:t>In 90% of cases, just say "push was rejected, please handle it" — done.</a:t>
             </a:r>
             <a:endParaRPr lang="en-US" sz="1100" dirty="0"/>
           </a:p>
@@ -12932,92 +12956,14 @@
       </p:sp>
       <p:sp>
         <p:nvSpPr>
-          <p:cNvPr id="20" name="Text 18"/>
-          <p:cNvSpPr/>
-          <p:nvPr/>
-        </p:nvSpPr>
-        <p:spPr>
-          <a:xfrm>
-            <a:off x="5577840" y="3017520"/>
-            <a:ext cx="3108960" cy="228600"/>
-          </a:xfrm>
-          <a:prstGeom prst="rect">
-            <a:avLst/>
-          </a:prstGeom>
-          <a:noFill/>
-          <a:ln/>
-        </p:spPr>
-        <p:txBody>
-          <a:bodyPr wrap="square" lIns="0" tIns="0" rIns="0" bIns="0" rtlCol="0" anchor="ctr"/>
-          <a:lstStyle/>
-          <a:p>
-            <a:pPr algn="l" indent="0" marL="0">
-              <a:buNone/>
-            </a:pPr>
-            <a:r>
-              <a:rPr lang="en-US" sz="1400" dirty="0">
-                <a:solidFill>
-                  <a:srgbClr val="1A66FF"/>
-                </a:solidFill>
-                <a:latin typeface="Consolas" pitchFamily="34" charset="0"/>
-                <a:ea typeface="Consolas" pitchFamily="34" charset="-122"/>
-                <a:cs typeface="Consolas" pitchFamily="34" charset="-120"/>
-              </a:rPr>
-              <a:t>● ── ● ── ● ── ● ── F'── G'</a:t>
-            </a:r>
-            <a:endParaRPr lang="en-US" sz="1400" dirty="0"/>
-          </a:p>
-        </p:txBody>
-      </p:sp>
-      <p:sp>
-        <p:nvSpPr>
-          <p:cNvPr id="21" name="Text 19"/>
-          <p:cNvSpPr/>
-          <p:nvPr/>
-        </p:nvSpPr>
-        <p:spPr>
-          <a:xfrm>
-            <a:off x="4937760" y="3703320"/>
-            <a:ext cx="3657600" cy="228600"/>
-          </a:xfrm>
-          <a:prstGeom prst="rect">
-            <a:avLst/>
-          </a:prstGeom>
-          <a:noFill/>
-          <a:ln/>
-        </p:spPr>
-        <p:txBody>
-          <a:bodyPr wrap="square" lIns="0" tIns="0" rIns="0" bIns="0" rtlCol="0" anchor="ctr"/>
-          <a:lstStyle/>
-          <a:p>
-            <a:pPr algn="l" indent="0" marL="0">
-              <a:buNone/>
-            </a:pPr>
-            <a:r>
-              <a:rPr lang="en-US" sz="1000" i="1" dirty="0">
-                <a:solidFill>
-                  <a:srgbClr val="6B7280"/>
-                </a:solidFill>
-                <a:latin typeface="Calibri" pitchFamily="34" charset="0"/>
-                <a:ea typeface="Calibri" pitchFamily="34" charset="-122"/>
-                <a:cs typeface="Calibri" pitchFamily="34" charset="-120"/>
-              </a:rPr>
-              <a:t>F' ／ G' = 同樣的改動，但 commit hash 變了</a:t>
-            </a:r>
-            <a:endParaRPr lang="en-US" sz="1000" dirty="0"/>
-          </a:p>
-        </p:txBody>
-      </p:sp>
-      <p:sp>
-        <p:nvSpPr>
-          <p:cNvPr id="22" name="Text 20"/>
-          <p:cNvSpPr/>
-          <p:nvPr/>
-        </p:nvSpPr>
-        <p:spPr>
-          <a:xfrm>
-            <a:off x="4937760" y="3913632"/>
-            <a:ext cx="3657600" cy="201168"/>
+          <p:cNvPr id="16" name="Text 14"/>
+          <p:cNvSpPr/>
+          <p:nvPr/>
+        </p:nvSpPr>
+        <p:spPr>
+          <a:xfrm>
+            <a:off x="777240" y="5285232"/>
+            <a:ext cx="7772400" cy="201168"/>
           </a:xfrm>
           <a:prstGeom prst="rect">
             <a:avLst/>
@@ -13035,145 +12981,15 @@
             <a:r>
               <a:rPr lang="en-US" sz="900" i="1" dirty="0">
                 <a:solidFill>
-                  <a:srgbClr val="9CA3AF"/>
-                </a:solidFill>
-                <a:latin typeface="Calibri" pitchFamily="34" charset="0"/>
-                <a:ea typeface="Calibri" pitchFamily="34" charset="-122"/>
-                <a:cs typeface="Calibri" pitchFamily="34" charset="-120"/>
-              </a:rPr>
-              <a:t>Same changes, different commit hashes</a:t>
+                  <a:srgbClr val="3B82F6"/>
+                </a:solidFill>
+                <a:latin typeface="Calibri" pitchFamily="34" charset="0"/>
+                <a:ea typeface="Calibri" pitchFamily="34" charset="-122"/>
+                <a:cs typeface="Calibri" pitchFamily="34" charset="-120"/>
+              </a:rPr>
+              <a:t>細節下面三頁說明 · Details on next 3 slides</a:t>
             </a:r>
             <a:endParaRPr lang="en-US" sz="900" dirty="0"/>
-          </a:p>
-        </p:txBody>
-      </p:sp>
-      <p:sp>
-        <p:nvSpPr>
-          <p:cNvPr id="23" name="Shape 21"/>
-          <p:cNvSpPr/>
-          <p:nvPr/>
-        </p:nvSpPr>
-        <p:spPr>
-          <a:xfrm>
-            <a:off x="548640" y="4526280"/>
-            <a:ext cx="8229600" cy="868680"/>
-          </a:xfrm>
-          <a:prstGeom prst="roundRect">
-            <a:avLst>
-              <a:gd name="adj" fmla="val 5263"/>
-            </a:avLst>
-          </a:prstGeom>
-          <a:solidFill>
-            <a:srgbClr val="FEF3C7"/>
-          </a:solidFill>
-          <a:ln w="12700">
-            <a:solidFill>
-              <a:srgbClr val="FEF3C7"/>
-            </a:solidFill>
-            <a:prstDash val="solid"/>
-          </a:ln>
-        </p:spPr>
-      </p:sp>
-      <p:sp>
-        <p:nvSpPr>
-          <p:cNvPr id="24" name="Shape 22"/>
-          <p:cNvSpPr/>
-          <p:nvPr/>
-        </p:nvSpPr>
-        <p:spPr>
-          <a:xfrm>
-            <a:off x="548640" y="4526280"/>
-            <a:ext cx="54864" cy="868680"/>
-          </a:xfrm>
-          <a:prstGeom prst="rect">
-            <a:avLst/>
-          </a:prstGeom>
-          <a:solidFill>
-            <a:srgbClr val="D97706"/>
-          </a:solidFill>
-          <a:ln w="12700">
-            <a:solidFill>
-              <a:srgbClr val="D97706"/>
-            </a:solidFill>
-            <a:prstDash val="solid"/>
-          </a:ln>
-        </p:spPr>
-      </p:sp>
-      <p:sp>
-        <p:nvSpPr>
-          <p:cNvPr id="25" name="Text 23"/>
-          <p:cNvSpPr/>
-          <p:nvPr/>
-        </p:nvSpPr>
-        <p:spPr>
-          <a:xfrm>
-            <a:off x="777240" y="4572000"/>
-            <a:ext cx="7863840" cy="365760"/>
-          </a:xfrm>
-          <a:prstGeom prst="rect">
-            <a:avLst/>
-          </a:prstGeom>
-          <a:noFill/>
-          <a:ln/>
-        </p:spPr>
-        <p:txBody>
-          <a:bodyPr wrap="square" lIns="0" tIns="0" rIns="0" bIns="0" rtlCol="0" anchor="ctr"/>
-          <a:lstStyle/>
-          <a:p>
-            <a:pPr algn="l" indent="0" marL="0">
-              <a:buNone/>
-            </a:pPr>
-            <a:r>
-              <a:rPr lang="en-US" sz="1200" b="1" dirty="0">
-                <a:solidFill>
-                  <a:srgbClr val="78350F"/>
-                </a:solidFill>
-                <a:latin typeface="Calibri" pitchFamily="34" charset="0"/>
-                <a:ea typeface="Calibri" pitchFamily="34" charset="-122"/>
-                <a:cs typeface="Calibri" pitchFamily="34" charset="-120"/>
-              </a:rPr>
-              <a:t>關鍵：rebase 會「改寫歷史」— commit hash 變了。個人 branch 沒問題，shared branch 會搞死隊友。</a:t>
-            </a:r>
-            <a:endParaRPr lang="en-US" sz="1200" dirty="0"/>
-          </a:p>
-        </p:txBody>
-      </p:sp>
-      <p:sp>
-        <p:nvSpPr>
-          <p:cNvPr id="26" name="Text 24"/>
-          <p:cNvSpPr/>
-          <p:nvPr/>
-        </p:nvSpPr>
-        <p:spPr>
-          <a:xfrm>
-            <a:off x="777240" y="4983480"/>
-            <a:ext cx="7863840" cy="365760"/>
-          </a:xfrm>
-          <a:prstGeom prst="rect">
-            <a:avLst/>
-          </a:prstGeom>
-          <a:noFill/>
-          <a:ln/>
-        </p:spPr>
-        <p:txBody>
-          <a:bodyPr wrap="square" lIns="0" tIns="0" rIns="0" bIns="0" rtlCol="0" anchor="ctr"/>
-          <a:lstStyle/>
-          <a:p>
-            <a:pPr algn="l" indent="0" marL="0">
-              <a:buNone/>
-            </a:pPr>
-            <a:r>
-              <a:rPr lang="en-US" sz="1000" i="1" dirty="0">
-                <a:solidFill>
-                  <a:srgbClr val="92400E"/>
-                </a:solidFill>
-                <a:latin typeface="Calibri" pitchFamily="34" charset="0"/>
-                <a:ea typeface="Calibri" pitchFamily="34" charset="-122"/>
-                <a:cs typeface="Calibri" pitchFamily="34" charset="-120"/>
-              </a:rPr>
-              <a:t>Rebase rewrites history. Safe on your own branch — disastrous on shared branches.</a:t>
-            </a:r>
-            <a:endParaRPr lang="en-US" sz="1000" dirty="0"/>
           </a:p>
         </p:txBody>
       </p:sp>
@@ -13242,7 +13058,7 @@
                 <a:ea typeface="Calibri" pitchFamily="34" charset="-122"/>
                 <a:cs typeface="Calibri" pitchFamily="34" charset="-120"/>
               </a:rPr>
-              <a:t>DANGER ZONE</a:t>
+              <a:t>SCENARIOS</a:t>
             </a:r>
             <a:endParaRPr lang="en-US" sz="1000" dirty="0"/>
           </a:p>
@@ -13281,7 +13097,7 @@
                 <a:ea typeface="Calibri" pitchFamily="34" charset="-122"/>
                 <a:cs typeface="Calibri" pitchFamily="34" charset="-120"/>
               </a:rPr>
-              <a:t>為什麼設計師要怕 force push</a:t>
+              <a:t>為什麼會被擋？四種常見情境</a:t>
             </a:r>
             <a:endParaRPr lang="en-US" sz="3000" dirty="0"/>
           </a:p>
@@ -13320,7 +13136,7 @@
                 <a:ea typeface="Calibri" pitchFamily="34" charset="-122"/>
                 <a:cs typeface="Calibri" pitchFamily="34" charset="-120"/>
               </a:rPr>
-              <a:t>Why force push is the trap to watch for</a:t>
+              <a:t>Four common reasons — same symptom</a:t>
             </a:r>
             <a:endParaRPr lang="en-US" sz="1400" dirty="0"/>
           </a:p>
@@ -13328,875 +13144,22 @@
       </p:sp>
       <p:sp>
         <p:nvSpPr>
-          <p:cNvPr id="5" name="Text 3"/>
-          <p:cNvSpPr/>
-          <p:nvPr/>
-        </p:nvSpPr>
-        <p:spPr>
-          <a:xfrm>
-            <a:off x="548640" y="1691640"/>
-            <a:ext cx="8229600" cy="274320"/>
-          </a:xfrm>
-          <a:prstGeom prst="rect">
-            <a:avLst/>
-          </a:prstGeom>
-          <a:noFill/>
-          <a:ln/>
-        </p:spPr>
-        <p:txBody>
-          <a:bodyPr wrap="square" lIns="0" tIns="0" rIns="0" bIns="0" rtlCol="0" anchor="ctr"/>
-          <a:lstStyle/>
-          <a:p>
-            <a:pPr algn="l" indent="0" marL="0">
-              <a:buNone/>
-            </a:pPr>
-            <a:r>
-              <a:rPr lang="en-US" sz="1300" b="1" dirty="0">
-                <a:solidFill>
-                  <a:srgbClr val="DC2626"/>
-                </a:solidFill>
-                <a:latin typeface="Calibri" pitchFamily="34" charset="0"/>
-                <a:ea typeface="Calibri" pitchFamily="34" charset="-122"/>
-                <a:cs typeface="Calibri" pitchFamily="34" charset="-120"/>
-              </a:rPr>
-              <a:t>Rebase 改寫歷史 → 普通 push 推不上去 → AI 會建議 force push → 可能覆蓋隊友的 commit</a:t>
-            </a:r>
-            <a:endParaRPr lang="en-US" sz="1300" dirty="0"/>
-          </a:p>
-        </p:txBody>
-      </p:sp>
-      <p:sp>
-        <p:nvSpPr>
-          <p:cNvPr id="6" name="Text 4"/>
-          <p:cNvSpPr/>
-          <p:nvPr/>
-        </p:nvSpPr>
-        <p:spPr>
-          <a:xfrm>
-            <a:off x="548640" y="1993392"/>
-            <a:ext cx="8229600" cy="219456"/>
-          </a:xfrm>
-          <a:prstGeom prst="rect">
-            <a:avLst/>
-          </a:prstGeom>
-          <a:noFill/>
-          <a:ln/>
-        </p:spPr>
-        <p:txBody>
-          <a:bodyPr wrap="square" lIns="0" tIns="0" rIns="0" bIns="0" rtlCol="0" anchor="ctr"/>
-          <a:lstStyle/>
-          <a:p>
-            <a:pPr algn="l" indent="0" marL="0">
-              <a:buNone/>
-            </a:pPr>
-            <a:r>
-              <a:rPr lang="en-US" sz="1000" i="1" dirty="0">
-                <a:solidFill>
-                  <a:srgbClr val="6B7280"/>
-                </a:solidFill>
-                <a:latin typeface="Calibri" pitchFamily="34" charset="0"/>
-                <a:ea typeface="Calibri" pitchFamily="34" charset="-122"/>
-                <a:cs typeface="Calibri" pitchFamily="34" charset="-120"/>
-              </a:rPr>
-              <a:t>Rebase rewrites history → normal push fails → AI suggests force → may overwrite teammates</a:t>
-            </a:r>
-            <a:endParaRPr lang="en-US" sz="1000" dirty="0"/>
-          </a:p>
-        </p:txBody>
-      </p:sp>
-      <p:sp>
-        <p:nvSpPr>
-          <p:cNvPr id="7" name="Shape 5"/>
-          <p:cNvSpPr/>
-          <p:nvPr/>
-        </p:nvSpPr>
-        <p:spPr>
-          <a:xfrm>
-            <a:off x="548640" y="2377440"/>
-            <a:ext cx="2560320" cy="2743200"/>
+          <p:cNvPr id="5" name="Shape 3"/>
+          <p:cNvSpPr/>
+          <p:nvPr/>
+        </p:nvSpPr>
+        <p:spPr>
+          <a:xfrm>
+            <a:off x="548640" y="1783080"/>
+            <a:ext cx="4023360" cy="1325880"/>
           </a:xfrm>
           <a:prstGeom prst="roundRect">
             <a:avLst>
-              <a:gd name="adj" fmla="val 2143"/>
+              <a:gd name="adj" fmla="val 4138"/>
             </a:avLst>
           </a:prstGeom>
           <a:solidFill>
-            <a:srgbClr val="ECFDF5"/>
-          </a:solidFill>
-          <a:ln w="9525">
-            <a:solidFill>
-              <a:srgbClr val="E5E7EB"/>
-            </a:solidFill>
-            <a:prstDash val="solid"/>
-          </a:ln>
-        </p:spPr>
-      </p:sp>
-      <p:sp>
-        <p:nvSpPr>
-          <p:cNvPr id="8" name="Text 6"/>
-          <p:cNvSpPr/>
-          <p:nvPr/>
-        </p:nvSpPr>
-        <p:spPr>
-          <a:xfrm>
-            <a:off x="685800" y="2514600"/>
-            <a:ext cx="2286000" cy="292608"/>
-          </a:xfrm>
-          <a:prstGeom prst="rect">
-            <a:avLst/>
-          </a:prstGeom>
-          <a:noFill/>
-          <a:ln/>
-        </p:spPr>
-        <p:txBody>
-          <a:bodyPr wrap="square" lIns="0" tIns="0" rIns="0" bIns="0" rtlCol="0" anchor="ctr"/>
-          <a:lstStyle/>
-          <a:p>
-            <a:pPr algn="l" indent="0" marL="0">
-              <a:buNone/>
-            </a:pPr>
-            <a:r>
-              <a:rPr lang="en-US" sz="1300" b="1" dirty="0">
-                <a:solidFill>
-                  <a:srgbClr val="111827"/>
-                </a:solidFill>
-                <a:latin typeface="Consolas" pitchFamily="34" charset="0"/>
-                <a:ea typeface="Consolas" pitchFamily="34" charset="-122"/>
-                <a:cs typeface="Consolas" pitchFamily="34" charset="-120"/>
-              </a:rPr>
-              <a:t>git push</a:t>
-            </a:r>
-            <a:endParaRPr lang="en-US" sz="1300" dirty="0"/>
-          </a:p>
-        </p:txBody>
-      </p:sp>
-      <p:sp>
-        <p:nvSpPr>
-          <p:cNvPr id="9" name="Text 7"/>
-          <p:cNvSpPr/>
-          <p:nvPr/>
-        </p:nvSpPr>
-        <p:spPr>
-          <a:xfrm>
-            <a:off x="685800" y="2788920"/>
-            <a:ext cx="2286000" cy="201168"/>
-          </a:xfrm>
-          <a:prstGeom prst="rect">
-            <a:avLst/>
-          </a:prstGeom>
-          <a:noFill/>
-          <a:ln/>
-        </p:spPr>
-        <p:txBody>
-          <a:bodyPr wrap="square" lIns="0" tIns="0" rIns="0" bIns="0" rtlCol="0" anchor="ctr"/>
-          <a:lstStyle/>
-          <a:p>
-            <a:pPr algn="l" indent="0" marL="0">
-              <a:buNone/>
-            </a:pPr>
-            <a:r>
-              <a:rPr lang="en-US" sz="1000" dirty="0">
-                <a:solidFill>
-                  <a:srgbClr val="6B7280"/>
-                </a:solidFill>
-                <a:latin typeface="Calibri" pitchFamily="34" charset="0"/>
-                <a:ea typeface="Calibri" pitchFamily="34" charset="-122"/>
-                <a:cs typeface="Calibri" pitchFamily="34" charset="-120"/>
-              </a:rPr>
-              <a:t>Normal push</a:t>
-            </a:r>
-            <a:endParaRPr lang="en-US" sz="1000" dirty="0"/>
-          </a:p>
-        </p:txBody>
-      </p:sp>
-      <p:sp>
-        <p:nvSpPr>
-          <p:cNvPr id="10" name="Text 8"/>
-          <p:cNvSpPr/>
-          <p:nvPr/>
-        </p:nvSpPr>
-        <p:spPr>
-          <a:xfrm>
-            <a:off x="685800" y="3108960"/>
-            <a:ext cx="2286000" cy="292608"/>
-          </a:xfrm>
-          <a:prstGeom prst="rect">
-            <a:avLst/>
-          </a:prstGeom>
-          <a:noFill/>
-          <a:ln/>
-        </p:spPr>
-        <p:txBody>
-          <a:bodyPr wrap="square" lIns="0" tIns="0" rIns="0" bIns="0" rtlCol="0" anchor="ctr"/>
-          <a:lstStyle/>
-          <a:p>
-            <a:pPr algn="l" indent="0" marL="0">
-              <a:buNone/>
-            </a:pPr>
-            <a:r>
-              <a:rPr lang="en-US" sz="1600" b="1" dirty="0">
-                <a:solidFill>
-                  <a:srgbClr val="059669"/>
-                </a:solidFill>
-                <a:latin typeface="Calibri" pitchFamily="34" charset="0"/>
-                <a:ea typeface="Calibri" pitchFamily="34" charset="-122"/>
-                <a:cs typeface="Calibri" pitchFamily="34" charset="-120"/>
-              </a:rPr>
-              <a:t>✅ 安全</a:t>
-            </a:r>
-            <a:endParaRPr lang="en-US" sz="1600" dirty="0"/>
-          </a:p>
-        </p:txBody>
-      </p:sp>
-      <p:sp>
-        <p:nvSpPr>
-          <p:cNvPr id="11" name="Text 9"/>
-          <p:cNvSpPr/>
-          <p:nvPr/>
-        </p:nvSpPr>
-        <p:spPr>
-          <a:xfrm>
-            <a:off x="685800" y="3520440"/>
-            <a:ext cx="2286000" cy="1005840"/>
-          </a:xfrm>
-          <a:prstGeom prst="rect">
-            <a:avLst/>
-          </a:prstGeom>
-          <a:noFill/>
-          <a:ln/>
-        </p:spPr>
-        <p:txBody>
-          <a:bodyPr wrap="square" lIns="0" tIns="0" rIns="0" bIns="0" rtlCol="0" anchor="t"/>
-          <a:lstStyle/>
-          <a:p>
-            <a:pPr algn="l" indent="0" marL="0">
-              <a:spcAft>
-                <a:spcPts val="200"/>
-              </a:spcAft>
-              <a:buNone/>
-            </a:pPr>
-            <a:r>
-              <a:rPr lang="en-US" sz="1100" dirty="0">
-                <a:solidFill>
-                  <a:srgbClr val="374151"/>
-                </a:solidFill>
-                <a:latin typeface="Calibri" pitchFamily="34" charset="0"/>
-                <a:ea typeface="Calibri" pitchFamily="34" charset="-122"/>
-                <a:cs typeface="Calibri" pitchFamily="34" charset="-120"/>
-              </a:rPr>
-              <a:t>推不上去就停。</a:t>
-            </a:r>
-            <a:endParaRPr lang="en-US" sz="1100" dirty="0"/>
-          </a:p>
-          <a:p>
-            <a:pPr algn="l" indent="0" marL="0">
-              <a:spcAft>
-                <a:spcPts val="200"/>
-              </a:spcAft>
-              <a:buNone/>
-            </a:pPr>
-            <a:r>
-              <a:rPr lang="en-US" sz="1100" dirty="0">
-                <a:solidFill>
-                  <a:srgbClr val="374151"/>
-                </a:solidFill>
-                <a:latin typeface="Calibri" pitchFamily="34" charset="0"/>
-                <a:ea typeface="Calibri" pitchFamily="34" charset="-122"/>
-                <a:cs typeface="Calibri" pitchFamily="34" charset="-120"/>
-              </a:rPr>
-              <a:t>從不覆蓋遠端歷史。</a:t>
-            </a:r>
-            <a:endParaRPr lang="en-US" sz="1100" dirty="0"/>
-          </a:p>
-        </p:txBody>
-      </p:sp>
-      <p:sp>
-        <p:nvSpPr>
-          <p:cNvPr id="12" name="Text 10"/>
-          <p:cNvSpPr/>
-          <p:nvPr/>
-        </p:nvSpPr>
-        <p:spPr>
-          <a:xfrm>
-            <a:off x="685800" y="4526280"/>
-            <a:ext cx="2286000" cy="502920"/>
-          </a:xfrm>
-          <a:prstGeom prst="rect">
-            <a:avLst/>
-          </a:prstGeom>
-          <a:noFill/>
-          <a:ln/>
-        </p:spPr>
-        <p:txBody>
-          <a:bodyPr wrap="square" lIns="0" tIns="0" rIns="0" bIns="0" rtlCol="0" anchor="t"/>
-          <a:lstStyle/>
-          <a:p>
-            <a:pPr algn="l" indent="0" marL="0">
-              <a:buNone/>
-            </a:pPr>
-            <a:r>
-              <a:rPr lang="en-US" sz="900" i="1" dirty="0">
-                <a:solidFill>
-                  <a:srgbClr val="6B7280"/>
-                </a:solidFill>
-                <a:latin typeface="Calibri" pitchFamily="34" charset="0"/>
-                <a:ea typeface="Calibri" pitchFamily="34" charset="-122"/>
-                <a:cs typeface="Calibri" pitchFamily="34" charset="-120"/>
-              </a:rPr>
-              <a:t>Stops if conflict. Never overwrites.</a:t>
-            </a:r>
-            <a:endParaRPr lang="en-US" sz="900" dirty="0"/>
-          </a:p>
-        </p:txBody>
-      </p:sp>
-      <p:sp>
-        <p:nvSpPr>
-          <p:cNvPr id="13" name="Shape 11"/>
-          <p:cNvSpPr/>
-          <p:nvPr/>
-        </p:nvSpPr>
-        <p:spPr>
-          <a:xfrm>
-            <a:off x="3383280" y="2377440"/>
-            <a:ext cx="2560320" cy="2743200"/>
-          </a:xfrm>
-          <a:prstGeom prst="roundRect">
-            <a:avLst>
-              <a:gd name="adj" fmla="val 2143"/>
-            </a:avLst>
-          </a:prstGeom>
-          <a:solidFill>
-            <a:srgbClr val="FEF2F2"/>
-          </a:solidFill>
-          <a:ln w="9525">
-            <a:solidFill>
-              <a:srgbClr val="E5E7EB"/>
-            </a:solidFill>
-            <a:prstDash val="solid"/>
-          </a:ln>
-        </p:spPr>
-      </p:sp>
-      <p:sp>
-        <p:nvSpPr>
-          <p:cNvPr id="14" name="Text 12"/>
-          <p:cNvSpPr/>
-          <p:nvPr/>
-        </p:nvSpPr>
-        <p:spPr>
-          <a:xfrm>
-            <a:off x="3520440" y="2514600"/>
-            <a:ext cx="2286000" cy="292608"/>
-          </a:xfrm>
-          <a:prstGeom prst="rect">
-            <a:avLst/>
-          </a:prstGeom>
-          <a:noFill/>
-          <a:ln/>
-        </p:spPr>
-        <p:txBody>
-          <a:bodyPr wrap="square" lIns="0" tIns="0" rIns="0" bIns="0" rtlCol="0" anchor="ctr"/>
-          <a:lstStyle/>
-          <a:p>
-            <a:pPr algn="l" indent="0" marL="0">
-              <a:buNone/>
-            </a:pPr>
-            <a:r>
-              <a:rPr lang="en-US" sz="1300" b="1" dirty="0">
-                <a:solidFill>
-                  <a:srgbClr val="111827"/>
-                </a:solidFill>
-                <a:latin typeface="Consolas" pitchFamily="34" charset="0"/>
-                <a:ea typeface="Consolas" pitchFamily="34" charset="-122"/>
-                <a:cs typeface="Consolas" pitchFamily="34" charset="-120"/>
-              </a:rPr>
-              <a:t>git push --force</a:t>
-            </a:r>
-            <a:endParaRPr lang="en-US" sz="1300" dirty="0"/>
-          </a:p>
-        </p:txBody>
-      </p:sp>
-      <p:sp>
-        <p:nvSpPr>
-          <p:cNvPr id="15" name="Text 13"/>
-          <p:cNvSpPr/>
-          <p:nvPr/>
-        </p:nvSpPr>
-        <p:spPr>
-          <a:xfrm>
-            <a:off x="3520440" y="2788920"/>
-            <a:ext cx="2286000" cy="201168"/>
-          </a:xfrm>
-          <a:prstGeom prst="rect">
-            <a:avLst/>
-          </a:prstGeom>
-          <a:noFill/>
-          <a:ln/>
-        </p:spPr>
-        <p:txBody>
-          <a:bodyPr wrap="square" lIns="0" tIns="0" rIns="0" bIns="0" rtlCol="0" anchor="ctr"/>
-          <a:lstStyle/>
-          <a:p>
-            <a:pPr algn="l" indent="0" marL="0">
-              <a:buNone/>
-            </a:pPr>
-            <a:r>
-              <a:rPr lang="en-US" sz="1000" dirty="0">
-                <a:solidFill>
-                  <a:srgbClr val="6B7280"/>
-                </a:solidFill>
-                <a:latin typeface="Calibri" pitchFamily="34" charset="0"/>
-                <a:ea typeface="Calibri" pitchFamily="34" charset="-122"/>
-                <a:cs typeface="Calibri" pitchFamily="34" charset="-120"/>
-              </a:rPr>
-              <a:t>Force push</a:t>
-            </a:r>
-            <a:endParaRPr lang="en-US" sz="1000" dirty="0"/>
-          </a:p>
-        </p:txBody>
-      </p:sp>
-      <p:sp>
-        <p:nvSpPr>
-          <p:cNvPr id="16" name="Text 14"/>
-          <p:cNvSpPr/>
-          <p:nvPr/>
-        </p:nvSpPr>
-        <p:spPr>
-          <a:xfrm>
-            <a:off x="3520440" y="3108960"/>
-            <a:ext cx="2286000" cy="292608"/>
-          </a:xfrm>
-          <a:prstGeom prst="rect">
-            <a:avLst/>
-          </a:prstGeom>
-          <a:noFill/>
-          <a:ln/>
-        </p:spPr>
-        <p:txBody>
-          <a:bodyPr wrap="square" lIns="0" tIns="0" rIns="0" bIns="0" rtlCol="0" anchor="ctr"/>
-          <a:lstStyle/>
-          <a:p>
-            <a:pPr algn="l" indent="0" marL="0">
-              <a:buNone/>
-            </a:pPr>
-            <a:r>
-              <a:rPr lang="en-US" sz="1600" b="1" dirty="0">
-                <a:solidFill>
-                  <a:srgbClr val="DC2626"/>
-                </a:solidFill>
-                <a:latin typeface="Calibri" pitchFamily="34" charset="0"/>
-                <a:ea typeface="Calibri" pitchFamily="34" charset="-122"/>
-                <a:cs typeface="Calibri" pitchFamily="34" charset="-120"/>
-              </a:rPr>
-              <a:t>❌ 危險</a:t>
-            </a:r>
-            <a:endParaRPr lang="en-US" sz="1600" dirty="0"/>
-          </a:p>
-        </p:txBody>
-      </p:sp>
-      <p:sp>
-        <p:nvSpPr>
-          <p:cNvPr id="17" name="Text 15"/>
-          <p:cNvSpPr/>
-          <p:nvPr/>
-        </p:nvSpPr>
-        <p:spPr>
-          <a:xfrm>
-            <a:off x="3520440" y="3520440"/>
-            <a:ext cx="2286000" cy="1005840"/>
-          </a:xfrm>
-          <a:prstGeom prst="rect">
-            <a:avLst/>
-          </a:prstGeom>
-          <a:noFill/>
-          <a:ln/>
-        </p:spPr>
-        <p:txBody>
-          <a:bodyPr wrap="square" lIns="0" tIns="0" rIns="0" bIns="0" rtlCol="0" anchor="t"/>
-          <a:lstStyle/>
-          <a:p>
-            <a:pPr algn="l" indent="0" marL="0">
-              <a:spcAft>
-                <a:spcPts val="200"/>
-              </a:spcAft>
-              <a:buNone/>
-            </a:pPr>
-            <a:r>
-              <a:rPr lang="en-US" sz="1100" dirty="0">
-                <a:solidFill>
-                  <a:srgbClr val="374151"/>
-                </a:solidFill>
-                <a:latin typeface="Calibri" pitchFamily="34" charset="0"/>
-                <a:ea typeface="Calibri" pitchFamily="34" charset="-122"/>
-                <a:cs typeface="Calibri" pitchFamily="34" charset="-120"/>
-              </a:rPr>
-              <a:t>「我說了算」。</a:t>
-            </a:r>
-            <a:endParaRPr lang="en-US" sz="1100" dirty="0"/>
-          </a:p>
-          <a:p>
-            <a:pPr algn="l" indent="0" marL="0">
-              <a:spcAft>
-                <a:spcPts val="200"/>
-              </a:spcAft>
-              <a:buNone/>
-            </a:pPr>
-            <a:r>
-              <a:rPr lang="en-US" sz="1100" dirty="0">
-                <a:solidFill>
-                  <a:srgbClr val="374151"/>
-                </a:solidFill>
-                <a:latin typeface="Calibri" pitchFamily="34" charset="0"/>
-                <a:ea typeface="Calibri" pitchFamily="34" charset="-122"/>
-                <a:cs typeface="Calibri" pitchFamily="34" charset="-120"/>
-              </a:rPr>
-              <a:t>直接覆蓋遠端，</a:t>
-            </a:r>
-            <a:endParaRPr lang="en-US" sz="1100" dirty="0"/>
-          </a:p>
-          <a:p>
-            <a:pPr algn="l" indent="0" marL="0">
-              <a:spcAft>
-                <a:spcPts val="200"/>
-              </a:spcAft>
-              <a:buNone/>
-            </a:pPr>
-            <a:r>
-              <a:rPr lang="en-US" sz="1100" dirty="0">
-                <a:solidFill>
-                  <a:srgbClr val="374151"/>
-                </a:solidFill>
-                <a:latin typeface="Calibri" pitchFamily="34" charset="0"/>
-                <a:ea typeface="Calibri" pitchFamily="34" charset="-122"/>
-                <a:cs typeface="Calibri" pitchFamily="34" charset="-120"/>
-              </a:rPr>
-              <a:t>隊友的 commit 消失。</a:t>
-            </a:r>
-            <a:endParaRPr lang="en-US" sz="1100" dirty="0"/>
-          </a:p>
-        </p:txBody>
-      </p:sp>
-      <p:sp>
-        <p:nvSpPr>
-          <p:cNvPr id="18" name="Text 16"/>
-          <p:cNvSpPr/>
-          <p:nvPr/>
-        </p:nvSpPr>
-        <p:spPr>
-          <a:xfrm>
-            <a:off x="3520440" y="4526280"/>
-            <a:ext cx="2286000" cy="502920"/>
-          </a:xfrm>
-          <a:prstGeom prst="rect">
-            <a:avLst/>
-          </a:prstGeom>
-          <a:noFill/>
-          <a:ln/>
-        </p:spPr>
-        <p:txBody>
-          <a:bodyPr wrap="square" lIns="0" tIns="0" rIns="0" bIns="0" rtlCol="0" anchor="t"/>
-          <a:lstStyle/>
-          <a:p>
-            <a:pPr algn="l" indent="0" marL="0">
-              <a:buNone/>
-            </a:pPr>
-            <a:r>
-              <a:rPr lang="en-US" sz="900" i="1" dirty="0">
-                <a:solidFill>
-                  <a:srgbClr val="6B7280"/>
-                </a:solidFill>
-                <a:latin typeface="Calibri" pitchFamily="34" charset="0"/>
-                <a:ea typeface="Calibri" pitchFamily="34" charset="-122"/>
-                <a:cs typeface="Calibri" pitchFamily="34" charset="-120"/>
-              </a:rPr>
-              <a:t>"My way." Overwrites remote — teammates' work gone.</a:t>
-            </a:r>
-            <a:endParaRPr lang="en-US" sz="900" dirty="0"/>
-          </a:p>
-        </p:txBody>
-      </p:sp>
-      <p:sp>
-        <p:nvSpPr>
-          <p:cNvPr id="19" name="Shape 17"/>
-          <p:cNvSpPr/>
-          <p:nvPr/>
-        </p:nvSpPr>
-        <p:spPr>
-          <a:xfrm>
-            <a:off x="6217920" y="2377440"/>
-            <a:ext cx="2560320" cy="2743200"/>
-          </a:xfrm>
-          <a:prstGeom prst="roundRect">
-            <a:avLst>
-              <a:gd name="adj" fmla="val 2143"/>
-            </a:avLst>
-          </a:prstGeom>
-          <a:solidFill>
-            <a:srgbClr val="FEF3C7"/>
-          </a:solidFill>
-          <a:ln w="9525">
-            <a:solidFill>
-              <a:srgbClr val="E5E7EB"/>
-            </a:solidFill>
-            <a:prstDash val="solid"/>
-          </a:ln>
-        </p:spPr>
-      </p:sp>
-      <p:sp>
-        <p:nvSpPr>
-          <p:cNvPr id="20" name="Text 18"/>
-          <p:cNvSpPr/>
-          <p:nvPr/>
-        </p:nvSpPr>
-        <p:spPr>
-          <a:xfrm>
-            <a:off x="6355080" y="2514600"/>
-            <a:ext cx="2286000" cy="292608"/>
-          </a:xfrm>
-          <a:prstGeom prst="rect">
-            <a:avLst/>
-          </a:prstGeom>
-          <a:noFill/>
-          <a:ln/>
-        </p:spPr>
-        <p:txBody>
-          <a:bodyPr wrap="square" lIns="0" tIns="0" rIns="0" bIns="0" rtlCol="0" anchor="ctr"/>
-          <a:lstStyle/>
-          <a:p>
-            <a:pPr algn="l" indent="0" marL="0">
-              <a:buNone/>
-            </a:pPr>
-            <a:r>
-              <a:rPr lang="en-US" sz="1300" b="1" dirty="0">
-                <a:solidFill>
-                  <a:srgbClr val="111827"/>
-                </a:solidFill>
-                <a:latin typeface="Consolas" pitchFamily="34" charset="0"/>
-                <a:ea typeface="Consolas" pitchFamily="34" charset="-122"/>
-                <a:cs typeface="Consolas" pitchFamily="34" charset="-120"/>
-              </a:rPr>
-              <a:t>--force-with-lease</a:t>
-            </a:r>
-            <a:endParaRPr lang="en-US" sz="1300" dirty="0"/>
-          </a:p>
-        </p:txBody>
-      </p:sp>
-      <p:sp>
-        <p:nvSpPr>
-          <p:cNvPr id="21" name="Text 19"/>
-          <p:cNvSpPr/>
-          <p:nvPr/>
-        </p:nvSpPr>
-        <p:spPr>
-          <a:xfrm>
-            <a:off x="6355080" y="2788920"/>
-            <a:ext cx="2286000" cy="201168"/>
-          </a:xfrm>
-          <a:prstGeom prst="rect">
-            <a:avLst/>
-          </a:prstGeom>
-          <a:noFill/>
-          <a:ln/>
-        </p:spPr>
-        <p:txBody>
-          <a:bodyPr wrap="square" lIns="0" tIns="0" rIns="0" bIns="0" rtlCol="0" anchor="ctr"/>
-          <a:lstStyle/>
-          <a:p>
-            <a:pPr algn="l" indent="0" marL="0">
-              <a:buNone/>
-            </a:pPr>
-            <a:r>
-              <a:rPr lang="en-US" sz="1000" dirty="0">
-                <a:solidFill>
-                  <a:srgbClr val="6B7280"/>
-                </a:solidFill>
-                <a:latin typeface="Calibri" pitchFamily="34" charset="0"/>
-                <a:ea typeface="Calibri" pitchFamily="34" charset="-122"/>
-                <a:cs typeface="Calibri" pitchFamily="34" charset="-120"/>
-              </a:rPr>
-              <a:t>Safe force</a:t>
-            </a:r>
-            <a:endParaRPr lang="en-US" sz="1000" dirty="0"/>
-          </a:p>
-        </p:txBody>
-      </p:sp>
-      <p:sp>
-        <p:nvSpPr>
-          <p:cNvPr id="22" name="Text 20"/>
-          <p:cNvSpPr/>
-          <p:nvPr/>
-        </p:nvSpPr>
-        <p:spPr>
-          <a:xfrm>
-            <a:off x="6355080" y="3108960"/>
-            <a:ext cx="2286000" cy="292608"/>
-          </a:xfrm>
-          <a:prstGeom prst="rect">
-            <a:avLst/>
-          </a:prstGeom>
-          <a:noFill/>
-          <a:ln/>
-        </p:spPr>
-        <p:txBody>
-          <a:bodyPr wrap="square" lIns="0" tIns="0" rIns="0" bIns="0" rtlCol="0" anchor="ctr"/>
-          <a:lstStyle/>
-          <a:p>
-            <a:pPr algn="l" indent="0" marL="0">
-              <a:buNone/>
-            </a:pPr>
-            <a:r>
-              <a:rPr lang="en-US" sz="1600" b="1" dirty="0">
-                <a:solidFill>
-                  <a:srgbClr val="D97706"/>
-                </a:solidFill>
-                <a:latin typeface="Calibri" pitchFamily="34" charset="0"/>
-                <a:ea typeface="Calibri" pitchFamily="34" charset="-122"/>
-                <a:cs typeface="Calibri" pitchFamily="34" charset="-120"/>
-              </a:rPr>
-              <a:t>⚠️ 可控</a:t>
-            </a:r>
-            <a:endParaRPr lang="en-US" sz="1600" dirty="0"/>
-          </a:p>
-        </p:txBody>
-      </p:sp>
-      <p:sp>
-        <p:nvSpPr>
-          <p:cNvPr id="23" name="Text 21"/>
-          <p:cNvSpPr/>
-          <p:nvPr/>
-        </p:nvSpPr>
-        <p:spPr>
-          <a:xfrm>
-            <a:off x="6355080" y="3520440"/>
-            <a:ext cx="2286000" cy="1005840"/>
-          </a:xfrm>
-          <a:prstGeom prst="rect">
-            <a:avLst/>
-          </a:prstGeom>
-          <a:noFill/>
-          <a:ln/>
-        </p:spPr>
-        <p:txBody>
-          <a:bodyPr wrap="square" lIns="0" tIns="0" rIns="0" bIns="0" rtlCol="0" anchor="t"/>
-          <a:lstStyle/>
-          <a:p>
-            <a:pPr algn="l" indent="0" marL="0">
-              <a:spcAft>
-                <a:spcPts val="200"/>
-              </a:spcAft>
-              <a:buNone/>
-            </a:pPr>
-            <a:r>
-              <a:rPr lang="en-US" sz="1100" dirty="0">
-                <a:solidFill>
-                  <a:srgbClr val="374151"/>
-                </a:solidFill>
-                <a:latin typeface="Calibri" pitchFamily="34" charset="0"/>
-                <a:ea typeface="Calibri" pitchFamily="34" charset="-122"/>
-                <a:cs typeface="Calibri" pitchFamily="34" charset="-120"/>
-              </a:rPr>
-              <a:t>「我說了算，</a:t>
-            </a:r>
-            <a:endParaRPr lang="en-US" sz="1100" dirty="0"/>
-          </a:p>
-          <a:p>
-            <a:pPr algn="l" indent="0" marL="0">
-              <a:spcAft>
-                <a:spcPts val="200"/>
-              </a:spcAft>
-              <a:buNone/>
-            </a:pPr>
-            <a:r>
-              <a:rPr lang="en-US" sz="1100" dirty="0">
-                <a:solidFill>
-                  <a:srgbClr val="374151"/>
-                </a:solidFill>
-                <a:latin typeface="Calibri" pitchFamily="34" charset="0"/>
-                <a:ea typeface="Calibri" pitchFamily="34" charset="-122"/>
-                <a:cs typeface="Calibri" pitchFamily="34" charset="-120"/>
-              </a:rPr>
-              <a:t>但別人改過就停。」</a:t>
-            </a:r>
-            <a:endParaRPr lang="en-US" sz="1100" dirty="0"/>
-          </a:p>
-          <a:p>
-            <a:pPr algn="l" indent="0" marL="0">
-              <a:spcAft>
-                <a:spcPts val="200"/>
-              </a:spcAft>
-              <a:buNone/>
-            </a:pPr>
-            <a:r>
-              <a:rPr lang="en-US" sz="1100" dirty="0">
-                <a:solidFill>
-                  <a:srgbClr val="374151"/>
-                </a:solidFill>
-                <a:latin typeface="Calibri" pitchFamily="34" charset="0"/>
-                <a:ea typeface="Calibri" pitchFamily="34" charset="-122"/>
-                <a:cs typeface="Calibri" pitchFamily="34" charset="-120"/>
-              </a:rPr>
-              <a:t>預設用這個。</a:t>
-            </a:r>
-            <a:endParaRPr lang="en-US" sz="1100" dirty="0"/>
-          </a:p>
-        </p:txBody>
-      </p:sp>
-      <p:sp>
-        <p:nvSpPr>
-          <p:cNvPr id="24" name="Text 22"/>
-          <p:cNvSpPr/>
-          <p:nvPr/>
-        </p:nvSpPr>
-        <p:spPr>
-          <a:xfrm>
-            <a:off x="6355080" y="4526280"/>
-            <a:ext cx="2286000" cy="502920"/>
-          </a:xfrm>
-          <a:prstGeom prst="rect">
-            <a:avLst/>
-          </a:prstGeom>
-          <a:noFill/>
-          <a:ln/>
-        </p:spPr>
-        <p:txBody>
-          <a:bodyPr wrap="square" lIns="0" tIns="0" rIns="0" bIns="0" rtlCol="0" anchor="t"/>
-          <a:lstStyle/>
-          <a:p>
-            <a:pPr algn="l" indent="0" marL="0">
-              <a:buNone/>
-            </a:pPr>
-            <a:r>
-              <a:rPr lang="en-US" sz="900" i="1" dirty="0">
-                <a:solidFill>
-                  <a:srgbClr val="6B7280"/>
-                </a:solidFill>
-                <a:latin typeface="Calibri" pitchFamily="34" charset="0"/>
-                <a:ea typeface="Calibri" pitchFamily="34" charset="-122"/>
-                <a:cs typeface="Calibri" pitchFamily="34" charset="-120"/>
-              </a:rPr>
-              <a:t>"My way, unless someone changed it." Use this.</a:t>
-            </a:r>
-            <a:endParaRPr lang="en-US" sz="900" dirty="0"/>
-          </a:p>
-        </p:txBody>
-      </p:sp>
-      <p:sp>
-        <p:nvSpPr>
-          <p:cNvPr id="25" name="Shape 23"/>
-          <p:cNvSpPr/>
-          <p:nvPr/>
-        </p:nvSpPr>
-        <p:spPr>
-          <a:xfrm>
-            <a:off x="548640" y="5349240"/>
-            <a:ext cx="8229600" cy="502920"/>
-          </a:xfrm>
-          <a:prstGeom prst="roundRect">
-            <a:avLst>
-              <a:gd name="adj" fmla="val 9091"/>
-            </a:avLst>
-          </a:prstGeom>
-          <a:solidFill>
-            <a:srgbClr val="F3F4F6"/>
+            <a:srgbClr val="FFFFFF"/>
           </a:solidFill>
           <a:ln w="12700">
             <a:solidFill>
@@ -14208,30 +13171,804 @@
       </p:sp>
       <p:sp>
         <p:nvSpPr>
+          <p:cNvPr id="6" name="Shape 4"/>
+          <p:cNvSpPr/>
+          <p:nvPr/>
+        </p:nvSpPr>
+        <p:spPr>
+          <a:xfrm>
+            <a:off x="731520" y="1947672"/>
+            <a:ext cx="777240" cy="256032"/>
+          </a:xfrm>
+          <a:prstGeom prst="roundRect">
+            <a:avLst>
+              <a:gd name="adj" fmla="val 50000"/>
+            </a:avLst>
+          </a:prstGeom>
+          <a:solidFill>
+            <a:srgbClr val="DBEAFE"/>
+          </a:solidFill>
+          <a:ln w="12700">
+            <a:solidFill>
+              <a:srgbClr val="DBEAFE"/>
+            </a:solidFill>
+            <a:prstDash val="solid"/>
+          </a:ln>
+        </p:spPr>
+      </p:sp>
+      <p:sp>
+        <p:nvSpPr>
+          <p:cNvPr id="7" name="Text 5"/>
+          <p:cNvSpPr/>
+          <p:nvPr/>
+        </p:nvSpPr>
+        <p:spPr>
+          <a:xfrm>
+            <a:off x="731520" y="1947672"/>
+            <a:ext cx="777240" cy="256032"/>
+          </a:xfrm>
+          <a:prstGeom prst="rect">
+            <a:avLst/>
+          </a:prstGeom>
+          <a:noFill/>
+          <a:ln/>
+        </p:spPr>
+        <p:txBody>
+          <a:bodyPr wrap="square" lIns="0" tIns="0" rIns="0" bIns="0" rtlCol="0" anchor="ctr"/>
+          <a:lstStyle/>
+          <a:p>
+            <a:pPr algn="ctr" indent="0" marL="0">
+              <a:buNone/>
+            </a:pPr>
+            <a:r>
+              <a:rPr lang="en-US" sz="1000" b="1" dirty="0">
+                <a:solidFill>
+                  <a:srgbClr val="1E40AF"/>
+                </a:solidFill>
+                <a:latin typeface="Calibri" pitchFamily="34" charset="0"/>
+                <a:ea typeface="Calibri" pitchFamily="34" charset="-122"/>
+                <a:cs typeface="Calibri" pitchFamily="34" charset="-120"/>
+              </a:rPr>
+              <a:t>最常見</a:t>
+            </a:r>
+            <a:endParaRPr lang="en-US" sz="1000" dirty="0"/>
+          </a:p>
+        </p:txBody>
+      </p:sp>
+      <p:sp>
+        <p:nvSpPr>
+          <p:cNvPr id="8" name="Text 6"/>
+          <p:cNvSpPr/>
+          <p:nvPr/>
+        </p:nvSpPr>
+        <p:spPr>
+          <a:xfrm>
+            <a:off x="731520" y="2286000"/>
+            <a:ext cx="3657600" cy="292608"/>
+          </a:xfrm>
+          <a:prstGeom prst="rect">
+            <a:avLst/>
+          </a:prstGeom>
+          <a:noFill/>
+          <a:ln/>
+        </p:spPr>
+        <p:txBody>
+          <a:bodyPr wrap="square" lIns="0" tIns="0" rIns="0" bIns="0" rtlCol="0" anchor="ctr"/>
+          <a:lstStyle/>
+          <a:p>
+            <a:pPr algn="l" indent="0" marL="0">
+              <a:buNone/>
+            </a:pPr>
+            <a:r>
+              <a:rPr lang="en-US" sz="1350" b="1" dirty="0">
+                <a:solidFill>
+                  <a:srgbClr val="111827"/>
+                </a:solidFill>
+                <a:latin typeface="Calibri" pitchFamily="34" charset="0"/>
+                <a:ea typeface="Calibri" pitchFamily="34" charset="-122"/>
+                <a:cs typeface="Calibri" pitchFamily="34" charset="-120"/>
+              </a:rPr>
+              <a:t>別人剛 push 到同一個 branch</a:t>
+            </a:r>
+            <a:endParaRPr lang="en-US" sz="1350" dirty="0"/>
+          </a:p>
+        </p:txBody>
+      </p:sp>
+      <p:sp>
+        <p:nvSpPr>
+          <p:cNvPr id="9" name="Text 7"/>
+          <p:cNvSpPr/>
+          <p:nvPr/>
+        </p:nvSpPr>
+        <p:spPr>
+          <a:xfrm>
+            <a:off x="731520" y="2560320"/>
+            <a:ext cx="3657600" cy="201168"/>
+          </a:xfrm>
+          <a:prstGeom prst="rect">
+            <a:avLst/>
+          </a:prstGeom>
+          <a:noFill/>
+          <a:ln/>
+        </p:spPr>
+        <p:txBody>
+          <a:bodyPr wrap="square" lIns="0" tIns="0" rIns="0" bIns="0" rtlCol="0" anchor="ctr"/>
+          <a:lstStyle/>
+          <a:p>
+            <a:pPr algn="l" indent="0" marL="0">
+              <a:buNone/>
+            </a:pPr>
+            <a:r>
+              <a:rPr lang="en-US" sz="950" i="1" dirty="0">
+                <a:solidFill>
+                  <a:srgbClr val="6B7280"/>
+                </a:solidFill>
+                <a:latin typeface="Calibri" pitchFamily="34" charset="0"/>
+                <a:ea typeface="Calibri" pitchFamily="34" charset="-122"/>
+                <a:cs typeface="Calibri" pitchFamily="34" charset="-120"/>
+              </a:rPr>
+              <a:t>Teammate pushed to the same branch</a:t>
+            </a:r>
+            <a:endParaRPr lang="en-US" sz="950" dirty="0"/>
+          </a:p>
+        </p:txBody>
+      </p:sp>
+      <p:sp>
+        <p:nvSpPr>
+          <p:cNvPr id="10" name="Text 8"/>
+          <p:cNvSpPr/>
+          <p:nvPr/>
+        </p:nvSpPr>
+        <p:spPr>
+          <a:xfrm>
+            <a:off x="731520" y="2770632"/>
+            <a:ext cx="3657600" cy="292608"/>
+          </a:xfrm>
+          <a:prstGeom prst="rect">
+            <a:avLst/>
+          </a:prstGeom>
+          <a:noFill/>
+          <a:ln/>
+        </p:spPr>
+        <p:txBody>
+          <a:bodyPr wrap="square" lIns="0" tIns="0" rIns="0" bIns="0" rtlCol="0" anchor="t"/>
+          <a:lstStyle/>
+          <a:p>
+            <a:pPr algn="l" indent="0" marL="0">
+              <a:buNone/>
+            </a:pPr>
+            <a:r>
+              <a:rPr lang="en-US" sz="1050" dirty="0">
+                <a:solidFill>
+                  <a:srgbClr val="374151"/>
+                </a:solidFill>
+                <a:latin typeface="Calibri" pitchFamily="34" charset="0"/>
+                <a:ea typeface="Calibri" pitchFamily="34" charset="-122"/>
+                <a:cs typeface="Calibri" pitchFamily="34" charset="-120"/>
+              </a:rPr>
+              <a:t>你在 main 上工作，期間隊友剛推了 commit 上去</a:t>
+            </a:r>
+            <a:endParaRPr lang="en-US" sz="1050" dirty="0"/>
+          </a:p>
+        </p:txBody>
+      </p:sp>
+      <p:sp>
+        <p:nvSpPr>
+          <p:cNvPr id="11" name="Shape 9"/>
+          <p:cNvSpPr/>
+          <p:nvPr/>
+        </p:nvSpPr>
+        <p:spPr>
+          <a:xfrm>
+            <a:off x="4709160" y="1783080"/>
+            <a:ext cx="4023360" cy="1325880"/>
+          </a:xfrm>
+          <a:prstGeom prst="roundRect">
+            <a:avLst>
+              <a:gd name="adj" fmla="val 4138"/>
+            </a:avLst>
+          </a:prstGeom>
+          <a:solidFill>
+            <a:srgbClr val="FFFFFF"/>
+          </a:solidFill>
+          <a:ln w="12700">
+            <a:solidFill>
+              <a:srgbClr val="E5E7EB"/>
+            </a:solidFill>
+            <a:prstDash val="solid"/>
+          </a:ln>
+        </p:spPr>
+      </p:sp>
+      <p:sp>
+        <p:nvSpPr>
+          <p:cNvPr id="12" name="Shape 10"/>
+          <p:cNvSpPr/>
+          <p:nvPr/>
+        </p:nvSpPr>
+        <p:spPr>
+          <a:xfrm>
+            <a:off x="4892040" y="1947672"/>
+            <a:ext cx="777240" cy="256032"/>
+          </a:xfrm>
+          <a:prstGeom prst="roundRect">
+            <a:avLst>
+              <a:gd name="adj" fmla="val 50000"/>
+            </a:avLst>
+          </a:prstGeom>
+          <a:solidFill>
+            <a:srgbClr val="D1FAE5"/>
+          </a:solidFill>
+          <a:ln w="12700">
+            <a:solidFill>
+              <a:srgbClr val="D1FAE5"/>
+            </a:solidFill>
+            <a:prstDash val="solid"/>
+          </a:ln>
+        </p:spPr>
+      </p:sp>
+      <p:sp>
+        <p:nvSpPr>
+          <p:cNvPr id="13" name="Text 11"/>
+          <p:cNvSpPr/>
+          <p:nvPr/>
+        </p:nvSpPr>
+        <p:spPr>
+          <a:xfrm>
+            <a:off x="4892040" y="1947672"/>
+            <a:ext cx="777240" cy="256032"/>
+          </a:xfrm>
+          <a:prstGeom prst="rect">
+            <a:avLst/>
+          </a:prstGeom>
+          <a:noFill/>
+          <a:ln/>
+        </p:spPr>
+        <p:txBody>
+          <a:bodyPr wrap="square" lIns="0" tIns="0" rIns="0" bIns="0" rtlCol="0" anchor="ctr"/>
+          <a:lstStyle/>
+          <a:p>
+            <a:pPr algn="ctr" indent="0" marL="0">
+              <a:buNone/>
+            </a:pPr>
+            <a:r>
+              <a:rPr lang="en-US" sz="1000" b="1" dirty="0">
+                <a:solidFill>
+                  <a:srgbClr val="065F46"/>
+                </a:solidFill>
+                <a:latin typeface="Calibri" pitchFamily="34" charset="0"/>
+                <a:ea typeface="Calibri" pitchFamily="34" charset="-122"/>
+                <a:cs typeface="Calibri" pitchFamily="34" charset="-120"/>
+              </a:rPr>
+              <a:t>常見</a:t>
+            </a:r>
+            <a:endParaRPr lang="en-US" sz="1000" dirty="0"/>
+          </a:p>
+        </p:txBody>
+      </p:sp>
+      <p:sp>
+        <p:nvSpPr>
+          <p:cNvPr id="14" name="Text 12"/>
+          <p:cNvSpPr/>
+          <p:nvPr/>
+        </p:nvSpPr>
+        <p:spPr>
+          <a:xfrm>
+            <a:off x="4892040" y="2286000"/>
+            <a:ext cx="3657600" cy="292608"/>
+          </a:xfrm>
+          <a:prstGeom prst="rect">
+            <a:avLst/>
+          </a:prstGeom>
+          <a:noFill/>
+          <a:ln/>
+        </p:spPr>
+        <p:txBody>
+          <a:bodyPr wrap="square" lIns="0" tIns="0" rIns="0" bIns="0" rtlCol="0" anchor="ctr"/>
+          <a:lstStyle/>
+          <a:p>
+            <a:pPr algn="l" indent="0" marL="0">
+              <a:buNone/>
+            </a:pPr>
+            <a:r>
+              <a:rPr lang="en-US" sz="1350" b="1" dirty="0">
+                <a:solidFill>
+                  <a:srgbClr val="111827"/>
+                </a:solidFill>
+                <a:latin typeface="Calibri" pitchFamily="34" charset="0"/>
+                <a:ea typeface="Calibri" pitchFamily="34" charset="-122"/>
+                <a:cs typeface="Calibri" pitchFamily="34" charset="-120"/>
+              </a:rPr>
+              <a:t>多裝置切換沒先 pull</a:t>
+            </a:r>
+            <a:endParaRPr lang="en-US" sz="1350" dirty="0"/>
+          </a:p>
+        </p:txBody>
+      </p:sp>
+      <p:sp>
+        <p:nvSpPr>
+          <p:cNvPr id="15" name="Text 13"/>
+          <p:cNvSpPr/>
+          <p:nvPr/>
+        </p:nvSpPr>
+        <p:spPr>
+          <a:xfrm>
+            <a:off x="4892040" y="2560320"/>
+            <a:ext cx="3657600" cy="201168"/>
+          </a:xfrm>
+          <a:prstGeom prst="rect">
+            <a:avLst/>
+          </a:prstGeom>
+          <a:noFill/>
+          <a:ln/>
+        </p:spPr>
+        <p:txBody>
+          <a:bodyPr wrap="square" lIns="0" tIns="0" rIns="0" bIns="0" rtlCol="0" anchor="ctr"/>
+          <a:lstStyle/>
+          <a:p>
+            <a:pPr algn="l" indent="0" marL="0">
+              <a:buNone/>
+            </a:pPr>
+            <a:r>
+              <a:rPr lang="en-US" sz="950" i="1" dirty="0">
+                <a:solidFill>
+                  <a:srgbClr val="6B7280"/>
+                </a:solidFill>
+                <a:latin typeface="Calibri" pitchFamily="34" charset="0"/>
+                <a:ea typeface="Calibri" pitchFamily="34" charset="-122"/>
+                <a:cs typeface="Calibri" pitchFamily="34" charset="-120"/>
+              </a:rPr>
+              <a:t>Switched device without pulling first</a:t>
+            </a:r>
+            <a:endParaRPr lang="en-US" sz="950" dirty="0"/>
+          </a:p>
+        </p:txBody>
+      </p:sp>
+      <p:sp>
+        <p:nvSpPr>
+          <p:cNvPr id="16" name="Text 14"/>
+          <p:cNvSpPr/>
+          <p:nvPr/>
+        </p:nvSpPr>
+        <p:spPr>
+          <a:xfrm>
+            <a:off x="4892040" y="2770632"/>
+            <a:ext cx="3657600" cy="292608"/>
+          </a:xfrm>
+          <a:prstGeom prst="rect">
+            <a:avLst/>
+          </a:prstGeom>
+          <a:noFill/>
+          <a:ln/>
+        </p:spPr>
+        <p:txBody>
+          <a:bodyPr wrap="square" lIns="0" tIns="0" rIns="0" bIns="0" rtlCol="0" anchor="t"/>
+          <a:lstStyle/>
+          <a:p>
+            <a:pPr algn="l" indent="0" marL="0">
+              <a:buNone/>
+            </a:pPr>
+            <a:r>
+              <a:rPr lang="en-US" sz="1050" dirty="0">
+                <a:solidFill>
+                  <a:srgbClr val="374151"/>
+                </a:solidFill>
+                <a:latin typeface="Calibri" pitchFamily="34" charset="0"/>
+                <a:ea typeface="Calibri" pitchFamily="34" charset="-122"/>
+                <a:cs typeface="Calibri" pitchFamily="34" charset="-120"/>
+              </a:rPr>
+              <a:t>在 A 機 push 後，B 機繼續工作但忘了 pull</a:t>
+            </a:r>
+            <a:endParaRPr lang="en-US" sz="1050" dirty="0"/>
+          </a:p>
+        </p:txBody>
+      </p:sp>
+      <p:sp>
+        <p:nvSpPr>
+          <p:cNvPr id="17" name="Shape 15"/>
+          <p:cNvSpPr/>
+          <p:nvPr/>
+        </p:nvSpPr>
+        <p:spPr>
+          <a:xfrm>
+            <a:off x="548640" y="3291840"/>
+            <a:ext cx="4023360" cy="1325880"/>
+          </a:xfrm>
+          <a:prstGeom prst="roundRect">
+            <a:avLst>
+              <a:gd name="adj" fmla="val 4138"/>
+            </a:avLst>
+          </a:prstGeom>
+          <a:solidFill>
+            <a:srgbClr val="FFFFFF"/>
+          </a:solidFill>
+          <a:ln w="12700">
+            <a:solidFill>
+              <a:srgbClr val="E5E7EB"/>
+            </a:solidFill>
+            <a:prstDash val="solid"/>
+          </a:ln>
+        </p:spPr>
+      </p:sp>
+      <p:sp>
+        <p:nvSpPr>
+          <p:cNvPr id="18" name="Shape 16"/>
+          <p:cNvSpPr/>
+          <p:nvPr/>
+        </p:nvSpPr>
+        <p:spPr>
+          <a:xfrm>
+            <a:off x="731520" y="3456432"/>
+            <a:ext cx="777240" cy="256032"/>
+          </a:xfrm>
+          <a:prstGeom prst="roundRect">
+            <a:avLst>
+              <a:gd name="adj" fmla="val 50000"/>
+            </a:avLst>
+          </a:prstGeom>
+          <a:solidFill>
+            <a:srgbClr val="FEF3C7"/>
+          </a:solidFill>
+          <a:ln w="12700">
+            <a:solidFill>
+              <a:srgbClr val="FEF3C7"/>
+            </a:solidFill>
+            <a:prstDash val="solid"/>
+          </a:ln>
+        </p:spPr>
+      </p:sp>
+      <p:sp>
+        <p:nvSpPr>
+          <p:cNvPr id="19" name="Text 17"/>
+          <p:cNvSpPr/>
+          <p:nvPr/>
+        </p:nvSpPr>
+        <p:spPr>
+          <a:xfrm>
+            <a:off x="731520" y="3456432"/>
+            <a:ext cx="777240" cy="256032"/>
+          </a:xfrm>
+          <a:prstGeom prst="rect">
+            <a:avLst/>
+          </a:prstGeom>
+          <a:noFill/>
+          <a:ln/>
+        </p:spPr>
+        <p:txBody>
+          <a:bodyPr wrap="square" lIns="0" tIns="0" rIns="0" bIns="0" rtlCol="0" anchor="ctr"/>
+          <a:lstStyle/>
+          <a:p>
+            <a:pPr algn="ctr" indent="0" marL="0">
+              <a:buNone/>
+            </a:pPr>
+            <a:r>
+              <a:rPr lang="en-US" sz="1000" b="1" dirty="0">
+                <a:solidFill>
+                  <a:srgbClr val="92400E"/>
+                </a:solidFill>
+                <a:latin typeface="Calibri" pitchFamily="34" charset="0"/>
+                <a:ea typeface="Calibri" pitchFamily="34" charset="-122"/>
+                <a:cs typeface="Calibri" pitchFamily="34" charset="-120"/>
+              </a:rPr>
+              <a:t>偶發</a:t>
+            </a:r>
+            <a:endParaRPr lang="en-US" sz="1000" dirty="0"/>
+          </a:p>
+        </p:txBody>
+      </p:sp>
+      <p:sp>
+        <p:nvSpPr>
+          <p:cNvPr id="20" name="Text 18"/>
+          <p:cNvSpPr/>
+          <p:nvPr/>
+        </p:nvSpPr>
+        <p:spPr>
+          <a:xfrm>
+            <a:off x="731520" y="3794760"/>
+            <a:ext cx="3657600" cy="292608"/>
+          </a:xfrm>
+          <a:prstGeom prst="rect">
+            <a:avLst/>
+          </a:prstGeom>
+          <a:noFill/>
+          <a:ln/>
+        </p:spPr>
+        <p:txBody>
+          <a:bodyPr wrap="square" lIns="0" tIns="0" rIns="0" bIns="0" rtlCol="0" anchor="ctr"/>
+          <a:lstStyle/>
+          <a:p>
+            <a:pPr algn="l" indent="0" marL="0">
+              <a:buNone/>
+            </a:pPr>
+            <a:r>
+              <a:rPr lang="en-US" sz="1350" b="1" dirty="0">
+                <a:solidFill>
+                  <a:srgbClr val="111827"/>
+                </a:solidFill>
+                <a:latin typeface="Calibri" pitchFamily="34" charset="0"/>
+                <a:ea typeface="Calibri" pitchFamily="34" charset="-122"/>
+                <a:cs typeface="Calibri" pitchFamily="34" charset="-120"/>
+              </a:rPr>
+              <a:t>AI 在背景動過你沒注意</a:t>
+            </a:r>
+            <a:endParaRPr lang="en-US" sz="1350" dirty="0"/>
+          </a:p>
+        </p:txBody>
+      </p:sp>
+      <p:sp>
+        <p:nvSpPr>
+          <p:cNvPr id="21" name="Text 19"/>
+          <p:cNvSpPr/>
+          <p:nvPr/>
+        </p:nvSpPr>
+        <p:spPr>
+          <a:xfrm>
+            <a:off x="731520" y="4069080"/>
+            <a:ext cx="3657600" cy="201168"/>
+          </a:xfrm>
+          <a:prstGeom prst="rect">
+            <a:avLst/>
+          </a:prstGeom>
+          <a:noFill/>
+          <a:ln/>
+        </p:spPr>
+        <p:txBody>
+          <a:bodyPr wrap="square" lIns="0" tIns="0" rIns="0" bIns="0" rtlCol="0" anchor="ctr"/>
+          <a:lstStyle/>
+          <a:p>
+            <a:pPr algn="l" indent="0" marL="0">
+              <a:buNone/>
+            </a:pPr>
+            <a:r>
+              <a:rPr lang="en-US" sz="950" i="1" dirty="0">
+                <a:solidFill>
+                  <a:srgbClr val="6B7280"/>
+                </a:solidFill>
+                <a:latin typeface="Calibri" pitchFamily="34" charset="0"/>
+                <a:ea typeface="Calibri" pitchFamily="34" charset="-122"/>
+                <a:cs typeface="Calibri" pitchFamily="34" charset="-120"/>
+              </a:rPr>
+              <a:t>AI did some git work last session</a:t>
+            </a:r>
+            <a:endParaRPr lang="en-US" sz="950" dirty="0"/>
+          </a:p>
+        </p:txBody>
+      </p:sp>
+      <p:sp>
+        <p:nvSpPr>
+          <p:cNvPr id="22" name="Text 20"/>
+          <p:cNvSpPr/>
+          <p:nvPr/>
+        </p:nvSpPr>
+        <p:spPr>
+          <a:xfrm>
+            <a:off x="731520" y="4279392"/>
+            <a:ext cx="3657600" cy="292608"/>
+          </a:xfrm>
+          <a:prstGeom prst="rect">
+            <a:avLst/>
+          </a:prstGeom>
+          <a:noFill/>
+          <a:ln/>
+        </p:spPr>
+        <p:txBody>
+          <a:bodyPr wrap="square" lIns="0" tIns="0" rIns="0" bIns="0" rtlCol="0" anchor="t"/>
+          <a:lstStyle/>
+          <a:p>
+            <a:pPr algn="l" indent="0" marL="0">
+              <a:buNone/>
+            </a:pPr>
+            <a:r>
+              <a:rPr lang="en-US" sz="1050" dirty="0">
+                <a:solidFill>
+                  <a:srgbClr val="374151"/>
+                </a:solidFill>
+                <a:latin typeface="Calibri" pitchFamily="34" charset="0"/>
+                <a:ea typeface="Calibri" pitchFamily="34" charset="-122"/>
+                <a:cs typeface="Calibri" pitchFamily="34" charset="-120"/>
+              </a:rPr>
+              <a:t>Claude 上一輪 session 自動 commit/push 過，你不知道</a:t>
+            </a:r>
+            <a:endParaRPr lang="en-US" sz="1050" dirty="0"/>
+          </a:p>
+        </p:txBody>
+      </p:sp>
+      <p:sp>
+        <p:nvSpPr>
+          <p:cNvPr id="23" name="Shape 21"/>
+          <p:cNvSpPr/>
+          <p:nvPr/>
+        </p:nvSpPr>
+        <p:spPr>
+          <a:xfrm>
+            <a:off x="4709160" y="3291840"/>
+            <a:ext cx="4023360" cy="1325880"/>
+          </a:xfrm>
+          <a:prstGeom prst="roundRect">
+            <a:avLst>
+              <a:gd name="adj" fmla="val 4138"/>
+            </a:avLst>
+          </a:prstGeom>
+          <a:solidFill>
+            <a:srgbClr val="FFFFFF"/>
+          </a:solidFill>
+          <a:ln w="12700">
+            <a:solidFill>
+              <a:srgbClr val="E5E7EB"/>
+            </a:solidFill>
+            <a:prstDash val="solid"/>
+          </a:ln>
+        </p:spPr>
+      </p:sp>
+      <p:sp>
+        <p:nvSpPr>
+          <p:cNvPr id="24" name="Shape 22"/>
+          <p:cNvSpPr/>
+          <p:nvPr/>
+        </p:nvSpPr>
+        <p:spPr>
+          <a:xfrm>
+            <a:off x="4892040" y="3456432"/>
+            <a:ext cx="777240" cy="256032"/>
+          </a:xfrm>
+          <a:prstGeom prst="roundRect">
+            <a:avLst>
+              <a:gd name="adj" fmla="val 50000"/>
+            </a:avLst>
+          </a:prstGeom>
+          <a:solidFill>
+            <a:srgbClr val="F3F4F6"/>
+          </a:solidFill>
+          <a:ln w="12700">
+            <a:solidFill>
+              <a:srgbClr val="F3F4F6"/>
+            </a:solidFill>
+            <a:prstDash val="solid"/>
+          </a:ln>
+        </p:spPr>
+      </p:sp>
+      <p:sp>
+        <p:nvSpPr>
+          <p:cNvPr id="25" name="Text 23"/>
+          <p:cNvSpPr/>
+          <p:nvPr/>
+        </p:nvSpPr>
+        <p:spPr>
+          <a:xfrm>
+            <a:off x="4892040" y="3456432"/>
+            <a:ext cx="777240" cy="256032"/>
+          </a:xfrm>
+          <a:prstGeom prst="rect">
+            <a:avLst/>
+          </a:prstGeom>
+          <a:noFill/>
+          <a:ln/>
+        </p:spPr>
+        <p:txBody>
+          <a:bodyPr wrap="square" lIns="0" tIns="0" rIns="0" bIns="0" rtlCol="0" anchor="ctr"/>
+          <a:lstStyle/>
+          <a:p>
+            <a:pPr algn="ctr" indent="0" marL="0">
+              <a:buNone/>
+            </a:pPr>
+            <a:r>
+              <a:rPr lang="en-US" sz="1000" b="1" dirty="0">
+                <a:solidFill>
+                  <a:srgbClr val="374151"/>
+                </a:solidFill>
+                <a:latin typeface="Calibri" pitchFamily="34" charset="0"/>
+                <a:ea typeface="Calibri" pitchFamily="34" charset="-122"/>
+                <a:cs typeface="Calibri" pitchFamily="34" charset="-120"/>
+              </a:rPr>
+              <a:t>罕見</a:t>
+            </a:r>
+            <a:endParaRPr lang="en-US" sz="1000" dirty="0"/>
+          </a:p>
+        </p:txBody>
+      </p:sp>
+      <p:sp>
+        <p:nvSpPr>
           <p:cNvPr id="26" name="Text 24"/>
           <p:cNvSpPr/>
           <p:nvPr/>
         </p:nvSpPr>
         <p:spPr>
           <a:xfrm>
-            <a:off x="777240" y="5413248"/>
-            <a:ext cx="7863840" cy="384048"/>
-          </a:xfrm>
-          <a:prstGeom prst="rect">
-            <a:avLst/>
-          </a:prstGeom>
-          <a:noFill/>
-          <a:ln/>
-        </p:spPr>
-        <p:txBody>
-          <a:bodyPr wrap="square" lIns="0" tIns="0" rIns="0" bIns="0" rtlCol="0" anchor="ctr"/>
-          <a:lstStyle/>
-          <a:p>
-            <a:pPr algn="l" indent="0" marL="0">
-              <a:buNone/>
-            </a:pPr>
-            <a:r>
-              <a:rPr lang="en-US" sz="1100" dirty="0">
+            <a:off x="4892040" y="3794760"/>
+            <a:ext cx="3657600" cy="292608"/>
+          </a:xfrm>
+          <a:prstGeom prst="rect">
+            <a:avLst/>
+          </a:prstGeom>
+          <a:noFill/>
+          <a:ln/>
+        </p:spPr>
+        <p:txBody>
+          <a:bodyPr wrap="square" lIns="0" tIns="0" rIns="0" bIns="0" rtlCol="0" anchor="ctr"/>
+          <a:lstStyle/>
+          <a:p>
+            <a:pPr algn="l" indent="0" marL="0">
+              <a:buNone/>
+            </a:pPr>
+            <a:r>
+              <a:rPr lang="en-US" sz="1350" b="1" dirty="0">
+                <a:solidFill>
+                  <a:srgbClr val="111827"/>
+                </a:solidFill>
+                <a:latin typeface="Calibri" pitchFamily="34" charset="0"/>
+                <a:ea typeface="Calibri" pitchFamily="34" charset="-122"/>
+                <a:cs typeface="Calibri" pitchFamily="34" charset="-120"/>
+              </a:rPr>
+              <a:t>自己的 branch 也被推過</a:t>
+            </a:r>
+            <a:endParaRPr lang="en-US" sz="1350" dirty="0"/>
+          </a:p>
+        </p:txBody>
+      </p:sp>
+      <p:sp>
+        <p:nvSpPr>
+          <p:cNvPr id="27" name="Text 25"/>
+          <p:cNvSpPr/>
+          <p:nvPr/>
+        </p:nvSpPr>
+        <p:spPr>
+          <a:xfrm>
+            <a:off x="4892040" y="4069080"/>
+            <a:ext cx="3657600" cy="201168"/>
+          </a:xfrm>
+          <a:prstGeom prst="rect">
+            <a:avLst/>
+          </a:prstGeom>
+          <a:noFill/>
+          <a:ln/>
+        </p:spPr>
+        <p:txBody>
+          <a:bodyPr wrap="square" lIns="0" tIns="0" rIns="0" bIns="0" rtlCol="0" anchor="ctr"/>
+          <a:lstStyle/>
+          <a:p>
+            <a:pPr algn="l" indent="0" marL="0">
+              <a:buNone/>
+            </a:pPr>
+            <a:r>
+              <a:rPr lang="en-US" sz="950" i="1" dirty="0">
+                <a:solidFill>
+                  <a:srgbClr val="6B7280"/>
+                </a:solidFill>
+                <a:latin typeface="Calibri" pitchFamily="34" charset="0"/>
+                <a:ea typeface="Calibri" pitchFamily="34" charset="-122"/>
+                <a:cs typeface="Calibri" pitchFamily="34" charset="-120"/>
+              </a:rPr>
+              <a:t>Your own branch was pushed elsewhere</a:t>
+            </a:r>
+            <a:endParaRPr lang="en-US" sz="950" dirty="0"/>
+          </a:p>
+        </p:txBody>
+      </p:sp>
+      <p:sp>
+        <p:nvSpPr>
+          <p:cNvPr id="28" name="Text 26"/>
+          <p:cNvSpPr/>
+          <p:nvPr/>
+        </p:nvSpPr>
+        <p:spPr>
+          <a:xfrm>
+            <a:off x="4892040" y="4279392"/>
+            <a:ext cx="3657600" cy="292608"/>
+          </a:xfrm>
+          <a:prstGeom prst="rect">
+            <a:avLst/>
+          </a:prstGeom>
+          <a:noFill/>
+          <a:ln/>
+        </p:spPr>
+        <p:txBody>
+          <a:bodyPr wrap="square" lIns="0" tIns="0" rIns="0" bIns="0" rtlCol="0" anchor="t"/>
+          <a:lstStyle/>
+          <a:p>
+            <a:pPr algn="l" indent="0" marL="0">
+              <a:buNone/>
+            </a:pPr>
+            <a:r>
+              <a:rPr lang="en-US" sz="1050" dirty="0">
                 <a:solidFill>
                   <a:srgbClr val="374151"/>
                 </a:solidFill>
@@ -14239,9 +13976,114 @@
                 <a:ea typeface="Calibri" pitchFamily="34" charset="-122"/>
                 <a:cs typeface="Calibri" pitchFamily="34" charset="-120"/>
               </a:rPr>
-              <a:t>⚠️ AI 看到 push 失敗會自然建議 --force —— 你要主動要求 --force-with-lease，下一頁教你怎麼說。</a:t>
-            </a:r>
-            <a:endParaRPr lang="en-US" sz="1100" dirty="0"/>
+              <a:t>hie-rei 用 &lt;name&gt;/feature/ 命名後幾乎不會撞</a:t>
+            </a:r>
+            <a:endParaRPr lang="en-US" sz="1050" dirty="0"/>
+          </a:p>
+        </p:txBody>
+      </p:sp>
+      <p:sp>
+        <p:nvSpPr>
+          <p:cNvPr id="29" name="Shape 27"/>
+          <p:cNvSpPr/>
+          <p:nvPr/>
+        </p:nvSpPr>
+        <p:spPr>
+          <a:xfrm>
+            <a:off x="548640" y="5029200"/>
+            <a:ext cx="8229600" cy="640080"/>
+          </a:xfrm>
+          <a:prstGeom prst="roundRect">
+            <a:avLst>
+              <a:gd name="adj" fmla="val 7143"/>
+            </a:avLst>
+          </a:prstGeom>
+          <a:solidFill>
+            <a:srgbClr val="DBEAFE"/>
+          </a:solidFill>
+          <a:ln w="9525">
+            <a:solidFill>
+              <a:srgbClr val="93C5FD"/>
+            </a:solidFill>
+            <a:prstDash val="solid"/>
+          </a:ln>
+        </p:spPr>
+      </p:sp>
+      <p:sp>
+        <p:nvSpPr>
+          <p:cNvPr id="30" name="Text 28"/>
+          <p:cNvSpPr/>
+          <p:nvPr/>
+        </p:nvSpPr>
+        <p:spPr>
+          <a:xfrm>
+            <a:off x="777240" y="5102352"/>
+            <a:ext cx="7772400" cy="292608"/>
+          </a:xfrm>
+          <a:prstGeom prst="rect">
+            <a:avLst/>
+          </a:prstGeom>
+          <a:noFill/>
+          <a:ln/>
+        </p:spPr>
+        <p:txBody>
+          <a:bodyPr wrap="square" lIns="0" tIns="0" rIns="0" bIns="0" rtlCol="0" anchor="ctr"/>
+          <a:lstStyle/>
+          <a:p>
+            <a:pPr algn="l" indent="0" marL="0">
+              <a:buNone/>
+            </a:pPr>
+            <a:r>
+              <a:rPr lang="en-US" sz="1200" b="1" dirty="0">
+                <a:solidFill>
+                  <a:srgbClr val="1E40AF"/>
+                </a:solidFill>
+                <a:latin typeface="Calibri" pitchFamily="34" charset="0"/>
+                <a:ea typeface="Calibri" pitchFamily="34" charset="-122"/>
+                <a:cs typeface="Calibri" pitchFamily="34" charset="-120"/>
+              </a:rPr>
+              <a:t>症狀都長一樣——你不需要分辨是哪種，AI 看 git 自己就知道</a:t>
+            </a:r>
+            <a:endParaRPr lang="en-US" sz="1200" dirty="0"/>
+          </a:p>
+        </p:txBody>
+      </p:sp>
+      <p:sp>
+        <p:nvSpPr>
+          <p:cNvPr id="31" name="Text 29"/>
+          <p:cNvSpPr/>
+          <p:nvPr/>
+        </p:nvSpPr>
+        <p:spPr>
+          <a:xfrm>
+            <a:off x="777240" y="5394960"/>
+            <a:ext cx="7772400" cy="237744"/>
+          </a:xfrm>
+          <a:prstGeom prst="rect">
+            <a:avLst/>
+          </a:prstGeom>
+          <a:noFill/>
+          <a:ln/>
+        </p:spPr>
+        <p:txBody>
+          <a:bodyPr wrap="square" lIns="0" tIns="0" rIns="0" bIns="0" rtlCol="0" anchor="ctr"/>
+          <a:lstStyle/>
+          <a:p>
+            <a:pPr algn="l" indent="0" marL="0">
+              <a:buNone/>
+            </a:pPr>
+            <a:r>
+              <a:rPr lang="en-US" sz="1000" i="1" dirty="0">
+                <a:solidFill>
+                  <a:srgbClr val="1E40AF"/>
+                </a:solidFill>
+                <a:latin typeface="Calibri" pitchFamily="34" charset="0"/>
+                <a:ea typeface="Calibri" pitchFamily="34" charset="-122"/>
+                <a:cs typeface="Calibri" pitchFamily="34" charset="-120"/>
+              </a:rPr>
+              <a:t>Same symptom — you don't need to diagnose. AI will figure it out.</a:t>
+            </a:r>
+            <a:endParaRPr lang="en-US" sz="1000" dirty="0"/>
           </a:p>
         </p:txBody>
       </p:sp>
@@ -15966,7 +15808,7 @@
                 <a:ea typeface="Calibri" pitchFamily="34" charset="-122"/>
                 <a:cs typeface="Calibri" pitchFamily="34" charset="-120"/>
               </a:rPr>
-              <a:t>DEFENSIVE PROMPTS</a:t>
+              <a:t>DESIGNER ACTIONS</a:t>
             </a:r>
             <a:endParaRPr lang="en-US" sz="1000" dirty="0"/>
           </a:p>
@@ -16005,7 +15847,7 @@
                 <a:ea typeface="Calibri" pitchFamily="34" charset="-122"/>
                 <a:cs typeface="Calibri" pitchFamily="34" charset="-120"/>
               </a:rPr>
-              <a:t>對 AI 說這幾句，避免災難</a:t>
+              <a:t>對 AI 說：「處理一下」</a:t>
             </a:r>
             <a:endParaRPr lang="en-US" sz="3000" dirty="0"/>
           </a:p>
@@ -16044,7 +15886,7 @@
                 <a:ea typeface="Calibri" pitchFamily="34" charset="-122"/>
                 <a:cs typeface="Calibri" pitchFamily="34" charset="-120"/>
               </a:rPr>
-              <a:t>Three sentences to keep AI from breaking your branch</a:t>
+              <a:t>Three ways to ask AI to handle it</a:t>
             </a:r>
             <a:endParaRPr lang="en-US" sz="1400" dirty="0"/>
           </a:p>
@@ -16075,17 +15917,17 @@
               <a:buNone/>
             </a:pPr>
             <a:r>
-              <a:rPr lang="en-US" sz="1200" dirty="0">
-                <a:solidFill>
-                  <a:srgbClr val="6B7280"/>
-                </a:solidFill>
-                <a:latin typeface="Calibri" pitchFamily="34" charset="0"/>
-                <a:ea typeface="Calibri" pitchFamily="34" charset="-122"/>
-                <a:cs typeface="Calibri" pitchFamily="34" charset="-120"/>
-              </a:rPr>
-              <a:t>AI 預設會「快點解決問題」— 這幾句明確的指令把你的安全要求講清楚</a:t>
-            </a:r>
-            <a:endParaRPr lang="en-US" sz="1200" dirty="0"/>
+              <a:rPr lang="en-US" sz="1400" b="1" dirty="0">
+                <a:solidFill>
+                  <a:srgbClr val="059669"/>
+                </a:solidFill>
+                <a:latin typeface="Calibri" pitchFamily="34" charset="0"/>
+                <a:ea typeface="Calibri" pitchFamily="34" charset="-122"/>
+                <a:cs typeface="Calibri" pitchFamily="34" charset="-120"/>
+              </a:rPr>
+              <a:t>有效的講法（任一即可）</a:t>
+            </a:r>
+            <a:endParaRPr lang="en-US" sz="1400" dirty="0"/>
           </a:p>
         </p:txBody>
       </p:sp>
@@ -16097,150 +15939,8 @@
         </p:nvSpPr>
         <p:spPr>
           <a:xfrm>
-            <a:off x="548640" y="2194560"/>
-            <a:ext cx="411480" cy="411480"/>
-          </a:xfrm>
-          <a:prstGeom prst="ellipse">
-            <a:avLst/>
-          </a:prstGeom>
-          <a:solidFill>
-            <a:srgbClr val="1A66FF"/>
-          </a:solidFill>
-          <a:ln w="12700">
-            <a:solidFill>
-              <a:srgbClr val="1A66FF"/>
-            </a:solidFill>
-            <a:prstDash val="solid"/>
-          </a:ln>
-        </p:spPr>
-      </p:sp>
-      <p:sp>
-        <p:nvSpPr>
-          <p:cNvPr id="7" name="Text 5"/>
-          <p:cNvSpPr/>
-          <p:nvPr/>
-        </p:nvSpPr>
-        <p:spPr>
-          <a:xfrm>
-            <a:off x="548640" y="2194560"/>
-            <a:ext cx="411480" cy="411480"/>
-          </a:xfrm>
-          <a:prstGeom prst="rect">
-            <a:avLst/>
-          </a:prstGeom>
-          <a:noFill/>
-          <a:ln/>
-        </p:spPr>
-        <p:txBody>
-          <a:bodyPr wrap="square" lIns="0" tIns="0" rIns="0" bIns="0" rtlCol="0" anchor="ctr"/>
-          <a:lstStyle/>
-          <a:p>
-            <a:pPr algn="ctr" indent="0" marL="0">
-              <a:buNone/>
-            </a:pPr>
-            <a:r>
-              <a:rPr lang="en-US" sz="1600" b="1" dirty="0">
-                <a:solidFill>
-                  <a:srgbClr val="FFFFFF"/>
-                </a:solidFill>
-                <a:latin typeface="Calibri" pitchFamily="34" charset="0"/>
-                <a:ea typeface="Calibri" pitchFamily="34" charset="-122"/>
-                <a:cs typeface="Calibri" pitchFamily="34" charset="-120"/>
-              </a:rPr>
-              <a:t>1</a:t>
-            </a:r>
-            <a:endParaRPr lang="en-US" sz="1600" dirty="0"/>
-          </a:p>
-        </p:txBody>
-      </p:sp>
-      <p:sp>
-        <p:nvSpPr>
-          <p:cNvPr id="8" name="Text 6"/>
-          <p:cNvSpPr/>
-          <p:nvPr/>
-        </p:nvSpPr>
-        <p:spPr>
-          <a:xfrm>
-            <a:off x="1097280" y="2103120"/>
-            <a:ext cx="4114800" cy="274320"/>
-          </a:xfrm>
-          <a:prstGeom prst="rect">
-            <a:avLst/>
-          </a:prstGeom>
-          <a:noFill/>
-          <a:ln/>
-        </p:spPr>
-        <p:txBody>
-          <a:bodyPr wrap="square" lIns="0" tIns="0" rIns="0" bIns="0" rtlCol="0" anchor="ctr"/>
-          <a:lstStyle/>
-          <a:p>
-            <a:pPr algn="l" indent="0" marL="0">
-              <a:buNone/>
-            </a:pPr>
-            <a:r>
-              <a:rPr lang="en-US" sz="1400" b="1" dirty="0">
-                <a:solidFill>
-                  <a:srgbClr val="111827"/>
-                </a:solidFill>
-                <a:latin typeface="Calibri" pitchFamily="34" charset="0"/>
-                <a:ea typeface="Calibri" pitchFamily="34" charset="-122"/>
-                <a:cs typeface="Calibri" pitchFamily="34" charset="-120"/>
-              </a:rPr>
-              <a:t>Rebase 前先預告</a:t>
-            </a:r>
-            <a:endParaRPr lang="en-US" sz="1400" dirty="0"/>
-          </a:p>
-        </p:txBody>
-      </p:sp>
-      <p:sp>
-        <p:nvSpPr>
-          <p:cNvPr id="9" name="Text 7"/>
-          <p:cNvSpPr/>
-          <p:nvPr/>
-        </p:nvSpPr>
-        <p:spPr>
-          <a:xfrm>
-            <a:off x="1097280" y="2359152"/>
-            <a:ext cx="4114800" cy="201168"/>
-          </a:xfrm>
-          <a:prstGeom prst="rect">
-            <a:avLst/>
-          </a:prstGeom>
-          <a:noFill/>
-          <a:ln/>
-        </p:spPr>
-        <p:txBody>
-          <a:bodyPr wrap="square" lIns="0" tIns="0" rIns="0" bIns="0" rtlCol="0" anchor="ctr"/>
-          <a:lstStyle/>
-          <a:p>
-            <a:pPr algn="l" indent="0" marL="0">
-              <a:buNone/>
-            </a:pPr>
-            <a:r>
-              <a:rPr lang="en-US" sz="1000" dirty="0">
-                <a:solidFill>
-                  <a:srgbClr val="6B7280"/>
-                </a:solidFill>
-                <a:latin typeface="Calibri" pitchFamily="34" charset="0"/>
-                <a:ea typeface="Calibri" pitchFamily="34" charset="-122"/>
-                <a:cs typeface="Calibri" pitchFamily="34" charset="-120"/>
-              </a:rPr>
-              <a:t>Preview before rebase</a:t>
-            </a:r>
-            <a:endParaRPr lang="en-US" sz="1000" dirty="0"/>
-          </a:p>
-        </p:txBody>
-      </p:sp>
-      <p:sp>
-        <p:nvSpPr>
-          <p:cNvPr id="10" name="Shape 8"/>
-          <p:cNvSpPr/>
-          <p:nvPr/>
-        </p:nvSpPr>
-        <p:spPr>
-          <a:xfrm>
-            <a:off x="1097280" y="2606040"/>
-            <a:ext cx="7680960" cy="365760"/>
+            <a:off x="548640" y="2057400"/>
+            <a:ext cx="8229600" cy="548640"/>
           </a:xfrm>
           <a:prstGeom prst="roundRect">
             <a:avLst>
@@ -16248,11 +15948,11 @@
             </a:avLst>
           </a:prstGeom>
           <a:solidFill>
-            <a:srgbClr val="1F2937"/>
+            <a:srgbClr val="ECFDF5"/>
           </a:solidFill>
           <a:ln w="12700">
             <a:solidFill>
-              <a:srgbClr val="1F2937"/>
+              <a:srgbClr val="6EE7B7"/>
             </a:solidFill>
             <a:prstDash val="solid"/>
           </a:ln>
@@ -16260,102 +15960,24 @@
       </p:sp>
       <p:sp>
         <p:nvSpPr>
-          <p:cNvPr id="11" name="Text 9"/>
-          <p:cNvSpPr/>
-          <p:nvPr/>
-        </p:nvSpPr>
-        <p:spPr>
-          <a:xfrm>
-            <a:off x="1234440" y="2633472"/>
-            <a:ext cx="7406640" cy="310896"/>
-          </a:xfrm>
-          <a:prstGeom prst="rect">
-            <a:avLst/>
-          </a:prstGeom>
-          <a:noFill/>
-          <a:ln/>
-        </p:spPr>
-        <p:txBody>
-          <a:bodyPr wrap="square" lIns="0" tIns="0" rIns="0" bIns="0" rtlCol="0" anchor="ctr"/>
-          <a:lstStyle/>
-          <a:p>
-            <a:pPr algn="l" indent="0" marL="0">
-              <a:buNone/>
-            </a:pPr>
-            <a:r>
-              <a:rPr lang="en-US" sz="1150" dirty="0">
-                <a:solidFill>
-                  <a:srgbClr val="5EEAD4"/>
-                </a:solidFill>
-                <a:latin typeface="Calibri" pitchFamily="34" charset="0"/>
-                <a:ea typeface="Calibri" pitchFamily="34" charset="-122"/>
-                <a:cs typeface="Calibri" pitchFamily="34" charset="-120"/>
-              </a:rPr>
-              <a:t>「rebase 之前，先告訴我會影響哪些 commit。」</a:t>
-            </a:r>
-            <a:endParaRPr lang="en-US" sz="1150" dirty="0"/>
-          </a:p>
-        </p:txBody>
-      </p:sp>
-      <p:sp>
-        <p:nvSpPr>
-          <p:cNvPr id="12" name="Text 10"/>
-          <p:cNvSpPr/>
-          <p:nvPr/>
-        </p:nvSpPr>
-        <p:spPr>
-          <a:xfrm>
-            <a:off x="1097280" y="3017520"/>
-            <a:ext cx="7680960" cy="164592"/>
-          </a:xfrm>
-          <a:prstGeom prst="rect">
-            <a:avLst/>
-          </a:prstGeom>
-          <a:noFill/>
-          <a:ln/>
-        </p:spPr>
-        <p:txBody>
-          <a:bodyPr wrap="square" lIns="0" tIns="0" rIns="0" bIns="0" rtlCol="0" anchor="ctr"/>
-          <a:lstStyle/>
-          <a:p>
-            <a:pPr algn="l" indent="0" marL="0">
-              <a:buNone/>
-            </a:pPr>
-            <a:r>
-              <a:rPr lang="en-US" sz="950" i="1" dirty="0">
-                <a:solidFill>
-                  <a:srgbClr val="6B7280"/>
-                </a:solidFill>
-                <a:latin typeface="Calibri" pitchFamily="34" charset="0"/>
-                <a:ea typeface="Calibri" pitchFamily="34" charset="-122"/>
-                <a:cs typeface="Calibri" pitchFamily="34" charset="-120"/>
-              </a:rPr>
-              <a:t>防的是：AI 直接 rebase + force push 完才告訴你，發現出事已晚。</a:t>
-            </a:r>
-            <a:endParaRPr lang="en-US" sz="950" dirty="0"/>
-          </a:p>
-        </p:txBody>
-      </p:sp>
-      <p:sp>
-        <p:nvSpPr>
-          <p:cNvPr id="13" name="Shape 11"/>
-          <p:cNvSpPr/>
-          <p:nvPr/>
-        </p:nvSpPr>
-        <p:spPr>
-          <a:xfrm>
-            <a:off x="548640" y="3246120"/>
-            <a:ext cx="411480" cy="411480"/>
-          </a:xfrm>
-          <a:prstGeom prst="ellipse">
+          <p:cNvPr id="7" name="Shape 5"/>
+          <p:cNvSpPr/>
+          <p:nvPr/>
+        </p:nvSpPr>
+        <p:spPr>
+          <a:xfrm>
+            <a:off x="548640" y="2057400"/>
+            <a:ext cx="73152" cy="548640"/>
+          </a:xfrm>
+          <a:prstGeom prst="rect">
             <a:avLst/>
           </a:prstGeom>
           <a:solidFill>
-            <a:srgbClr val="1A66FF"/>
+            <a:srgbClr val="059669"/>
           </a:solidFill>
           <a:ln w="12700">
             <a:solidFill>
-              <a:srgbClr val="1A66FF"/>
+              <a:srgbClr val="059669"/>
             </a:solidFill>
             <a:prstDash val="solid"/>
           </a:ln>
@@ -16363,14 +15985,14 @@
       </p:sp>
       <p:sp>
         <p:nvSpPr>
-          <p:cNvPr id="14" name="Text 12"/>
-          <p:cNvSpPr/>
-          <p:nvPr/>
-        </p:nvSpPr>
-        <p:spPr>
-          <a:xfrm>
-            <a:off x="548640" y="3246120"/>
-            <a:ext cx="411480" cy="411480"/>
+          <p:cNvPr id="8" name="Text 6"/>
+          <p:cNvSpPr/>
+          <p:nvPr/>
+        </p:nvSpPr>
+        <p:spPr>
+          <a:xfrm>
+            <a:off x="731520" y="2057400"/>
+            <a:ext cx="274320" cy="548640"/>
           </a:xfrm>
           <a:prstGeom prst="rect">
             <a:avLst/>
@@ -16386,30 +16008,30 @@
               <a:buNone/>
             </a:pPr>
             <a:r>
-              <a:rPr lang="en-US" sz="1600" b="1" dirty="0">
-                <a:solidFill>
-                  <a:srgbClr val="FFFFFF"/>
-                </a:solidFill>
-                <a:latin typeface="Calibri" pitchFamily="34" charset="0"/>
-                <a:ea typeface="Calibri" pitchFamily="34" charset="-122"/>
-                <a:cs typeface="Calibri" pitchFamily="34" charset="-120"/>
-              </a:rPr>
-              <a:t>2</a:t>
-            </a:r>
-            <a:endParaRPr lang="en-US" sz="1600" dirty="0"/>
-          </a:p>
-        </p:txBody>
-      </p:sp>
-      <p:sp>
-        <p:nvSpPr>
-          <p:cNvPr id="15" name="Text 13"/>
-          <p:cNvSpPr/>
-          <p:nvPr/>
-        </p:nvSpPr>
-        <p:spPr>
-          <a:xfrm>
-            <a:off x="1097280" y="3154680"/>
-            <a:ext cx="4114800" cy="274320"/>
+              <a:rPr lang="en-US" sz="1800" b="1" dirty="0">
+                <a:solidFill>
+                  <a:srgbClr val="059669"/>
+                </a:solidFill>
+                <a:latin typeface="Calibri" pitchFamily="34" charset="0"/>
+                <a:ea typeface="Calibri" pitchFamily="34" charset="-122"/>
+                <a:cs typeface="Calibri" pitchFamily="34" charset="-120"/>
+              </a:rPr>
+              <a:t>✓</a:t>
+            </a:r>
+            <a:endParaRPr lang="en-US" sz="1800" dirty="0"/>
+          </a:p>
+        </p:txBody>
+      </p:sp>
+      <p:sp>
+        <p:nvSpPr>
+          <p:cNvPr id="9" name="Text 7"/>
+          <p:cNvSpPr/>
+          <p:nvPr/>
+        </p:nvSpPr>
+        <p:spPr>
+          <a:xfrm>
+            <a:off x="1097280" y="2103120"/>
+            <a:ext cx="7589520" cy="292608"/>
           </a:xfrm>
           <a:prstGeom prst="rect">
             <a:avLst/>
@@ -16433,7 +16055,7 @@
                 <a:ea typeface="Calibri" pitchFamily="34" charset="-122"/>
                 <a:cs typeface="Calibri" pitchFamily="34" charset="-120"/>
               </a:rPr>
-              <a:t>永遠不要 --force</a:t>
+              <a:t>「push 被擋了，幫我處理」</a:t>
             </a:r>
             <a:endParaRPr lang="en-US" sz="1400" dirty="0"/>
           </a:p>
@@ -16441,30 +16063,30 @@
       </p:sp>
       <p:sp>
         <p:nvSpPr>
-          <p:cNvPr id="16" name="Text 14"/>
-          <p:cNvSpPr/>
-          <p:nvPr/>
-        </p:nvSpPr>
-        <p:spPr>
-          <a:xfrm>
-            <a:off x="1097280" y="3410712"/>
-            <a:ext cx="4114800" cy="201168"/>
-          </a:xfrm>
-          <a:prstGeom prst="rect">
-            <a:avLst/>
-          </a:prstGeom>
-          <a:noFill/>
-          <a:ln/>
-        </p:spPr>
-        <p:txBody>
-          <a:bodyPr wrap="square" lIns="0" tIns="0" rIns="0" bIns="0" rtlCol="0" anchor="ctr"/>
-          <a:lstStyle/>
-          <a:p>
-            <a:pPr algn="l" indent="0" marL="0">
-              <a:buNone/>
-            </a:pPr>
-            <a:r>
-              <a:rPr lang="en-US" sz="1000" dirty="0">
+          <p:cNvPr id="10" name="Text 8"/>
+          <p:cNvSpPr/>
+          <p:nvPr/>
+        </p:nvSpPr>
+        <p:spPr>
+          <a:xfrm>
+            <a:off x="1097280" y="2368296"/>
+            <a:ext cx="7589520" cy="219456"/>
+          </a:xfrm>
+          <a:prstGeom prst="rect">
+            <a:avLst/>
+          </a:prstGeom>
+          <a:noFill/>
+          <a:ln/>
+        </p:spPr>
+        <p:txBody>
+          <a:bodyPr wrap="square" lIns="0" tIns="0" rIns="0" bIns="0" rtlCol="0" anchor="ctr"/>
+          <a:lstStyle/>
+          <a:p>
+            <a:pPr algn="l" indent="0" marL="0">
+              <a:buNone/>
+            </a:pPr>
+            <a:r>
+              <a:rPr lang="en-US" sz="1000" i="1" dirty="0">
                 <a:solidFill>
                   <a:srgbClr val="6B7280"/>
                 </a:solidFill>
@@ -16472,7 +16094,7 @@
                 <a:ea typeface="Calibri" pitchFamily="34" charset="-122"/>
                 <a:cs typeface="Calibri" pitchFamily="34" charset="-120"/>
               </a:rPr>
-              <a:t>Never use --force</a:t>
+              <a:t>"Push was rejected, please handle it"</a:t>
             </a:r>
             <a:endParaRPr lang="en-US" sz="1000" dirty="0"/>
           </a:p>
@@ -16480,14 +16102,14 @@
       </p:sp>
       <p:sp>
         <p:nvSpPr>
-          <p:cNvPr id="17" name="Shape 15"/>
-          <p:cNvSpPr/>
-          <p:nvPr/>
-        </p:nvSpPr>
-        <p:spPr>
-          <a:xfrm>
-            <a:off x="1097280" y="3657600"/>
-            <a:ext cx="7680960" cy="365760"/>
+          <p:cNvPr id="11" name="Shape 9"/>
+          <p:cNvSpPr/>
+          <p:nvPr/>
+        </p:nvSpPr>
+        <p:spPr>
+          <a:xfrm>
+            <a:off x="548640" y="2697480"/>
+            <a:ext cx="8229600" cy="548640"/>
           </a:xfrm>
           <a:prstGeom prst="roundRect">
             <a:avLst>
@@ -16495,11 +16117,11 @@
             </a:avLst>
           </a:prstGeom>
           <a:solidFill>
-            <a:srgbClr val="1F2937"/>
+            <a:srgbClr val="ECFDF5"/>
           </a:solidFill>
           <a:ln w="12700">
             <a:solidFill>
-              <a:srgbClr val="1F2937"/>
+              <a:srgbClr val="6EE7B7"/>
             </a:solidFill>
             <a:prstDash val="solid"/>
           </a:ln>
@@ -16507,102 +16129,24 @@
       </p:sp>
       <p:sp>
         <p:nvSpPr>
-          <p:cNvPr id="18" name="Text 16"/>
-          <p:cNvSpPr/>
-          <p:nvPr/>
-        </p:nvSpPr>
-        <p:spPr>
-          <a:xfrm>
-            <a:off x="1234440" y="3685032"/>
-            <a:ext cx="7406640" cy="310896"/>
-          </a:xfrm>
-          <a:prstGeom prst="rect">
-            <a:avLst/>
-          </a:prstGeom>
-          <a:noFill/>
-          <a:ln/>
-        </p:spPr>
-        <p:txBody>
-          <a:bodyPr wrap="square" lIns="0" tIns="0" rIns="0" bIns="0" rtlCol="0" anchor="ctr"/>
-          <a:lstStyle/>
-          <a:p>
-            <a:pPr algn="l" indent="0" marL="0">
-              <a:buNone/>
-            </a:pPr>
-            <a:r>
-              <a:rPr lang="en-US" sz="1150" dirty="0">
-                <a:solidFill>
-                  <a:srgbClr val="5EEAD4"/>
-                </a:solidFill>
-                <a:latin typeface="Calibri" pitchFamily="34" charset="0"/>
-                <a:ea typeface="Calibri" pitchFamily="34" charset="-122"/>
-                <a:cs typeface="Calibri" pitchFamily="34" charset="-120"/>
-              </a:rPr>
-              <a:t>「需要 force push 時，請用 --force-with-lease，不要用 --force。」</a:t>
-            </a:r>
-            <a:endParaRPr lang="en-US" sz="1150" dirty="0"/>
-          </a:p>
-        </p:txBody>
-      </p:sp>
-      <p:sp>
-        <p:nvSpPr>
-          <p:cNvPr id="19" name="Text 17"/>
-          <p:cNvSpPr/>
-          <p:nvPr/>
-        </p:nvSpPr>
-        <p:spPr>
-          <a:xfrm>
-            <a:off x="1097280" y="4069080"/>
-            <a:ext cx="7680960" cy="164592"/>
-          </a:xfrm>
-          <a:prstGeom prst="rect">
-            <a:avLst/>
-          </a:prstGeom>
-          <a:noFill/>
-          <a:ln/>
-        </p:spPr>
-        <p:txBody>
-          <a:bodyPr wrap="square" lIns="0" tIns="0" rIns="0" bIns="0" rtlCol="0" anchor="ctr"/>
-          <a:lstStyle/>
-          <a:p>
-            <a:pPr algn="l" indent="0" marL="0">
-              <a:buNone/>
-            </a:pPr>
-            <a:r>
-              <a:rPr lang="en-US" sz="950" i="1" dirty="0">
-                <a:solidFill>
-                  <a:srgbClr val="6B7280"/>
-                </a:solidFill>
-                <a:latin typeface="Calibri" pitchFamily="34" charset="0"/>
-                <a:ea typeface="Calibri" pitchFamily="34" charset="-122"/>
-                <a:cs typeface="Calibri" pitchFamily="34" charset="-120"/>
-              </a:rPr>
-              <a:t>防的是：AI 預設 --force 覆蓋遠端，隊友 commit 消失。</a:t>
-            </a:r>
-            <a:endParaRPr lang="en-US" sz="950" dirty="0"/>
-          </a:p>
-        </p:txBody>
-      </p:sp>
-      <p:sp>
-        <p:nvSpPr>
-          <p:cNvPr id="20" name="Shape 18"/>
-          <p:cNvSpPr/>
-          <p:nvPr/>
-        </p:nvSpPr>
-        <p:spPr>
-          <a:xfrm>
-            <a:off x="548640" y="4297680"/>
-            <a:ext cx="411480" cy="411480"/>
-          </a:xfrm>
-          <a:prstGeom prst="ellipse">
+          <p:cNvPr id="12" name="Shape 10"/>
+          <p:cNvSpPr/>
+          <p:nvPr/>
+        </p:nvSpPr>
+        <p:spPr>
+          <a:xfrm>
+            <a:off x="548640" y="2697480"/>
+            <a:ext cx="73152" cy="548640"/>
+          </a:xfrm>
+          <a:prstGeom prst="rect">
             <a:avLst/>
           </a:prstGeom>
           <a:solidFill>
-            <a:srgbClr val="1A66FF"/>
+            <a:srgbClr val="059669"/>
           </a:solidFill>
           <a:ln w="12700">
             <a:solidFill>
-              <a:srgbClr val="1A66FF"/>
+              <a:srgbClr val="059669"/>
             </a:solidFill>
             <a:prstDash val="solid"/>
           </a:ln>
@@ -16610,14 +16154,14 @@
       </p:sp>
       <p:sp>
         <p:nvSpPr>
-          <p:cNvPr id="21" name="Text 19"/>
-          <p:cNvSpPr/>
-          <p:nvPr/>
-        </p:nvSpPr>
-        <p:spPr>
-          <a:xfrm>
-            <a:off x="548640" y="4297680"/>
-            <a:ext cx="411480" cy="411480"/>
+          <p:cNvPr id="13" name="Text 11"/>
+          <p:cNvSpPr/>
+          <p:nvPr/>
+        </p:nvSpPr>
+        <p:spPr>
+          <a:xfrm>
+            <a:off x="731520" y="2697480"/>
+            <a:ext cx="274320" cy="548640"/>
           </a:xfrm>
           <a:prstGeom prst="rect">
             <a:avLst/>
@@ -16633,30 +16177,30 @@
               <a:buNone/>
             </a:pPr>
             <a:r>
-              <a:rPr lang="en-US" sz="1600" b="1" dirty="0">
-                <a:solidFill>
-                  <a:srgbClr val="FFFFFF"/>
-                </a:solidFill>
-                <a:latin typeface="Calibri" pitchFamily="34" charset="0"/>
-                <a:ea typeface="Calibri" pitchFamily="34" charset="-122"/>
-                <a:cs typeface="Calibri" pitchFamily="34" charset="-120"/>
-              </a:rPr>
-              <a:t>3</a:t>
-            </a:r>
-            <a:endParaRPr lang="en-US" sz="1600" dirty="0"/>
-          </a:p>
-        </p:txBody>
-      </p:sp>
-      <p:sp>
-        <p:nvSpPr>
-          <p:cNvPr id="22" name="Text 20"/>
-          <p:cNvSpPr/>
-          <p:nvPr/>
-        </p:nvSpPr>
-        <p:spPr>
-          <a:xfrm>
-            <a:off x="1097280" y="4206240"/>
-            <a:ext cx="4114800" cy="274320"/>
+              <a:rPr lang="en-US" sz="1800" b="1" dirty="0">
+                <a:solidFill>
+                  <a:srgbClr val="059669"/>
+                </a:solidFill>
+                <a:latin typeface="Calibri" pitchFamily="34" charset="0"/>
+                <a:ea typeface="Calibri" pitchFamily="34" charset="-122"/>
+                <a:cs typeface="Calibri" pitchFamily="34" charset="-120"/>
+              </a:rPr>
+              <a:t>✓</a:t>
+            </a:r>
+            <a:endParaRPr lang="en-US" sz="1800" dirty="0"/>
+          </a:p>
+        </p:txBody>
+      </p:sp>
+      <p:sp>
+        <p:nvSpPr>
+          <p:cNvPr id="14" name="Text 12"/>
+          <p:cNvSpPr/>
+          <p:nvPr/>
+        </p:nvSpPr>
+        <p:spPr>
+          <a:xfrm>
+            <a:off x="1097280" y="2743200"/>
+            <a:ext cx="7589520" cy="292608"/>
           </a:xfrm>
           <a:prstGeom prst="rect">
             <a:avLst/>
@@ -16680,7 +16224,7 @@
                 <a:ea typeface="Calibri" pitchFamily="34" charset="-122"/>
                 <a:cs typeface="Calibri" pitchFamily="34" charset="-120"/>
               </a:rPr>
-              <a:t>不碰 main / shared branch</a:t>
+              <a:t>「先把別人的更新拉下來再 push」</a:t>
             </a:r>
             <a:endParaRPr lang="en-US" sz="1400" dirty="0"/>
           </a:p>
@@ -16688,30 +16232,30 @@
       </p:sp>
       <p:sp>
         <p:nvSpPr>
-          <p:cNvPr id="23" name="Text 21"/>
-          <p:cNvSpPr/>
-          <p:nvPr/>
-        </p:nvSpPr>
-        <p:spPr>
-          <a:xfrm>
-            <a:off x="1097280" y="4462272"/>
-            <a:ext cx="4114800" cy="201168"/>
-          </a:xfrm>
-          <a:prstGeom prst="rect">
-            <a:avLst/>
-          </a:prstGeom>
-          <a:noFill/>
-          <a:ln/>
-        </p:spPr>
-        <p:txBody>
-          <a:bodyPr wrap="square" lIns="0" tIns="0" rIns="0" bIns="0" rtlCol="0" anchor="ctr"/>
-          <a:lstStyle/>
-          <a:p>
-            <a:pPr algn="l" indent="0" marL="0">
-              <a:buNone/>
-            </a:pPr>
-            <a:r>
-              <a:rPr lang="en-US" sz="1000" dirty="0">
+          <p:cNvPr id="15" name="Text 13"/>
+          <p:cNvSpPr/>
+          <p:nvPr/>
+        </p:nvSpPr>
+        <p:spPr>
+          <a:xfrm>
+            <a:off x="1097280" y="3008376"/>
+            <a:ext cx="7589520" cy="219456"/>
+          </a:xfrm>
+          <a:prstGeom prst="rect">
+            <a:avLst/>
+          </a:prstGeom>
+          <a:noFill/>
+          <a:ln/>
+        </p:spPr>
+        <p:txBody>
+          <a:bodyPr wrap="square" lIns="0" tIns="0" rIns="0" bIns="0" rtlCol="0" anchor="ctr"/>
+          <a:lstStyle/>
+          <a:p>
+            <a:pPr algn="l" indent="0" marL="0">
+              <a:buNone/>
+            </a:pPr>
+            <a:r>
+              <a:rPr lang="en-US" sz="1000" i="1" dirty="0">
                 <a:solidFill>
                   <a:srgbClr val="6B7280"/>
                 </a:solidFill>
@@ -16719,7 +16263,7 @@
                 <a:ea typeface="Calibri" pitchFamily="34" charset="-122"/>
                 <a:cs typeface="Calibri" pitchFamily="34" charset="-120"/>
               </a:rPr>
-              <a:t>Hands off shared branches</a:t>
+              <a:t>"Pull the remote updates first, then push"</a:t>
             </a:r>
             <a:endParaRPr lang="en-US" sz="1000" dirty="0"/>
           </a:p>
@@ -16727,14 +16271,14 @@
       </p:sp>
       <p:sp>
         <p:nvSpPr>
-          <p:cNvPr id="24" name="Shape 22"/>
-          <p:cNvSpPr/>
-          <p:nvPr/>
-        </p:nvSpPr>
-        <p:spPr>
-          <a:xfrm>
-            <a:off x="1097280" y="4709160"/>
-            <a:ext cx="7680960" cy="365760"/>
+          <p:cNvPr id="16" name="Shape 14"/>
+          <p:cNvSpPr/>
+          <p:nvPr/>
+        </p:nvSpPr>
+        <p:spPr>
+          <a:xfrm>
+            <a:off x="548640" y="3337560"/>
+            <a:ext cx="8229600" cy="548640"/>
           </a:xfrm>
           <a:prstGeom prst="roundRect">
             <a:avLst>
@@ -16742,11 +16286,11 @@
             </a:avLst>
           </a:prstGeom>
           <a:solidFill>
-            <a:srgbClr val="1F2937"/>
+            <a:srgbClr val="ECFDF5"/>
           </a:solidFill>
           <a:ln w="12700">
             <a:solidFill>
-              <a:srgbClr val="1F2937"/>
+              <a:srgbClr val="6EE7B7"/>
             </a:solidFill>
             <a:prstDash val="solid"/>
           </a:ln>
@@ -16754,40 +16298,366 @@
       </p:sp>
       <p:sp>
         <p:nvSpPr>
+          <p:cNvPr id="17" name="Shape 15"/>
+          <p:cNvSpPr/>
+          <p:nvPr/>
+        </p:nvSpPr>
+        <p:spPr>
+          <a:xfrm>
+            <a:off x="548640" y="3337560"/>
+            <a:ext cx="73152" cy="548640"/>
+          </a:xfrm>
+          <a:prstGeom prst="rect">
+            <a:avLst/>
+          </a:prstGeom>
+          <a:solidFill>
+            <a:srgbClr val="059669"/>
+          </a:solidFill>
+          <a:ln w="12700">
+            <a:solidFill>
+              <a:srgbClr val="059669"/>
+            </a:solidFill>
+            <a:prstDash val="solid"/>
+          </a:ln>
+        </p:spPr>
+      </p:sp>
+      <p:sp>
+        <p:nvSpPr>
+          <p:cNvPr id="18" name="Text 16"/>
+          <p:cNvSpPr/>
+          <p:nvPr/>
+        </p:nvSpPr>
+        <p:spPr>
+          <a:xfrm>
+            <a:off x="731520" y="3337560"/>
+            <a:ext cx="274320" cy="548640"/>
+          </a:xfrm>
+          <a:prstGeom prst="rect">
+            <a:avLst/>
+          </a:prstGeom>
+          <a:noFill/>
+          <a:ln/>
+        </p:spPr>
+        <p:txBody>
+          <a:bodyPr wrap="square" lIns="0" tIns="0" rIns="0" bIns="0" rtlCol="0" anchor="ctr"/>
+          <a:lstStyle/>
+          <a:p>
+            <a:pPr algn="ctr" indent="0" marL="0">
+              <a:buNone/>
+            </a:pPr>
+            <a:r>
+              <a:rPr lang="en-US" sz="1800" b="1" dirty="0">
+                <a:solidFill>
+                  <a:srgbClr val="059669"/>
+                </a:solidFill>
+                <a:latin typeface="Calibri" pitchFamily="34" charset="0"/>
+                <a:ea typeface="Calibri" pitchFamily="34" charset="-122"/>
+                <a:cs typeface="Calibri" pitchFamily="34" charset="-120"/>
+              </a:rPr>
+              <a:t>✓</a:t>
+            </a:r>
+            <a:endParaRPr lang="en-US" sz="1800" dirty="0"/>
+          </a:p>
+        </p:txBody>
+      </p:sp>
+      <p:sp>
+        <p:nvSpPr>
+          <p:cNvPr id="19" name="Text 17"/>
+          <p:cNvSpPr/>
+          <p:nvPr/>
+        </p:nvSpPr>
+        <p:spPr>
+          <a:xfrm>
+            <a:off x="1097280" y="3383280"/>
+            <a:ext cx="7589520" cy="292608"/>
+          </a:xfrm>
+          <a:prstGeom prst="rect">
+            <a:avLst/>
+          </a:prstGeom>
+          <a:noFill/>
+          <a:ln/>
+        </p:spPr>
+        <p:txBody>
+          <a:bodyPr wrap="square" lIns="0" tIns="0" rIns="0" bIns="0" rtlCol="0" anchor="ctr"/>
+          <a:lstStyle/>
+          <a:p>
+            <a:pPr algn="l" indent="0" marL="0">
+              <a:buNone/>
+            </a:pPr>
+            <a:r>
+              <a:rPr lang="en-US" sz="1400" b="1" dirty="0">
+                <a:solidFill>
+                  <a:srgbClr val="111827"/>
+                </a:solidFill>
+                <a:latin typeface="Calibri" pitchFamily="34" charset="0"/>
+                <a:ea typeface="Calibri" pitchFamily="34" charset="-122"/>
+                <a:cs typeface="Calibri" pitchFamily="34" charset="-120"/>
+              </a:rPr>
+              <a:t>「告訴我為什麼被擋」</a:t>
+            </a:r>
+            <a:endParaRPr lang="en-US" sz="1400" dirty="0"/>
+          </a:p>
+        </p:txBody>
+      </p:sp>
+      <p:sp>
+        <p:nvSpPr>
+          <p:cNvPr id="20" name="Text 18"/>
+          <p:cNvSpPr/>
+          <p:nvPr/>
+        </p:nvSpPr>
+        <p:spPr>
+          <a:xfrm>
+            <a:off x="1097280" y="3648456"/>
+            <a:ext cx="7589520" cy="219456"/>
+          </a:xfrm>
+          <a:prstGeom prst="rect">
+            <a:avLst/>
+          </a:prstGeom>
+          <a:noFill/>
+          <a:ln/>
+        </p:spPr>
+        <p:txBody>
+          <a:bodyPr wrap="square" lIns="0" tIns="0" rIns="0" bIns="0" rtlCol="0" anchor="ctr"/>
+          <a:lstStyle/>
+          <a:p>
+            <a:pPr algn="l" indent="0" marL="0">
+              <a:buNone/>
+            </a:pPr>
+            <a:r>
+              <a:rPr lang="en-US" sz="1000" i="1" dirty="0">
+                <a:solidFill>
+                  <a:srgbClr val="6B7280"/>
+                </a:solidFill>
+                <a:latin typeface="Calibri" pitchFamily="34" charset="0"/>
+                <a:ea typeface="Calibri" pitchFamily="34" charset="-122"/>
+                <a:cs typeface="Calibri" pitchFamily="34" charset="-120"/>
+              </a:rPr>
+              <a:t>"Tell me why it was rejected"</a:t>
+            </a:r>
+            <a:endParaRPr lang="en-US" sz="1000" dirty="0"/>
+          </a:p>
+        </p:txBody>
+      </p:sp>
+      <p:sp>
+        <p:nvSpPr>
+          <p:cNvPr id="21" name="Text 19"/>
+          <p:cNvSpPr/>
+          <p:nvPr/>
+        </p:nvSpPr>
+        <p:spPr>
+          <a:xfrm>
+            <a:off x="548640" y="4160520"/>
+            <a:ext cx="8229600" cy="256032"/>
+          </a:xfrm>
+          <a:prstGeom prst="rect">
+            <a:avLst/>
+          </a:prstGeom>
+          <a:noFill/>
+          <a:ln/>
+        </p:spPr>
+        <p:txBody>
+          <a:bodyPr wrap="square" lIns="0" tIns="0" rIns="0" bIns="0" rtlCol="0" anchor="ctr"/>
+          <a:lstStyle/>
+          <a:p>
+            <a:pPr algn="l" indent="0" marL="0">
+              <a:buNone/>
+            </a:pPr>
+            <a:r>
+              <a:rPr lang="en-US" sz="1200" b="1" dirty="0">
+                <a:solidFill>
+                  <a:srgbClr val="374151"/>
+                </a:solidFill>
+                <a:latin typeface="Calibri" pitchFamily="34" charset="0"/>
+                <a:ea typeface="Calibri" pitchFamily="34" charset="-122"/>
+                <a:cs typeface="Calibri" pitchFamily="34" charset="-120"/>
+              </a:rPr>
+              <a:t>AI 接著會做的事  ·  What AI will do</a:t>
+            </a:r>
+            <a:endParaRPr lang="en-US" sz="1200" dirty="0"/>
+          </a:p>
+        </p:txBody>
+      </p:sp>
+      <p:sp>
+        <p:nvSpPr>
+          <p:cNvPr id="22" name="Text 20"/>
+          <p:cNvSpPr/>
+          <p:nvPr/>
+        </p:nvSpPr>
+        <p:spPr>
+          <a:xfrm>
+            <a:off x="777240" y="4526280"/>
+            <a:ext cx="274320" cy="219456"/>
+          </a:xfrm>
+          <a:prstGeom prst="rect">
+            <a:avLst/>
+          </a:prstGeom>
+          <a:noFill/>
+          <a:ln/>
+        </p:spPr>
+        <p:txBody>
+          <a:bodyPr wrap="square" lIns="0" tIns="0" rIns="0" bIns="0" rtlCol="0" anchor="ctr"/>
+          <a:lstStyle/>
+          <a:p>
+            <a:pPr algn="l" indent="0" marL="0">
+              <a:buNone/>
+            </a:pPr>
+            <a:r>
+              <a:rPr lang="en-US" sz="1200" b="1" dirty="0">
+                <a:solidFill>
+                  <a:srgbClr val="1A66FF"/>
+                </a:solidFill>
+                <a:latin typeface="Calibri" pitchFamily="34" charset="0"/>
+                <a:ea typeface="Calibri" pitchFamily="34" charset="-122"/>
+                <a:cs typeface="Calibri" pitchFamily="34" charset="-120"/>
+              </a:rPr>
+              <a:t>→</a:t>
+            </a:r>
+            <a:endParaRPr lang="en-US" sz="1200" dirty="0"/>
+          </a:p>
+        </p:txBody>
+      </p:sp>
+      <p:sp>
+        <p:nvSpPr>
+          <p:cNvPr id="23" name="Text 21"/>
+          <p:cNvSpPr/>
+          <p:nvPr/>
+        </p:nvSpPr>
+        <p:spPr>
+          <a:xfrm>
+            <a:off x="1051560" y="4526280"/>
+            <a:ext cx="7772400" cy="219456"/>
+          </a:xfrm>
+          <a:prstGeom prst="rect">
+            <a:avLst/>
+          </a:prstGeom>
+          <a:noFill/>
+          <a:ln/>
+        </p:spPr>
+        <p:txBody>
+          <a:bodyPr wrap="square" lIns="0" tIns="0" rIns="0" bIns="0" rtlCol="0" anchor="ctr"/>
+          <a:lstStyle/>
+          <a:p>
+            <a:pPr algn="l" indent="0" marL="0">
+              <a:buNone/>
+            </a:pPr>
+            <a:r>
+              <a:rPr lang="en-US" sz="1100" dirty="0">
+                <a:solidFill>
+                  <a:srgbClr val="374151"/>
+                </a:solidFill>
+                <a:latin typeface="Calibri" pitchFamily="34" charset="0"/>
+                <a:ea typeface="Calibri" pitchFamily="34" charset="-122"/>
+                <a:cs typeface="Calibri" pitchFamily="34" charset="-120"/>
+              </a:rPr>
+              <a:t>看一下 remote 上是什麼狀態</a:t>
+            </a:r>
+            <a:pPr algn="l" indent="0" marL="0">
+              <a:buNone/>
+            </a:pPr>
+            <a:r>
+              <a:rPr lang="en-US" sz="900" i="1" dirty="0">
+                <a:solidFill>
+                  <a:srgbClr val="6B7280"/>
+                </a:solidFill>
+                <a:latin typeface="Calibri" pitchFamily="34" charset="0"/>
+                <a:ea typeface="Calibri" pitchFamily="34" charset="-122"/>
+                <a:cs typeface="Calibri" pitchFamily="34" charset="-120"/>
+              </a:rPr>
+              <a:t>    Check remote state</a:t>
+            </a:r>
+            <a:endParaRPr lang="en-US" sz="1100" dirty="0"/>
+          </a:p>
+        </p:txBody>
+      </p:sp>
+      <p:sp>
+        <p:nvSpPr>
+          <p:cNvPr id="24" name="Text 22"/>
+          <p:cNvSpPr/>
+          <p:nvPr/>
+        </p:nvSpPr>
+        <p:spPr>
+          <a:xfrm>
+            <a:off x="777240" y="4800600"/>
+            <a:ext cx="274320" cy="219456"/>
+          </a:xfrm>
+          <a:prstGeom prst="rect">
+            <a:avLst/>
+          </a:prstGeom>
+          <a:noFill/>
+          <a:ln/>
+        </p:spPr>
+        <p:txBody>
+          <a:bodyPr wrap="square" lIns="0" tIns="0" rIns="0" bIns="0" rtlCol="0" anchor="ctr"/>
+          <a:lstStyle/>
+          <a:p>
+            <a:pPr algn="l" indent="0" marL="0">
+              <a:buNone/>
+            </a:pPr>
+            <a:r>
+              <a:rPr lang="en-US" sz="1200" b="1" dirty="0">
+                <a:solidFill>
+                  <a:srgbClr val="1A66FF"/>
+                </a:solidFill>
+                <a:latin typeface="Calibri" pitchFamily="34" charset="0"/>
+                <a:ea typeface="Calibri" pitchFamily="34" charset="-122"/>
+                <a:cs typeface="Calibri" pitchFamily="34" charset="-120"/>
+              </a:rPr>
+              <a:t>→</a:t>
+            </a:r>
+            <a:endParaRPr lang="en-US" sz="1200" dirty="0"/>
+          </a:p>
+        </p:txBody>
+      </p:sp>
+      <p:sp>
+        <p:nvSpPr>
           <p:cNvPr id="25" name="Text 23"/>
           <p:cNvSpPr/>
           <p:nvPr/>
         </p:nvSpPr>
         <p:spPr>
           <a:xfrm>
-            <a:off x="1234440" y="4736592"/>
-            <a:ext cx="7406640" cy="310896"/>
-          </a:xfrm>
-          <a:prstGeom prst="rect">
-            <a:avLst/>
-          </a:prstGeom>
-          <a:noFill/>
-          <a:ln/>
-        </p:spPr>
-        <p:txBody>
-          <a:bodyPr wrap="square" lIns="0" tIns="0" rIns="0" bIns="0" rtlCol="0" anchor="ctr"/>
-          <a:lstStyle/>
-          <a:p>
-            <a:pPr algn="l" indent="0" marL="0">
-              <a:buNone/>
-            </a:pPr>
-            <a:r>
-              <a:rPr lang="en-US" sz="1150" dirty="0">
-                <a:solidFill>
-                  <a:srgbClr val="5EEAD4"/>
-                </a:solidFill>
-                <a:latin typeface="Calibri" pitchFamily="34" charset="0"/>
-                <a:ea typeface="Calibri" pitchFamily="34" charset="-122"/>
-                <a:cs typeface="Calibri" pitchFamily="34" charset="-120"/>
-              </a:rPr>
-              <a:t>「不要在 main 或別人也在用的 branch 上 rebase。」</a:t>
-            </a:r>
-            <a:endParaRPr lang="en-US" sz="1150" dirty="0"/>
+            <a:off x="1051560" y="4800600"/>
+            <a:ext cx="7772400" cy="219456"/>
+          </a:xfrm>
+          <a:prstGeom prst="rect">
+            <a:avLst/>
+          </a:prstGeom>
+          <a:noFill/>
+          <a:ln/>
+        </p:spPr>
+        <p:txBody>
+          <a:bodyPr wrap="square" lIns="0" tIns="0" rIns="0" bIns="0" rtlCol="0" anchor="ctr"/>
+          <a:lstStyle/>
+          <a:p>
+            <a:pPr algn="l" indent="0" marL="0">
+              <a:buNone/>
+            </a:pPr>
+            <a:r>
+              <a:rPr lang="en-US" sz="1100" dirty="0">
+                <a:solidFill>
+                  <a:srgbClr val="374151"/>
+                </a:solidFill>
+                <a:latin typeface="Calibri" pitchFamily="34" charset="0"/>
+                <a:ea typeface="Calibri" pitchFamily="34" charset="-122"/>
+                <a:cs typeface="Calibri" pitchFamily="34" charset="-120"/>
+              </a:rPr>
+              <a:t>把別人的更新整合進你的 local</a:t>
+            </a:r>
+            <a:pPr algn="l" indent="0" marL="0">
+              <a:buNone/>
+            </a:pPr>
+            <a:r>
+              <a:rPr lang="en-US" sz="900" i="1" dirty="0">
+                <a:solidFill>
+                  <a:srgbClr val="6B7280"/>
+                </a:solidFill>
+                <a:latin typeface="Calibri" pitchFamily="34" charset="0"/>
+                <a:ea typeface="Calibri" pitchFamily="34" charset="-122"/>
+                <a:cs typeface="Calibri" pitchFamily="34" charset="-120"/>
+              </a:rPr>
+              <a:t>    Integrate teammate's updates into your local</a:t>
+            </a:r>
+            <a:endParaRPr lang="en-US" sz="1100" dirty="0"/>
           </a:p>
         </p:txBody>
       </p:sp>
@@ -16799,24 +16669,77 @@
         </p:nvSpPr>
         <p:spPr>
           <a:xfrm>
-            <a:off x="1097280" y="5120640"/>
-            <a:ext cx="7680960" cy="164592"/>
-          </a:xfrm>
-          <a:prstGeom prst="rect">
-            <a:avLst/>
-          </a:prstGeom>
-          <a:noFill/>
-          <a:ln/>
-        </p:spPr>
-        <p:txBody>
-          <a:bodyPr wrap="square" lIns="0" tIns="0" rIns="0" bIns="0" rtlCol="0" anchor="ctr"/>
-          <a:lstStyle/>
-          <a:p>
-            <a:pPr algn="l" indent="0" marL="0">
-              <a:buNone/>
-            </a:pPr>
-            <a:r>
-              <a:rPr lang="en-US" sz="950" i="1" dirty="0">
+            <a:off x="777240" y="5074920"/>
+            <a:ext cx="274320" cy="219456"/>
+          </a:xfrm>
+          <a:prstGeom prst="rect">
+            <a:avLst/>
+          </a:prstGeom>
+          <a:noFill/>
+          <a:ln/>
+        </p:spPr>
+        <p:txBody>
+          <a:bodyPr wrap="square" lIns="0" tIns="0" rIns="0" bIns="0" rtlCol="0" anchor="ctr"/>
+          <a:lstStyle/>
+          <a:p>
+            <a:pPr algn="l" indent="0" marL="0">
+              <a:buNone/>
+            </a:pPr>
+            <a:r>
+              <a:rPr lang="en-US" sz="1200" b="1" dirty="0">
+                <a:solidFill>
+                  <a:srgbClr val="1A66FF"/>
+                </a:solidFill>
+                <a:latin typeface="Calibri" pitchFamily="34" charset="0"/>
+                <a:ea typeface="Calibri" pitchFamily="34" charset="-122"/>
+                <a:cs typeface="Calibri" pitchFamily="34" charset="-120"/>
+              </a:rPr>
+              <a:t>→</a:t>
+            </a:r>
+            <a:endParaRPr lang="en-US" sz="1200" dirty="0"/>
+          </a:p>
+        </p:txBody>
+      </p:sp>
+      <p:sp>
+        <p:nvSpPr>
+          <p:cNvPr id="27" name="Text 25"/>
+          <p:cNvSpPr/>
+          <p:nvPr/>
+        </p:nvSpPr>
+        <p:spPr>
+          <a:xfrm>
+            <a:off x="1051560" y="5074920"/>
+            <a:ext cx="7772400" cy="219456"/>
+          </a:xfrm>
+          <a:prstGeom prst="rect">
+            <a:avLst/>
+          </a:prstGeom>
+          <a:noFill/>
+          <a:ln/>
+        </p:spPr>
+        <p:txBody>
+          <a:bodyPr wrap="square" lIns="0" tIns="0" rIns="0" bIns="0" rtlCol="0" anchor="ctr"/>
+          <a:lstStyle/>
+          <a:p>
+            <a:pPr algn="l" indent="0" marL="0">
+              <a:buNone/>
+            </a:pPr>
+            <a:r>
+              <a:rPr lang="en-US" sz="1100" dirty="0">
+                <a:solidFill>
+                  <a:srgbClr val="374151"/>
+                </a:solidFill>
+                <a:latin typeface="Calibri" pitchFamily="34" charset="0"/>
+                <a:ea typeface="Calibri" pitchFamily="34" charset="-122"/>
+                <a:cs typeface="Calibri" pitchFamily="34" charset="-120"/>
+              </a:rPr>
+              <a:t>再 push 一次</a:t>
+            </a:r>
+            <a:pPr algn="l" indent="0" marL="0">
+              <a:buNone/>
+            </a:pPr>
+            <a:r>
+              <a:rPr lang="en-US" sz="900" i="1" dirty="0">
                 <a:solidFill>
                   <a:srgbClr val="6B7280"/>
                 </a:solidFill>
@@ -16824,38 +16747,77 @@
                 <a:ea typeface="Calibri" pitchFamily="34" charset="-122"/>
                 <a:cs typeface="Calibri" pitchFamily="34" charset="-120"/>
               </a:rPr>
-              <a:t>防的是：對共用 branch rebase，整團隊歷史錯亂。</a:t>
-            </a:r>
-            <a:endParaRPr lang="en-US" sz="950" dirty="0"/>
-          </a:p>
-        </p:txBody>
-      </p:sp>
-      <p:sp>
-        <p:nvSpPr>
-          <p:cNvPr id="27" name="Text 25"/>
-          <p:cNvSpPr/>
-          <p:nvPr/>
-        </p:nvSpPr>
-        <p:spPr>
-          <a:xfrm>
-            <a:off x="548640" y="5440680"/>
-            <a:ext cx="8229600" cy="201168"/>
-          </a:xfrm>
-          <a:prstGeom prst="rect">
-            <a:avLst/>
-          </a:prstGeom>
-          <a:noFill/>
-          <a:ln/>
-        </p:spPr>
-        <p:txBody>
-          <a:bodyPr wrap="square" lIns="0" tIns="0" rIns="0" bIns="0" rtlCol="0" anchor="ctr"/>
-          <a:lstStyle/>
-          <a:p>
-            <a:pPr algn="l" indent="0" marL="0">
-              <a:buNone/>
-            </a:pPr>
-            <a:r>
-              <a:rPr lang="en-US" sz="1100" b="1" dirty="0">
+              <a:t>    Push again</a:t>
+            </a:r>
+            <a:endParaRPr lang="en-US" sz="1100" dirty="0"/>
+          </a:p>
+        </p:txBody>
+      </p:sp>
+      <p:sp>
+        <p:nvSpPr>
+          <p:cNvPr id="28" name="Text 26"/>
+          <p:cNvSpPr/>
+          <p:nvPr/>
+        </p:nvSpPr>
+        <p:spPr>
+          <a:xfrm>
+            <a:off x="777240" y="5349240"/>
+            <a:ext cx="274320" cy="219456"/>
+          </a:xfrm>
+          <a:prstGeom prst="rect">
+            <a:avLst/>
+          </a:prstGeom>
+          <a:noFill/>
+          <a:ln/>
+        </p:spPr>
+        <p:txBody>
+          <a:bodyPr wrap="square" lIns="0" tIns="0" rIns="0" bIns="0" rtlCol="0" anchor="ctr"/>
+          <a:lstStyle/>
+          <a:p>
+            <a:pPr algn="l" indent="0" marL="0">
+              <a:buNone/>
+            </a:pPr>
+            <a:r>
+              <a:rPr lang="en-US" sz="1200" b="1" dirty="0">
+                <a:solidFill>
+                  <a:srgbClr val="1A66FF"/>
+                </a:solidFill>
+                <a:latin typeface="Calibri" pitchFamily="34" charset="0"/>
+                <a:ea typeface="Calibri" pitchFamily="34" charset="-122"/>
+                <a:cs typeface="Calibri" pitchFamily="34" charset="-120"/>
+              </a:rPr>
+              <a:t>→</a:t>
+            </a:r>
+            <a:endParaRPr lang="en-US" sz="1200" dirty="0"/>
+          </a:p>
+        </p:txBody>
+      </p:sp>
+      <p:sp>
+        <p:nvSpPr>
+          <p:cNvPr id="29" name="Text 27"/>
+          <p:cNvSpPr/>
+          <p:nvPr/>
+        </p:nvSpPr>
+        <p:spPr>
+          <a:xfrm>
+            <a:off x="1051560" y="5349240"/>
+            <a:ext cx="7772400" cy="219456"/>
+          </a:xfrm>
+          <a:prstGeom prst="rect">
+            <a:avLst/>
+          </a:prstGeom>
+          <a:noFill/>
+          <a:ln/>
+        </p:spPr>
+        <p:txBody>
+          <a:bodyPr wrap="square" lIns="0" tIns="0" rIns="0" bIns="0" rtlCol="0" anchor="ctr"/>
+          <a:lstStyle/>
+          <a:p>
+            <a:pPr algn="l" indent="0" marL="0">
+              <a:buNone/>
+            </a:pPr>
+            <a:r>
+              <a:rPr lang="en-US" sz="1100" dirty="0">
                 <a:solidFill>
                   <a:srgbClr val="374151"/>
                 </a:solidFill>
@@ -16863,48 +16825,23 @@
                 <a:ea typeface="Calibri" pitchFamily="34" charset="-122"/>
                 <a:cs typeface="Calibri" pitchFamily="34" charset="-120"/>
               </a:rPr>
-              <a:t>把這三句話寫進 CLAUDE.md，AI 每次都會遵守 — 比每次手動提醒可靠。</a:t>
+              <a:t>有衝突就問你——不會 silent overwrite</a:t>
+            </a:r>
+            <a:pPr algn="l" indent="0" marL="0">
+              <a:buNone/>
+            </a:pPr>
+            <a:r>
+              <a:rPr lang="en-US" sz="900" i="1" dirty="0">
+                <a:solidFill>
+                  <a:srgbClr val="6B7280"/>
+                </a:solidFill>
+                <a:latin typeface="Calibri" pitchFamily="34" charset="0"/>
+                <a:ea typeface="Calibri" pitchFamily="34" charset="-122"/>
+                <a:cs typeface="Calibri" pitchFamily="34" charset="-120"/>
+              </a:rPr>
+              <a:t>    Show conflicts to you, never overwrite silently</a:t>
             </a:r>
             <a:endParaRPr lang="en-US" sz="1100" dirty="0"/>
-          </a:p>
-        </p:txBody>
-      </p:sp>
-      <p:sp>
-        <p:nvSpPr>
-          <p:cNvPr id="28" name="Text 26"/>
-          <p:cNvSpPr/>
-          <p:nvPr/>
-        </p:nvSpPr>
-        <p:spPr>
-          <a:xfrm>
-            <a:off x="548640" y="5623560"/>
-            <a:ext cx="8229600" cy="164592"/>
-          </a:xfrm>
-          <a:prstGeom prst="rect">
-            <a:avLst/>
-          </a:prstGeom>
-          <a:noFill/>
-          <a:ln/>
-        </p:spPr>
-        <p:txBody>
-          <a:bodyPr wrap="square" lIns="0" tIns="0" rIns="0" bIns="0" rtlCol="0" anchor="ctr"/>
-          <a:lstStyle/>
-          <a:p>
-            <a:pPr algn="l" indent="0" marL="0">
-              <a:buNone/>
-            </a:pPr>
-            <a:r>
-              <a:rPr lang="en-US" sz="1000" i="1" dirty="0">
-                <a:solidFill>
-                  <a:srgbClr val="9CA3AF"/>
-                </a:solidFill>
-                <a:latin typeface="Calibri" pitchFamily="34" charset="0"/>
-                <a:ea typeface="Calibri" pitchFamily="34" charset="-122"/>
-                <a:cs typeface="Calibri" pitchFamily="34" charset="-120"/>
-              </a:rPr>
-              <a:t>Add these to CLAUDE.md once — more reliable than reminding AI every session.</a:t>
-            </a:r>
-            <a:endParaRPr lang="en-US" sz="1000" dirty="0"/>
           </a:p>
         </p:txBody>
       </p:sp>
@@ -16973,7 +16910,7 @@
                 <a:ea typeface="Calibri" pitchFamily="34" charset="-122"/>
                 <a:cs typeface="Calibri" pitchFamily="34" charset="-120"/>
               </a:rPr>
-              <a:t>SAFETY NET</a:t>
+              <a:t>DESIGNER ACTIONS (CONTINUED)</a:t>
             </a:r>
             <a:endParaRPr lang="en-US" sz="1000" dirty="0"/>
           </a:p>
@@ -17012,7 +16949,7 @@
                 <a:ea typeface="Calibri" pitchFamily="34" charset="-122"/>
                 <a:cs typeface="Calibri" pitchFamily="34" charset="-120"/>
               </a:rPr>
-              <a:t>你不是一個人在防範這些</a:t>
+              <a:t>不要說：「強推」、「force」、「蓋過去」</a:t>
             </a:r>
             <a:endParaRPr lang="en-US" sz="3000" dirty="0"/>
           </a:p>
@@ -17051,7 +16988,7 @@
                 <a:ea typeface="Calibri" pitchFamily="34" charset="-122"/>
                 <a:cs typeface="Calibri" pitchFamily="34" charset="-120"/>
               </a:rPr>
-              <a:t>You're not defending alone</a:t>
+              <a:t>Phrases that trigger force push</a:t>
             </a:r>
             <a:endParaRPr lang="en-US" sz="1400" dirty="0"/>
           </a:p>
@@ -17059,26 +16996,983 @@
       </p:sp>
       <p:sp>
         <p:nvSpPr>
-          <p:cNvPr id="5" name="Shape 3"/>
-          <p:cNvSpPr/>
-          <p:nvPr/>
-        </p:nvSpPr>
-        <p:spPr>
-          <a:xfrm>
-            <a:off x="548640" y="1783080"/>
-            <a:ext cx="8229600" cy="1554480"/>
+          <p:cNvPr id="5" name="Text 3"/>
+          <p:cNvSpPr/>
+          <p:nvPr/>
+        </p:nvSpPr>
+        <p:spPr>
+          <a:xfrm>
+            <a:off x="548640" y="1691640"/>
+            <a:ext cx="4023360" cy="274320"/>
+          </a:xfrm>
+          <a:prstGeom prst="rect">
+            <a:avLst/>
+          </a:prstGeom>
+          <a:noFill/>
+          <a:ln/>
+        </p:spPr>
+        <p:txBody>
+          <a:bodyPr wrap="square" lIns="0" tIns="0" rIns="0" bIns="0" rtlCol="0" anchor="ctr"/>
+          <a:lstStyle/>
+          <a:p>
+            <a:pPr algn="l" indent="0" marL="0">
+              <a:buNone/>
+            </a:pPr>
+            <a:r>
+              <a:rPr lang="en-US" sz="1400" b="1" dirty="0">
+                <a:solidFill>
+                  <a:srgbClr val="DC2626"/>
+                </a:solidFill>
+                <a:latin typeface="Calibri" pitchFamily="34" charset="0"/>
+                <a:ea typeface="Calibri" pitchFamily="34" charset="-122"/>
+                <a:cs typeface="Calibri" pitchFamily="34" charset="-120"/>
+              </a:rPr>
+              <a:t>避開這些字眼</a:t>
+            </a:r>
+            <a:endParaRPr lang="en-US" sz="1400" dirty="0"/>
+          </a:p>
+        </p:txBody>
+      </p:sp>
+      <p:sp>
+        <p:nvSpPr>
+          <p:cNvPr id="6" name="Shape 4"/>
+          <p:cNvSpPr/>
+          <p:nvPr/>
+        </p:nvSpPr>
+        <p:spPr>
+          <a:xfrm>
+            <a:off x="548640" y="2103120"/>
+            <a:ext cx="4023360" cy="384048"/>
           </a:xfrm>
           <a:prstGeom prst="roundRect">
             <a:avLst>
-              <a:gd name="adj" fmla="val 4706"/>
+              <a:gd name="adj" fmla="val 11905"/>
             </a:avLst>
           </a:prstGeom>
           <a:solidFill>
-            <a:srgbClr val="ECFDF5"/>
+            <a:srgbClr val="FEF2F2"/>
+          </a:solidFill>
+          <a:ln w="9525">
+            <a:solidFill>
+              <a:srgbClr val="FCA5A5"/>
+            </a:solidFill>
+            <a:prstDash val="solid"/>
+          </a:ln>
+        </p:spPr>
+      </p:sp>
+      <p:sp>
+        <p:nvSpPr>
+          <p:cNvPr id="7" name="Text 5"/>
+          <p:cNvSpPr/>
+          <p:nvPr/>
+        </p:nvSpPr>
+        <p:spPr>
+          <a:xfrm>
+            <a:off x="640080" y="2103120"/>
+            <a:ext cx="274320" cy="384048"/>
+          </a:xfrm>
+          <a:prstGeom prst="rect">
+            <a:avLst/>
+          </a:prstGeom>
+          <a:noFill/>
+          <a:ln/>
+        </p:spPr>
+        <p:txBody>
+          <a:bodyPr wrap="square" lIns="0" tIns="0" rIns="0" bIns="0" rtlCol="0" anchor="ctr"/>
+          <a:lstStyle/>
+          <a:p>
+            <a:pPr algn="ctr" indent="0" marL="0">
+              <a:buNone/>
+            </a:pPr>
+            <a:r>
+              <a:rPr lang="en-US" sz="1400" b="1" dirty="0">
+                <a:solidFill>
+                  <a:srgbClr val="DC2626"/>
+                </a:solidFill>
+                <a:latin typeface="Calibri" pitchFamily="34" charset="0"/>
+                <a:ea typeface="Calibri" pitchFamily="34" charset="-122"/>
+                <a:cs typeface="Calibri" pitchFamily="34" charset="-120"/>
+              </a:rPr>
+              <a:t>✗</a:t>
+            </a:r>
+            <a:endParaRPr lang="en-US" sz="1400" dirty="0"/>
+          </a:p>
+        </p:txBody>
+      </p:sp>
+      <p:sp>
+        <p:nvSpPr>
+          <p:cNvPr id="8" name="Text 6"/>
+          <p:cNvSpPr/>
+          <p:nvPr/>
+        </p:nvSpPr>
+        <p:spPr>
+          <a:xfrm>
+            <a:off x="960120" y="2103120"/>
+            <a:ext cx="3017520" cy="384048"/>
+          </a:xfrm>
+          <a:prstGeom prst="rect">
+            <a:avLst/>
+          </a:prstGeom>
+          <a:noFill/>
+          <a:ln/>
+        </p:spPr>
+        <p:txBody>
+          <a:bodyPr wrap="square" lIns="0" tIns="0" rIns="0" bIns="0" rtlCol="0" anchor="ctr"/>
+          <a:lstStyle/>
+          <a:p>
+            <a:pPr algn="l" indent="0" marL="0">
+              <a:buNone/>
+            </a:pPr>
+            <a:r>
+              <a:rPr lang="en-US" sz="1100" dirty="0">
+                <a:solidFill>
+                  <a:srgbClr val="374151"/>
+                </a:solidFill>
+                <a:latin typeface="Calibri" pitchFamily="34" charset="0"/>
+                <a:ea typeface="Calibri" pitchFamily="34" charset="-122"/>
+                <a:cs typeface="Calibri" pitchFamily="34" charset="-120"/>
+              </a:rPr>
+              <a:t>強推上去 / force push it</a:t>
+            </a:r>
+            <a:endParaRPr lang="en-US" sz="1100" dirty="0"/>
+          </a:p>
+        </p:txBody>
+      </p:sp>
+      <p:sp>
+        <p:nvSpPr>
+          <p:cNvPr id="9" name="Shape 7"/>
+          <p:cNvSpPr/>
+          <p:nvPr/>
+        </p:nvSpPr>
+        <p:spPr>
+          <a:xfrm>
+            <a:off x="548640" y="2560320"/>
+            <a:ext cx="4023360" cy="384048"/>
+          </a:xfrm>
+          <a:prstGeom prst="roundRect">
+            <a:avLst>
+              <a:gd name="adj" fmla="val 11905"/>
+            </a:avLst>
+          </a:prstGeom>
+          <a:solidFill>
+            <a:srgbClr val="FEF2F2"/>
+          </a:solidFill>
+          <a:ln w="9525">
+            <a:solidFill>
+              <a:srgbClr val="FCA5A5"/>
+            </a:solidFill>
+            <a:prstDash val="solid"/>
+          </a:ln>
+        </p:spPr>
+      </p:sp>
+      <p:sp>
+        <p:nvSpPr>
+          <p:cNvPr id="10" name="Text 8"/>
+          <p:cNvSpPr/>
+          <p:nvPr/>
+        </p:nvSpPr>
+        <p:spPr>
+          <a:xfrm>
+            <a:off x="640080" y="2560320"/>
+            <a:ext cx="274320" cy="384048"/>
+          </a:xfrm>
+          <a:prstGeom prst="rect">
+            <a:avLst/>
+          </a:prstGeom>
+          <a:noFill/>
+          <a:ln/>
+        </p:spPr>
+        <p:txBody>
+          <a:bodyPr wrap="square" lIns="0" tIns="0" rIns="0" bIns="0" rtlCol="0" anchor="ctr"/>
+          <a:lstStyle/>
+          <a:p>
+            <a:pPr algn="ctr" indent="0" marL="0">
+              <a:buNone/>
+            </a:pPr>
+            <a:r>
+              <a:rPr lang="en-US" sz="1400" b="1" dirty="0">
+                <a:solidFill>
+                  <a:srgbClr val="DC2626"/>
+                </a:solidFill>
+                <a:latin typeface="Calibri" pitchFamily="34" charset="0"/>
+                <a:ea typeface="Calibri" pitchFamily="34" charset="-122"/>
+                <a:cs typeface="Calibri" pitchFamily="34" charset="-120"/>
+              </a:rPr>
+              <a:t>✗</a:t>
+            </a:r>
+            <a:endParaRPr lang="en-US" sz="1400" dirty="0"/>
+          </a:p>
+        </p:txBody>
+      </p:sp>
+      <p:sp>
+        <p:nvSpPr>
+          <p:cNvPr id="11" name="Text 9"/>
+          <p:cNvSpPr/>
+          <p:nvPr/>
+        </p:nvSpPr>
+        <p:spPr>
+          <a:xfrm>
+            <a:off x="960120" y="2560320"/>
+            <a:ext cx="3017520" cy="384048"/>
+          </a:xfrm>
+          <a:prstGeom prst="rect">
+            <a:avLst/>
+          </a:prstGeom>
+          <a:noFill/>
+          <a:ln/>
+        </p:spPr>
+        <p:txBody>
+          <a:bodyPr wrap="square" lIns="0" tIns="0" rIns="0" bIns="0" rtlCol="0" anchor="ctr"/>
+          <a:lstStyle/>
+          <a:p>
+            <a:pPr algn="l" indent="0" marL="0">
+              <a:buNone/>
+            </a:pPr>
+            <a:r>
+              <a:rPr lang="en-US" sz="1100" dirty="0">
+                <a:solidFill>
+                  <a:srgbClr val="374151"/>
+                </a:solidFill>
+                <a:latin typeface="Calibri" pitchFamily="34" charset="0"/>
+                <a:ea typeface="Calibri" pitchFamily="34" charset="-122"/>
+                <a:cs typeface="Calibri" pitchFamily="34" charset="-120"/>
+              </a:rPr>
+              <a:t>不管它了直接推 / just push it</a:t>
+            </a:r>
+            <a:endParaRPr lang="en-US" sz="1100" dirty="0"/>
+          </a:p>
+        </p:txBody>
+      </p:sp>
+      <p:sp>
+        <p:nvSpPr>
+          <p:cNvPr id="12" name="Shape 10"/>
+          <p:cNvSpPr/>
+          <p:nvPr/>
+        </p:nvSpPr>
+        <p:spPr>
+          <a:xfrm>
+            <a:off x="548640" y="3017520"/>
+            <a:ext cx="4023360" cy="384048"/>
+          </a:xfrm>
+          <a:prstGeom prst="roundRect">
+            <a:avLst>
+              <a:gd name="adj" fmla="val 11905"/>
+            </a:avLst>
+          </a:prstGeom>
+          <a:solidFill>
+            <a:srgbClr val="FEF2F2"/>
+          </a:solidFill>
+          <a:ln w="9525">
+            <a:solidFill>
+              <a:srgbClr val="FCA5A5"/>
+            </a:solidFill>
+            <a:prstDash val="solid"/>
+          </a:ln>
+        </p:spPr>
+      </p:sp>
+      <p:sp>
+        <p:nvSpPr>
+          <p:cNvPr id="13" name="Text 11"/>
+          <p:cNvSpPr/>
+          <p:nvPr/>
+        </p:nvSpPr>
+        <p:spPr>
+          <a:xfrm>
+            <a:off x="640080" y="3017520"/>
+            <a:ext cx="274320" cy="384048"/>
+          </a:xfrm>
+          <a:prstGeom prst="rect">
+            <a:avLst/>
+          </a:prstGeom>
+          <a:noFill/>
+          <a:ln/>
+        </p:spPr>
+        <p:txBody>
+          <a:bodyPr wrap="square" lIns="0" tIns="0" rIns="0" bIns="0" rtlCol="0" anchor="ctr"/>
+          <a:lstStyle/>
+          <a:p>
+            <a:pPr algn="ctr" indent="0" marL="0">
+              <a:buNone/>
+            </a:pPr>
+            <a:r>
+              <a:rPr lang="en-US" sz="1400" b="1" dirty="0">
+                <a:solidFill>
+                  <a:srgbClr val="DC2626"/>
+                </a:solidFill>
+                <a:latin typeface="Calibri" pitchFamily="34" charset="0"/>
+                <a:ea typeface="Calibri" pitchFamily="34" charset="-122"/>
+                <a:cs typeface="Calibri" pitchFamily="34" charset="-120"/>
+              </a:rPr>
+              <a:t>✗</a:t>
+            </a:r>
+            <a:endParaRPr lang="en-US" sz="1400" dirty="0"/>
+          </a:p>
+        </p:txBody>
+      </p:sp>
+      <p:sp>
+        <p:nvSpPr>
+          <p:cNvPr id="14" name="Text 12"/>
+          <p:cNvSpPr/>
+          <p:nvPr/>
+        </p:nvSpPr>
+        <p:spPr>
+          <a:xfrm>
+            <a:off x="960120" y="3017520"/>
+            <a:ext cx="3017520" cy="384048"/>
+          </a:xfrm>
+          <a:prstGeom prst="rect">
+            <a:avLst/>
+          </a:prstGeom>
+          <a:noFill/>
+          <a:ln/>
+        </p:spPr>
+        <p:txBody>
+          <a:bodyPr wrap="square" lIns="0" tIns="0" rIns="0" bIns="0" rtlCol="0" anchor="ctr"/>
+          <a:lstStyle/>
+          <a:p>
+            <a:pPr algn="l" indent="0" marL="0">
+              <a:buNone/>
+            </a:pPr>
+            <a:r>
+              <a:rPr lang="en-US" sz="1100" dirty="0">
+                <a:solidFill>
+                  <a:srgbClr val="374151"/>
+                </a:solidFill>
+                <a:latin typeface="Calibri" pitchFamily="34" charset="0"/>
+                <a:ea typeface="Calibri" pitchFamily="34" charset="-122"/>
+                <a:cs typeface="Calibri" pitchFamily="34" charset="-120"/>
+              </a:rPr>
+              <a:t>直接蓋過去 / just overwrite</a:t>
+            </a:r>
+            <a:endParaRPr lang="en-US" sz="1100" dirty="0"/>
+          </a:p>
+        </p:txBody>
+      </p:sp>
+      <p:sp>
+        <p:nvSpPr>
+          <p:cNvPr id="15" name="Shape 13"/>
+          <p:cNvSpPr/>
+          <p:nvPr/>
+        </p:nvSpPr>
+        <p:spPr>
+          <a:xfrm>
+            <a:off x="548640" y="3474720"/>
+            <a:ext cx="4023360" cy="384048"/>
+          </a:xfrm>
+          <a:prstGeom prst="roundRect">
+            <a:avLst>
+              <a:gd name="adj" fmla="val 11905"/>
+            </a:avLst>
+          </a:prstGeom>
+          <a:solidFill>
+            <a:srgbClr val="FEF2F2"/>
+          </a:solidFill>
+          <a:ln w="9525">
+            <a:solidFill>
+              <a:srgbClr val="FCA5A5"/>
+            </a:solidFill>
+            <a:prstDash val="solid"/>
+          </a:ln>
+        </p:spPr>
+      </p:sp>
+      <p:sp>
+        <p:nvSpPr>
+          <p:cNvPr id="16" name="Text 14"/>
+          <p:cNvSpPr/>
+          <p:nvPr/>
+        </p:nvSpPr>
+        <p:spPr>
+          <a:xfrm>
+            <a:off x="640080" y="3474720"/>
+            <a:ext cx="274320" cy="384048"/>
+          </a:xfrm>
+          <a:prstGeom prst="rect">
+            <a:avLst/>
+          </a:prstGeom>
+          <a:noFill/>
+          <a:ln/>
+        </p:spPr>
+        <p:txBody>
+          <a:bodyPr wrap="square" lIns="0" tIns="0" rIns="0" bIns="0" rtlCol="0" anchor="ctr"/>
+          <a:lstStyle/>
+          <a:p>
+            <a:pPr algn="ctr" indent="0" marL="0">
+              <a:buNone/>
+            </a:pPr>
+            <a:r>
+              <a:rPr lang="en-US" sz="1400" b="1" dirty="0">
+                <a:solidFill>
+                  <a:srgbClr val="DC2626"/>
+                </a:solidFill>
+                <a:latin typeface="Calibri" pitchFamily="34" charset="0"/>
+                <a:ea typeface="Calibri" pitchFamily="34" charset="-122"/>
+                <a:cs typeface="Calibri" pitchFamily="34" charset="-120"/>
+              </a:rPr>
+              <a:t>✗</a:t>
+            </a:r>
+            <a:endParaRPr lang="en-US" sz="1400" dirty="0"/>
+          </a:p>
+        </p:txBody>
+      </p:sp>
+      <p:sp>
+        <p:nvSpPr>
+          <p:cNvPr id="17" name="Text 15"/>
+          <p:cNvSpPr/>
+          <p:nvPr/>
+        </p:nvSpPr>
+        <p:spPr>
+          <a:xfrm>
+            <a:off x="960120" y="3474720"/>
+            <a:ext cx="3017520" cy="384048"/>
+          </a:xfrm>
+          <a:prstGeom prst="rect">
+            <a:avLst/>
+          </a:prstGeom>
+          <a:noFill/>
+          <a:ln/>
+        </p:spPr>
+        <p:txBody>
+          <a:bodyPr wrap="square" lIns="0" tIns="0" rIns="0" bIns="0" rtlCol="0" anchor="ctr"/>
+          <a:lstStyle/>
+          <a:p>
+            <a:pPr algn="l" indent="0" marL="0">
+              <a:buNone/>
+            </a:pPr>
+            <a:r>
+              <a:rPr lang="en-US" sz="1100" dirty="0">
+                <a:solidFill>
+                  <a:srgbClr val="374151"/>
+                </a:solidFill>
+                <a:latin typeface="Calibri" pitchFamily="34" charset="0"/>
+                <a:ea typeface="Calibri" pitchFamily="34" charset="-122"/>
+                <a:cs typeface="Calibri" pitchFamily="34" charset="-120"/>
+              </a:rPr>
+              <a:t>我要 --force / --force-with-lease</a:t>
+            </a:r>
+            <a:endParaRPr lang="en-US" sz="1100" dirty="0"/>
+          </a:p>
+        </p:txBody>
+      </p:sp>
+      <p:sp>
+        <p:nvSpPr>
+          <p:cNvPr id="18" name="Text 16"/>
+          <p:cNvSpPr/>
+          <p:nvPr/>
+        </p:nvSpPr>
+        <p:spPr>
+          <a:xfrm>
+            <a:off x="4754880" y="1691640"/>
+            <a:ext cx="4023360" cy="274320"/>
+          </a:xfrm>
+          <a:prstGeom prst="rect">
+            <a:avLst/>
+          </a:prstGeom>
+          <a:noFill/>
+          <a:ln/>
+        </p:spPr>
+        <p:txBody>
+          <a:bodyPr wrap="square" lIns="0" tIns="0" rIns="0" bIns="0" rtlCol="0" anchor="ctr"/>
+          <a:lstStyle/>
+          <a:p>
+            <a:pPr algn="l" indent="0" marL="0">
+              <a:buNone/>
+            </a:pPr>
+            <a:r>
+              <a:rPr lang="en-US" sz="1400" b="1" dirty="0">
+                <a:solidFill>
+                  <a:srgbClr val="DC2626"/>
+                </a:solidFill>
+                <a:latin typeface="Calibri" pitchFamily="34" charset="0"/>
+                <a:ea typeface="Calibri" pitchFamily="34" charset="-122"/>
+                <a:cs typeface="Calibri" pitchFamily="34" charset="-120"/>
+              </a:rPr>
+              <a:t>為什麼會出事——Force Push 的後果</a:t>
+            </a:r>
+            <a:endParaRPr lang="en-US" sz="1400" dirty="0"/>
+          </a:p>
+        </p:txBody>
+      </p:sp>
+      <p:sp>
+        <p:nvSpPr>
+          <p:cNvPr id="19" name="Text 17"/>
+          <p:cNvSpPr/>
+          <p:nvPr/>
+        </p:nvSpPr>
+        <p:spPr>
+          <a:xfrm>
+            <a:off x="4754880" y="2148840"/>
+            <a:ext cx="914400" cy="219456"/>
+          </a:xfrm>
+          <a:prstGeom prst="rect">
+            <a:avLst/>
+          </a:prstGeom>
+          <a:noFill/>
+          <a:ln/>
+        </p:spPr>
+        <p:txBody>
+          <a:bodyPr wrap="square" lIns="0" tIns="0" rIns="0" bIns="0" rtlCol="0" anchor="ctr"/>
+          <a:lstStyle/>
+          <a:p>
+            <a:pPr algn="l" indent="0" marL="0">
+              <a:buNone/>
+            </a:pPr>
+            <a:r>
+              <a:rPr lang="en-US" sz="1000" b="1" dirty="0">
+                <a:solidFill>
+                  <a:srgbClr val="6B7280"/>
+                </a:solidFill>
+                <a:latin typeface="Calibri" pitchFamily="34" charset="0"/>
+                <a:ea typeface="Calibri" pitchFamily="34" charset="-122"/>
+                <a:cs typeface="Calibri" pitchFamily="34" charset="-120"/>
+              </a:rPr>
+              <a:t>Before:</a:t>
+            </a:r>
+            <a:endParaRPr lang="en-US" sz="1000" dirty="0"/>
+          </a:p>
+        </p:txBody>
+      </p:sp>
+      <p:sp>
+        <p:nvSpPr>
+          <p:cNvPr id="20" name="Text 18"/>
+          <p:cNvSpPr/>
+          <p:nvPr/>
+        </p:nvSpPr>
+        <p:spPr>
+          <a:xfrm>
+            <a:off x="5577840" y="2148840"/>
+            <a:ext cx="3200400" cy="274320"/>
+          </a:xfrm>
+          <a:prstGeom prst="rect">
+            <a:avLst/>
+          </a:prstGeom>
+          <a:noFill/>
+          <a:ln/>
+        </p:spPr>
+        <p:txBody>
+          <a:bodyPr wrap="square" lIns="0" tIns="0" rIns="0" bIns="0" rtlCol="0" anchor="ctr"/>
+          <a:lstStyle/>
+          <a:p>
+            <a:pPr algn="l" indent="0" marL="0">
+              <a:buNone/>
+            </a:pPr>
+            <a:r>
+              <a:rPr lang="en-US" sz="1800" b="1" dirty="0">
+                <a:solidFill>
+                  <a:srgbClr val="1A66FF"/>
+                </a:solidFill>
+                <a:latin typeface="Consolas" pitchFamily="34" charset="0"/>
+                <a:ea typeface="Consolas" pitchFamily="34" charset="-122"/>
+                <a:cs typeface="Consolas" pitchFamily="34" charset="-120"/>
+              </a:rPr>
+              <a:t>● ─ ● ─ </a:t>
+            </a:r>
+            <a:pPr algn="l" indent="0" marL="0">
+              <a:buNone/>
+            </a:pPr>
+            <a:r>
+              <a:rPr lang="en-US" sz="1800" b="1" dirty="0">
+                <a:solidFill>
+                  <a:srgbClr val="DC2626"/>
+                </a:solidFill>
+                <a:latin typeface="Consolas" pitchFamily="34" charset="0"/>
+                <a:ea typeface="Consolas" pitchFamily="34" charset="-122"/>
+                <a:cs typeface="Consolas" pitchFamily="34" charset="-120"/>
+              </a:rPr>
+              <a:t>▲</a:t>
+            </a:r>
+            <a:endParaRPr lang="en-US" sz="1800" dirty="0"/>
+          </a:p>
+        </p:txBody>
+      </p:sp>
+      <p:sp>
+        <p:nvSpPr>
+          <p:cNvPr id="21" name="Text 19"/>
+          <p:cNvSpPr/>
+          <p:nvPr/>
+        </p:nvSpPr>
+        <p:spPr>
+          <a:xfrm>
+            <a:off x="4754880" y="2468880"/>
+            <a:ext cx="4023360" cy="201168"/>
+          </a:xfrm>
+          <a:prstGeom prst="rect">
+            <a:avLst/>
+          </a:prstGeom>
+          <a:noFill/>
+          <a:ln/>
+        </p:spPr>
+        <p:txBody>
+          <a:bodyPr wrap="square" lIns="0" tIns="0" rIns="0" bIns="0" rtlCol="0" anchor="ctr"/>
+          <a:lstStyle/>
+          <a:p>
+            <a:pPr algn="l" indent="0" marL="0">
+              <a:buNone/>
+            </a:pPr>
+            <a:r>
+              <a:rPr lang="en-US" sz="900" i="1" dirty="0">
+                <a:solidFill>
+                  <a:srgbClr val="6B7280"/>
+                </a:solidFill>
+                <a:latin typeface="Calibri" pitchFamily="34" charset="0"/>
+                <a:ea typeface="Calibri" pitchFamily="34" charset="-122"/>
+                <a:cs typeface="Calibri" pitchFamily="34" charset="-120"/>
+              </a:rPr>
+              <a:t>(▲ = 隊友剛 push 的 commit)</a:t>
+            </a:r>
+            <a:endParaRPr lang="en-US" sz="900" dirty="0"/>
+          </a:p>
+        </p:txBody>
+      </p:sp>
+      <p:sp>
+        <p:nvSpPr>
+          <p:cNvPr id="22" name="Text 20"/>
+          <p:cNvSpPr/>
+          <p:nvPr/>
+        </p:nvSpPr>
+        <p:spPr>
+          <a:xfrm>
+            <a:off x="4754880" y="2788920"/>
+            <a:ext cx="4023360" cy="237744"/>
+          </a:xfrm>
+          <a:prstGeom prst="rect">
+            <a:avLst/>
+          </a:prstGeom>
+          <a:noFill/>
+          <a:ln/>
+        </p:spPr>
+        <p:txBody>
+          <a:bodyPr wrap="square" lIns="0" tIns="0" rIns="0" bIns="0" rtlCol="0" anchor="ctr"/>
+          <a:lstStyle/>
+          <a:p>
+            <a:pPr algn="l" indent="0" marL="0">
+              <a:buNone/>
+            </a:pPr>
+            <a:r>
+              <a:rPr lang="en-US" sz="1100" b="1" i="1" dirty="0">
+                <a:solidFill>
+                  <a:srgbClr val="DC2626"/>
+                </a:solidFill>
+                <a:latin typeface="Calibri" pitchFamily="34" charset="0"/>
+                <a:ea typeface="Calibri" pitchFamily="34" charset="-122"/>
+                <a:cs typeface="Calibri" pitchFamily="34" charset="-120"/>
+              </a:rPr>
+              <a:t>AI force push ↓</a:t>
+            </a:r>
+            <a:endParaRPr lang="en-US" sz="1100" dirty="0"/>
+          </a:p>
+        </p:txBody>
+      </p:sp>
+      <p:sp>
+        <p:nvSpPr>
+          <p:cNvPr id="23" name="Text 21"/>
+          <p:cNvSpPr/>
+          <p:nvPr/>
+        </p:nvSpPr>
+        <p:spPr>
+          <a:xfrm>
+            <a:off x="4754880" y="3108960"/>
+            <a:ext cx="914400" cy="219456"/>
+          </a:xfrm>
+          <a:prstGeom prst="rect">
+            <a:avLst/>
+          </a:prstGeom>
+          <a:noFill/>
+          <a:ln/>
+        </p:spPr>
+        <p:txBody>
+          <a:bodyPr wrap="square" lIns="0" tIns="0" rIns="0" bIns="0" rtlCol="0" anchor="ctr"/>
+          <a:lstStyle/>
+          <a:p>
+            <a:pPr algn="l" indent="0" marL="0">
+              <a:buNone/>
+            </a:pPr>
+            <a:r>
+              <a:rPr lang="en-US" sz="1000" b="1" dirty="0">
+                <a:solidFill>
+                  <a:srgbClr val="6B7280"/>
+                </a:solidFill>
+                <a:latin typeface="Calibri" pitchFamily="34" charset="0"/>
+                <a:ea typeface="Calibri" pitchFamily="34" charset="-122"/>
+                <a:cs typeface="Calibri" pitchFamily="34" charset="-120"/>
+              </a:rPr>
+              <a:t>After:</a:t>
+            </a:r>
+            <a:endParaRPr lang="en-US" sz="1000" dirty="0"/>
+          </a:p>
+        </p:txBody>
+      </p:sp>
+      <p:sp>
+        <p:nvSpPr>
+          <p:cNvPr id="24" name="Text 22"/>
+          <p:cNvSpPr/>
+          <p:nvPr/>
+        </p:nvSpPr>
+        <p:spPr>
+          <a:xfrm>
+            <a:off x="5577840" y="3108960"/>
+            <a:ext cx="3200400" cy="274320"/>
+          </a:xfrm>
+          <a:prstGeom prst="rect">
+            <a:avLst/>
+          </a:prstGeom>
+          <a:noFill/>
+          <a:ln/>
+        </p:spPr>
+        <p:txBody>
+          <a:bodyPr wrap="square" lIns="0" tIns="0" rIns="0" bIns="0" rtlCol="0" anchor="ctr"/>
+          <a:lstStyle/>
+          <a:p>
+            <a:pPr algn="l" indent="0" marL="0">
+              <a:buNone/>
+            </a:pPr>
+            <a:r>
+              <a:rPr lang="en-US" sz="1800" b="1" dirty="0">
+                <a:solidFill>
+                  <a:srgbClr val="1A66FF"/>
+                </a:solidFill>
+                <a:latin typeface="Consolas" pitchFamily="34" charset="0"/>
+                <a:ea typeface="Consolas" pitchFamily="34" charset="-122"/>
+                <a:cs typeface="Consolas" pitchFamily="34" charset="-120"/>
+              </a:rPr>
+              <a:t>● ─ ● ─ </a:t>
+            </a:r>
+            <a:pPr algn="l" indent="0" marL="0">
+              <a:buNone/>
+            </a:pPr>
+            <a:r>
+              <a:rPr lang="en-US" sz="1800" b="1" dirty="0">
+                <a:solidFill>
+                  <a:srgbClr val="F59E0B"/>
+                </a:solidFill>
+                <a:latin typeface="Consolas" pitchFamily="34" charset="0"/>
+                <a:ea typeface="Consolas" pitchFamily="34" charset="-122"/>
+                <a:cs typeface="Consolas" pitchFamily="34" charset="-120"/>
+              </a:rPr>
+              <a:t>●</a:t>
+            </a:r>
+            <a:pPr algn="l" indent="0" marL="0">
+              <a:buNone/>
+            </a:pPr>
+            <a:r>
+              <a:rPr lang="en-US" sz="1800" dirty="0">
+                <a:solidFill>
+                  <a:srgbClr val="9CA3AF"/>
+                </a:solidFill>
+                <a:latin typeface="Consolas" pitchFamily="34" charset="0"/>
+                <a:ea typeface="Consolas" pitchFamily="34" charset="-122"/>
+                <a:cs typeface="Consolas" pitchFamily="34" charset="-120"/>
+              </a:rPr>
+              <a:t> ─ </a:t>
+            </a:r>
+            <a:pPr algn="l" indent="0" marL="0">
+              <a:buNone/>
+            </a:pPr>
+            <a:r>
+              <a:rPr lang="en-US" sz="1800" b="1" dirty="0">
+                <a:solidFill>
+                  <a:srgbClr val="F59E0B"/>
+                </a:solidFill>
+                <a:latin typeface="Consolas" pitchFamily="34" charset="0"/>
+                <a:ea typeface="Consolas" pitchFamily="34" charset="-122"/>
+                <a:cs typeface="Consolas" pitchFamily="34" charset="-120"/>
+              </a:rPr>
+              <a:t>●</a:t>
+            </a:r>
+            <a:endParaRPr lang="en-US" sz="1800" dirty="0"/>
+          </a:p>
+        </p:txBody>
+      </p:sp>
+      <p:sp>
+        <p:nvSpPr>
+          <p:cNvPr id="25" name="Text 23"/>
+          <p:cNvSpPr/>
+          <p:nvPr/>
+        </p:nvSpPr>
+        <p:spPr>
+          <a:xfrm>
+            <a:off x="4754880" y="3429000"/>
+            <a:ext cx="4023360" cy="201168"/>
+          </a:xfrm>
+          <a:prstGeom prst="rect">
+            <a:avLst/>
+          </a:prstGeom>
+          <a:noFill/>
+          <a:ln/>
+        </p:spPr>
+        <p:txBody>
+          <a:bodyPr wrap="square" lIns="0" tIns="0" rIns="0" bIns="0" rtlCol="0" anchor="ctr"/>
+          <a:lstStyle/>
+          <a:p>
+            <a:pPr algn="l" indent="0" marL="0">
+              <a:buNone/>
+            </a:pPr>
+            <a:r>
+              <a:rPr lang="en-US" sz="900" i="1" dirty="0">
+                <a:solidFill>
+                  <a:srgbClr val="DC2626"/>
+                </a:solidFill>
+                <a:latin typeface="Calibri" pitchFamily="34" charset="0"/>
+                <a:ea typeface="Calibri" pitchFamily="34" charset="-122"/>
+                <a:cs typeface="Calibri" pitchFamily="34" charset="-120"/>
+              </a:rPr>
+              <a:t>(▲ 不見了——被你 commit 覆蓋)</a:t>
+            </a:r>
+            <a:endParaRPr lang="en-US" sz="900" dirty="0"/>
+          </a:p>
+        </p:txBody>
+      </p:sp>
+      <p:sp>
+        <p:nvSpPr>
+          <p:cNvPr id="26" name="Shape 24"/>
+          <p:cNvSpPr/>
+          <p:nvPr/>
+        </p:nvSpPr>
+        <p:spPr>
+          <a:xfrm>
+            <a:off x="4754880" y="3840480"/>
+            <a:ext cx="4023360" cy="457200"/>
+          </a:xfrm>
+          <a:prstGeom prst="roundRect">
+            <a:avLst>
+              <a:gd name="adj" fmla="val 10000"/>
+            </a:avLst>
+          </a:prstGeom>
+          <a:solidFill>
+            <a:srgbClr val="FEE2E2"/>
+          </a:solidFill>
+          <a:ln w="9525">
+            <a:solidFill>
+              <a:srgbClr val="DC2626"/>
+            </a:solidFill>
+            <a:prstDash val="solid"/>
+          </a:ln>
+        </p:spPr>
+      </p:sp>
+      <p:sp>
+        <p:nvSpPr>
+          <p:cNvPr id="27" name="Text 25"/>
+          <p:cNvSpPr/>
+          <p:nvPr/>
+        </p:nvSpPr>
+        <p:spPr>
+          <a:xfrm>
+            <a:off x="4892040" y="3858768"/>
+            <a:ext cx="3794760" cy="237744"/>
+          </a:xfrm>
+          <a:prstGeom prst="rect">
+            <a:avLst/>
+          </a:prstGeom>
+          <a:noFill/>
+          <a:ln/>
+        </p:spPr>
+        <p:txBody>
+          <a:bodyPr wrap="square" lIns="0" tIns="0" rIns="0" bIns="0" rtlCol="0" anchor="ctr"/>
+          <a:lstStyle/>
+          <a:p>
+            <a:pPr algn="l" indent="0" marL="0">
+              <a:buNone/>
+            </a:pPr>
+            <a:r>
+              <a:rPr lang="en-US" sz="1200" b="1" dirty="0">
+                <a:solidFill>
+                  <a:srgbClr val="DC2626"/>
+                </a:solidFill>
+                <a:latin typeface="Calibri" pitchFamily="34" charset="0"/>
+                <a:ea typeface="Calibri" pitchFamily="34" charset="-122"/>
+                <a:cs typeface="Calibri" pitchFamily="34" charset="-120"/>
+              </a:rPr>
+              <a:t>→ 隊友的工作消失了</a:t>
+            </a:r>
+            <a:endParaRPr lang="en-US" sz="1200" dirty="0"/>
+          </a:p>
+        </p:txBody>
+      </p:sp>
+      <p:sp>
+        <p:nvSpPr>
+          <p:cNvPr id="28" name="Text 26"/>
+          <p:cNvSpPr/>
+          <p:nvPr/>
+        </p:nvSpPr>
+        <p:spPr>
+          <a:xfrm>
+            <a:off x="4892040" y="4069080"/>
+            <a:ext cx="3794760" cy="201168"/>
+          </a:xfrm>
+          <a:prstGeom prst="rect">
+            <a:avLst/>
+          </a:prstGeom>
+          <a:noFill/>
+          <a:ln/>
+        </p:spPr>
+        <p:txBody>
+          <a:bodyPr wrap="square" lIns="0" tIns="0" rIns="0" bIns="0" rtlCol="0" anchor="ctr"/>
+          <a:lstStyle/>
+          <a:p>
+            <a:pPr algn="l" indent="0" marL="0">
+              <a:buNone/>
+            </a:pPr>
+            <a:r>
+              <a:rPr lang="en-US" sz="950" i="1" dirty="0">
+                <a:solidFill>
+                  <a:srgbClr val="991B1B"/>
+                </a:solidFill>
+                <a:latin typeface="Calibri" pitchFamily="34" charset="0"/>
+                <a:ea typeface="Calibri" pitchFamily="34" charset="-122"/>
+                <a:cs typeface="Calibri" pitchFamily="34" charset="-120"/>
+              </a:rPr>
+              <a:t>Their work is gone</a:t>
+            </a:r>
+            <a:endParaRPr lang="en-US" sz="950" dirty="0"/>
+          </a:p>
+        </p:txBody>
+      </p:sp>
+      <p:sp>
+        <p:nvSpPr>
+          <p:cNvPr id="29" name="Shape 27"/>
+          <p:cNvSpPr/>
+          <p:nvPr/>
+        </p:nvSpPr>
+        <p:spPr>
+          <a:xfrm>
+            <a:off x="548640" y="4892040"/>
+            <a:ext cx="8229600" cy="777240"/>
+          </a:xfrm>
+          <a:prstGeom prst="roundRect">
+            <a:avLst>
+              <a:gd name="adj" fmla="val 5882"/>
+            </a:avLst>
+          </a:prstGeom>
+          <a:solidFill>
+            <a:srgbClr val="DBEAFE"/>
+          </a:solidFill>
+          <a:ln w="9525">
+            <a:solidFill>
+              <a:srgbClr val="93C5FD"/>
+            </a:solidFill>
+            <a:prstDash val="solid"/>
+          </a:ln>
+        </p:spPr>
+      </p:sp>
+      <p:sp>
+        <p:nvSpPr>
+          <p:cNvPr id="30" name="Shape 28"/>
+          <p:cNvSpPr/>
+          <p:nvPr/>
+        </p:nvSpPr>
+        <p:spPr>
+          <a:xfrm>
+            <a:off x="548640" y="4892040"/>
+            <a:ext cx="54864" cy="777240"/>
+          </a:xfrm>
+          <a:prstGeom prst="rect">
+            <a:avLst/>
+          </a:prstGeom>
+          <a:solidFill>
+            <a:srgbClr val="1E40AF"/>
           </a:solidFill>
           <a:ln w="12700">
             <a:solidFill>
-              <a:srgbClr val="10B981"/>
+              <a:srgbClr val="1E40AF"/>
             </a:solidFill>
             <a:prstDash val="solid"/>
           </a:ln>
@@ -17086,179 +17980,62 @@
       </p:sp>
       <p:sp>
         <p:nvSpPr>
-          <p:cNvPr id="6" name="Text 4"/>
-          <p:cNvSpPr/>
-          <p:nvPr/>
-        </p:nvSpPr>
-        <p:spPr>
-          <a:xfrm>
-            <a:off x="777240" y="1965960"/>
-            <a:ext cx="1097280" cy="1097280"/>
-          </a:xfrm>
-          <a:prstGeom prst="rect">
-            <a:avLst/>
-          </a:prstGeom>
-          <a:noFill/>
-          <a:ln/>
-        </p:spPr>
-        <p:txBody>
-          <a:bodyPr wrap="square" lIns="0" tIns="0" rIns="0" bIns="0" rtlCol="0" anchor="ctr"/>
-          <a:lstStyle/>
-          <a:p>
-            <a:pPr algn="ctr" indent="0" marL="0">
-              <a:buNone/>
-            </a:pPr>
-            <a:r>
-              <a:rPr lang="en-US" sz="6000" dirty="0">
-                <a:solidFill>
-                  <a:srgbClr val="000000"/>
-                </a:solidFill>
-                <a:latin typeface="Calibri" pitchFamily="34" charset="0"/>
-                <a:ea typeface="Calibri" pitchFamily="34" charset="-122"/>
-                <a:cs typeface="Calibri" pitchFamily="34" charset="-120"/>
-              </a:rPr>
-              <a:t>🛡️</a:t>
-            </a:r>
-            <a:endParaRPr lang="en-US" sz="6000" dirty="0"/>
-          </a:p>
-        </p:txBody>
-      </p:sp>
-      <p:sp>
-        <p:nvSpPr>
-          <p:cNvPr id="7" name="Text 5"/>
-          <p:cNvSpPr/>
-          <p:nvPr/>
-        </p:nvSpPr>
-        <p:spPr>
-          <a:xfrm>
-            <a:off x="2011680" y="1965960"/>
-            <a:ext cx="6583680" cy="365760"/>
-          </a:xfrm>
-          <a:prstGeom prst="rect">
-            <a:avLst/>
-          </a:prstGeom>
-          <a:noFill/>
-          <a:ln/>
-        </p:spPr>
-        <p:txBody>
-          <a:bodyPr wrap="square" lIns="0" tIns="0" rIns="0" bIns="0" rtlCol="0" anchor="ctr"/>
-          <a:lstStyle/>
-          <a:p>
-            <a:pPr algn="l" indent="0" marL="0">
-              <a:buNone/>
-            </a:pPr>
-            <a:r>
-              <a:rPr lang="en-US" sz="1800" b="1" dirty="0">
-                <a:solidFill>
-                  <a:srgbClr val="065F46"/>
-                </a:solidFill>
-                <a:latin typeface="Calibri" pitchFamily="34" charset="0"/>
-                <a:ea typeface="Calibri" pitchFamily="34" charset="-122"/>
-                <a:cs typeface="Calibri" pitchFamily="34" charset="-120"/>
-              </a:rPr>
-              <a:t>Michael 已經在這個 repo 裡寫了 git hooks</a:t>
-            </a:r>
-            <a:endParaRPr lang="en-US" sz="1800" dirty="0"/>
-          </a:p>
-        </p:txBody>
-      </p:sp>
-      <p:sp>
-        <p:nvSpPr>
-          <p:cNvPr id="8" name="Text 6"/>
-          <p:cNvSpPr/>
-          <p:nvPr/>
-        </p:nvSpPr>
-        <p:spPr>
-          <a:xfrm>
-            <a:off x="2011680" y="2331720"/>
-            <a:ext cx="6583680" cy="256032"/>
-          </a:xfrm>
-          <a:prstGeom prst="rect">
-            <a:avLst/>
-          </a:prstGeom>
-          <a:noFill/>
-          <a:ln/>
-        </p:spPr>
-        <p:txBody>
-          <a:bodyPr wrap="square" lIns="0" tIns="0" rIns="0" bIns="0" rtlCol="0" anchor="ctr"/>
-          <a:lstStyle/>
-          <a:p>
-            <a:pPr algn="l" indent="0" marL="0">
-              <a:buNone/>
-            </a:pPr>
-            <a:r>
-              <a:rPr lang="en-US" sz="1200" i="1" dirty="0">
-                <a:solidFill>
-                  <a:srgbClr val="047857"/>
-                </a:solidFill>
-                <a:latin typeface="Calibri" pitchFamily="34" charset="0"/>
-                <a:ea typeface="Calibri" pitchFamily="34" charset="-122"/>
-                <a:cs typeface="Calibri" pitchFamily="34" charset="-120"/>
-              </a:rPr>
-              <a:t>Michael set up git hooks for this repo</a:t>
-            </a:r>
-            <a:endParaRPr lang="en-US" sz="1200" dirty="0"/>
-          </a:p>
-        </p:txBody>
-      </p:sp>
-      <p:sp>
-        <p:nvSpPr>
-          <p:cNvPr id="9" name="Text 7"/>
-          <p:cNvSpPr/>
-          <p:nvPr/>
-        </p:nvSpPr>
-        <p:spPr>
-          <a:xfrm>
-            <a:off x="2011680" y="2697480"/>
-            <a:ext cx="6583680" cy="365760"/>
-          </a:xfrm>
-          <a:prstGeom prst="rect">
-            <a:avLst/>
-          </a:prstGeom>
-          <a:noFill/>
-          <a:ln/>
-        </p:spPr>
-        <p:txBody>
-          <a:bodyPr wrap="square" lIns="0" tIns="0" rIns="0" bIns="0" rtlCol="0" anchor="t"/>
-          <a:lstStyle/>
-          <a:p>
-            <a:pPr algn="l" indent="0" marL="0">
-              <a:buNone/>
-            </a:pPr>
-            <a:r>
-              <a:rPr lang="en-US" sz="1200" dirty="0">
-                <a:solidFill>
-                  <a:srgbClr val="065F46"/>
-                </a:solidFill>
-                <a:latin typeface="Calibri" pitchFamily="34" charset="0"/>
-                <a:ea typeface="Calibri" pitchFamily="34" charset="-122"/>
-                <a:cs typeface="Calibri" pitchFamily="34" charset="-120"/>
-              </a:rPr>
-              <a:t>AI 想做剛才提的那些危險操作（force push、git add . 全部、commit 含 secret⋯）會被自動擋下，不用擔心一不小心犯錯。</a:t>
-            </a:r>
-            <a:endParaRPr lang="en-US" sz="1200" dirty="0"/>
-          </a:p>
-        </p:txBody>
-      </p:sp>
-      <p:sp>
-        <p:nvSpPr>
-          <p:cNvPr id="10" name="Text 8"/>
-          <p:cNvSpPr/>
-          <p:nvPr/>
-        </p:nvSpPr>
-        <p:spPr>
-          <a:xfrm>
-            <a:off x="2011680" y="3035808"/>
-            <a:ext cx="6583680" cy="274320"/>
-          </a:xfrm>
-          <a:prstGeom prst="rect">
-            <a:avLst/>
-          </a:prstGeom>
-          <a:noFill/>
-          <a:ln/>
-        </p:spPr>
-        <p:txBody>
-          <a:bodyPr wrap="square" lIns="0" tIns="0" rIns="0" bIns="0" rtlCol="0" anchor="t"/>
+          <p:cNvPr id="31" name="Text 29"/>
+          <p:cNvSpPr/>
+          <p:nvPr/>
+        </p:nvSpPr>
+        <p:spPr>
+          <a:xfrm>
+            <a:off x="777240" y="4983480"/>
+            <a:ext cx="7772400" cy="292608"/>
+          </a:xfrm>
+          <a:prstGeom prst="rect">
+            <a:avLst/>
+          </a:prstGeom>
+          <a:noFill/>
+          <a:ln/>
+        </p:spPr>
+        <p:txBody>
+          <a:bodyPr wrap="square" lIns="0" tIns="0" rIns="0" bIns="0" rtlCol="0" anchor="ctr"/>
+          <a:lstStyle/>
+          <a:p>
+            <a:pPr algn="l" indent="0" marL="0">
+              <a:buNone/>
+            </a:pPr>
+            <a:r>
+              <a:rPr lang="en-US" sz="1250" b="1" dirty="0">
+                <a:solidFill>
+                  <a:srgbClr val="1E3A8A"/>
+                </a:solidFill>
+                <a:latin typeface="Calibri" pitchFamily="34" charset="0"/>
+                <a:ea typeface="Calibri" pitchFamily="34" charset="-122"/>
+                <a:cs typeface="Calibri" pitchFamily="34" charset="-120"/>
+              </a:rPr>
+              <a:t>別擔心：hie-rei 的 hooks 已經機械擋下 force push——說錯話也跑不出來。</a:t>
+            </a:r>
+            <a:endParaRPr lang="en-US" sz="1250" dirty="0"/>
+          </a:p>
+        </p:txBody>
+      </p:sp>
+      <p:sp>
+        <p:nvSpPr>
+          <p:cNvPr id="32" name="Text 30"/>
+          <p:cNvSpPr/>
+          <p:nvPr/>
+        </p:nvSpPr>
+        <p:spPr>
+          <a:xfrm>
+            <a:off x="777240" y="5303520"/>
+            <a:ext cx="7772400" cy="274320"/>
+          </a:xfrm>
+          <a:prstGeom prst="rect">
+            <a:avLst/>
+          </a:prstGeom>
+          <a:noFill/>
+          <a:ln/>
+        </p:spPr>
+        <p:txBody>
+          <a:bodyPr wrap="square" lIns="0" tIns="0" rIns="0" bIns="0" rtlCol="0" anchor="ctr"/>
           <a:lstStyle/>
           <a:p>
             <a:pPr algn="l" indent="0" marL="0">
@@ -17267,301 +18044,15 @@
             <a:r>
               <a:rPr lang="en-US" sz="1000" i="1" dirty="0">
                 <a:solidFill>
-                  <a:srgbClr val="047857"/>
-                </a:solidFill>
-                <a:latin typeface="Calibri" pitchFamily="34" charset="0"/>
-                <a:ea typeface="Calibri" pitchFamily="34" charset="-122"/>
-                <a:cs typeface="Calibri" pitchFamily="34" charset="-120"/>
-              </a:rPr>
-              <a:t>Hooks block AI from running the dangerous operations we just talked about — you can't accidentally break things.</a:t>
+                  <a:srgbClr val="1E40AF"/>
+                </a:solidFill>
+                <a:latin typeface="Calibri" pitchFamily="34" charset="0"/>
+                <a:ea typeface="Calibri" pitchFamily="34" charset="-122"/>
+                <a:cs typeface="Calibri" pitchFamily="34" charset="-120"/>
+              </a:rPr>
+              <a:t>Don't worry — hie-rei's hooks already block force push, even if your wording is off. (Next slide)</a:t>
             </a:r>
             <a:endParaRPr lang="en-US" sz="1000" dirty="0"/>
-          </a:p>
-        </p:txBody>
-      </p:sp>
-      <p:sp>
-        <p:nvSpPr>
-          <p:cNvPr id="11" name="Shape 9"/>
-          <p:cNvSpPr/>
-          <p:nvPr/>
-        </p:nvSpPr>
-        <p:spPr>
-          <a:xfrm>
-            <a:off x="548640" y="3611880"/>
-            <a:ext cx="8229600" cy="1417320"/>
-          </a:xfrm>
-          <a:prstGeom prst="roundRect">
-            <a:avLst>
-              <a:gd name="adj" fmla="val 3871"/>
-            </a:avLst>
-          </a:prstGeom>
-          <a:solidFill>
-            <a:srgbClr val="FEF3C7"/>
-          </a:solidFill>
-          <a:ln w="12700">
-            <a:solidFill>
-              <a:srgbClr val="FEF3C7"/>
-            </a:solidFill>
-            <a:prstDash val="solid"/>
-          </a:ln>
-        </p:spPr>
-      </p:sp>
-      <p:sp>
-        <p:nvSpPr>
-          <p:cNvPr id="12" name="Shape 10"/>
-          <p:cNvSpPr/>
-          <p:nvPr/>
-        </p:nvSpPr>
-        <p:spPr>
-          <a:xfrm>
-            <a:off x="548640" y="3611880"/>
-            <a:ext cx="54864" cy="1417320"/>
-          </a:xfrm>
-          <a:prstGeom prst="rect">
-            <a:avLst/>
-          </a:prstGeom>
-          <a:solidFill>
-            <a:srgbClr val="D97706"/>
-          </a:solidFill>
-          <a:ln w="12700">
-            <a:solidFill>
-              <a:srgbClr val="D97706"/>
-            </a:solidFill>
-            <a:prstDash val="solid"/>
-          </a:ln>
-        </p:spPr>
-      </p:sp>
-      <p:sp>
-        <p:nvSpPr>
-          <p:cNvPr id="13" name="Text 11"/>
-          <p:cNvSpPr/>
-          <p:nvPr/>
-        </p:nvSpPr>
-        <p:spPr>
-          <a:xfrm>
-            <a:off x="777240" y="3703320"/>
-            <a:ext cx="7863840" cy="320040"/>
-          </a:xfrm>
-          <a:prstGeom prst="rect">
-            <a:avLst/>
-          </a:prstGeom>
-          <a:noFill/>
-          <a:ln/>
-        </p:spPr>
-        <p:txBody>
-          <a:bodyPr wrap="square" lIns="0" tIns="0" rIns="0" bIns="0" rtlCol="0" anchor="ctr"/>
-          <a:lstStyle/>
-          <a:p>
-            <a:pPr algn="l" indent="0" marL="0">
-              <a:buNone/>
-            </a:pPr>
-            <a:r>
-              <a:rPr lang="en-US" sz="1400" b="1" dirty="0">
-                <a:solidFill>
-                  <a:srgbClr val="78350F"/>
-                </a:solidFill>
-                <a:latin typeface="Calibri" pitchFamily="34" charset="0"/>
-                <a:ea typeface="Calibri" pitchFamily="34" charset="-122"/>
-                <a:cs typeface="Calibri" pitchFamily="34" charset="-120"/>
-              </a:rPr>
-              <a:t>⚠️  但是 — 這層保護只在這個 repo 裡有效</a:t>
-            </a:r>
-            <a:endParaRPr lang="en-US" sz="1400" dirty="0"/>
-          </a:p>
-        </p:txBody>
-      </p:sp>
-      <p:sp>
-        <p:nvSpPr>
-          <p:cNvPr id="14" name="Text 12"/>
-          <p:cNvSpPr/>
-          <p:nvPr/>
-        </p:nvSpPr>
-        <p:spPr>
-          <a:xfrm>
-            <a:off x="777240" y="4023360"/>
-            <a:ext cx="7863840" cy="237744"/>
-          </a:xfrm>
-          <a:prstGeom prst="rect">
-            <a:avLst/>
-          </a:prstGeom>
-          <a:noFill/>
-          <a:ln/>
-        </p:spPr>
-        <p:txBody>
-          <a:bodyPr wrap="square" lIns="0" tIns="0" rIns="0" bIns="0" rtlCol="0" anchor="ctr"/>
-          <a:lstStyle/>
-          <a:p>
-            <a:pPr algn="l" indent="0" marL="0">
-              <a:buNone/>
-            </a:pPr>
-            <a:r>
-              <a:rPr lang="en-US" sz="1050" i="1" dirty="0">
-                <a:solidFill>
-                  <a:srgbClr val="92400E"/>
-                </a:solidFill>
-                <a:latin typeface="Calibri" pitchFamily="34" charset="0"/>
-                <a:ea typeface="Calibri" pitchFamily="34" charset="-122"/>
-                <a:cs typeface="Calibri" pitchFamily="34" charset="-120"/>
-              </a:rPr>
-              <a:t>This safety net only applies inside this repo</a:t>
-            </a:r>
-            <a:endParaRPr lang="en-US" sz="1050" dirty="0"/>
-          </a:p>
-        </p:txBody>
-      </p:sp>
-      <p:sp>
-        <p:nvSpPr>
-          <p:cNvPr id="15" name="Text 13"/>
-          <p:cNvSpPr/>
-          <p:nvPr/>
-        </p:nvSpPr>
-        <p:spPr>
-          <a:xfrm>
-            <a:off x="777240" y="4370832"/>
-            <a:ext cx="7863840" cy="292608"/>
-          </a:xfrm>
-          <a:prstGeom prst="rect">
-            <a:avLst/>
-          </a:prstGeom>
-          <a:noFill/>
-          <a:ln/>
-        </p:spPr>
-        <p:txBody>
-          <a:bodyPr wrap="square" lIns="0" tIns="0" rIns="0" bIns="0" rtlCol="0" anchor="ctr"/>
-          <a:lstStyle/>
-          <a:p>
-            <a:pPr algn="l" indent="0" marL="0">
-              <a:buNone/>
-            </a:pPr>
-            <a:r>
-              <a:rPr lang="en-US" sz="1200" dirty="0">
-                <a:solidFill>
-                  <a:srgbClr val="78350F"/>
-                </a:solidFill>
-                <a:latin typeface="Calibri" pitchFamily="34" charset="0"/>
-                <a:ea typeface="Calibri" pitchFamily="34" charset="-122"/>
-                <a:cs typeface="Calibri" pitchFamily="34" charset="-120"/>
-              </a:rPr>
-              <a:t>離開這個 repo（你的個人專案、其他 team 的 repo）就沒有這套防呆。</a:t>
-            </a:r>
-            <a:endParaRPr lang="en-US" sz="1200" dirty="0"/>
-          </a:p>
-        </p:txBody>
-      </p:sp>
-      <p:sp>
-        <p:nvSpPr>
-          <p:cNvPr id="16" name="Text 14"/>
-          <p:cNvSpPr/>
-          <p:nvPr/>
-        </p:nvSpPr>
-        <p:spPr>
-          <a:xfrm>
-            <a:off x="777240" y="4690872"/>
-            <a:ext cx="7863840" cy="256032"/>
-          </a:xfrm>
-          <a:prstGeom prst="rect">
-            <a:avLst/>
-          </a:prstGeom>
-          <a:noFill/>
-          <a:ln/>
-        </p:spPr>
-        <p:txBody>
-          <a:bodyPr wrap="square" lIns="0" tIns="0" rIns="0" bIns="0" rtlCol="0" anchor="ctr"/>
-          <a:lstStyle/>
-          <a:p>
-            <a:pPr algn="l" indent="0" marL="0">
-              <a:buNone/>
-            </a:pPr>
-            <a:r>
-              <a:rPr lang="en-US" sz="1000" i="1" dirty="0">
-                <a:solidFill>
-                  <a:srgbClr val="92400E"/>
-                </a:solidFill>
-                <a:latin typeface="Calibri" pitchFamily="34" charset="0"/>
-                <a:ea typeface="Calibri" pitchFamily="34" charset="-122"/>
-                <a:cs typeface="Calibri" pitchFamily="34" charset="-120"/>
-              </a:rPr>
-              <a:t>Outside this repo (your own projects, other teams' repos), there's no safety net.</a:t>
-            </a:r>
-            <a:endParaRPr lang="en-US" sz="1000" dirty="0"/>
-          </a:p>
-        </p:txBody>
-      </p:sp>
-      <p:sp>
-        <p:nvSpPr>
-          <p:cNvPr id="17" name="Text 15"/>
-          <p:cNvSpPr/>
-          <p:nvPr/>
-        </p:nvSpPr>
-        <p:spPr>
-          <a:xfrm>
-            <a:off x="548640" y="5285232"/>
-            <a:ext cx="8229600" cy="274320"/>
-          </a:xfrm>
-          <a:prstGeom prst="rect">
-            <a:avLst/>
-          </a:prstGeom>
-          <a:noFill/>
-          <a:ln/>
-        </p:spPr>
-        <p:txBody>
-          <a:bodyPr wrap="square" lIns="0" tIns="0" rIns="0" bIns="0" rtlCol="0" anchor="ctr"/>
-          <a:lstStyle/>
-          <a:p>
-            <a:pPr algn="l" indent="0" marL="0">
-              <a:buNone/>
-            </a:pPr>
-            <a:r>
-              <a:rPr lang="en-US" sz="1150" b="1" dirty="0">
-                <a:solidFill>
-                  <a:srgbClr val="111827"/>
-                </a:solidFill>
-                <a:latin typeface="Calibri" pitchFamily="34" charset="0"/>
-                <a:ea typeface="Calibri" pitchFamily="34" charset="-122"/>
-                <a:cs typeface="Calibri" pitchFamily="34" charset="-120"/>
-              </a:rPr>
-              <a:t>→ 所以前一頁的三個防禦 prompt 還是要寫進你個人的 CLAUDE.md，自律才是不依賴環境的根本。</a:t>
-            </a:r>
-            <a:endParaRPr lang="en-US" sz="1150" dirty="0"/>
-          </a:p>
-        </p:txBody>
-      </p:sp>
-      <p:sp>
-        <p:nvSpPr>
-          <p:cNvPr id="18" name="Text 16"/>
-          <p:cNvSpPr/>
-          <p:nvPr/>
-        </p:nvSpPr>
-        <p:spPr>
-          <a:xfrm>
-            <a:off x="548640" y="5559552"/>
-            <a:ext cx="8229600" cy="201168"/>
-          </a:xfrm>
-          <a:prstGeom prst="rect">
-            <a:avLst/>
-          </a:prstGeom>
-          <a:noFill/>
-          <a:ln/>
-        </p:spPr>
-        <p:txBody>
-          <a:bodyPr wrap="square" lIns="0" tIns="0" rIns="0" bIns="0" rtlCol="0" anchor="ctr"/>
-          <a:lstStyle/>
-          <a:p>
-            <a:pPr algn="l" indent="0" marL="0">
-              <a:buNone/>
-            </a:pPr>
-            <a:r>
-              <a:rPr lang="en-US" sz="950" i="1" dirty="0">
-                <a:solidFill>
-                  <a:srgbClr val="9CA3AF"/>
-                </a:solidFill>
-                <a:latin typeface="Calibri" pitchFamily="34" charset="0"/>
-                <a:ea typeface="Calibri" pitchFamily="34" charset="-122"/>
-                <a:cs typeface="Calibri" pitchFamily="34" charset="-120"/>
-              </a:rPr>
-              <a:t>Keep the three prompts from the previous slide in your personal CLAUDE.md — discipline is what travels with you.</a:t>
-            </a:r>
-            <a:endParaRPr lang="en-US" sz="950" dirty="0"/>
           </a:p>
         </p:txBody>
       </p:sp>
@@ -17630,7 +18121,7 @@
                 <a:ea typeface="Calibri" pitchFamily="34" charset="-122"/>
                 <a:cs typeface="Calibri" pitchFamily="34" charset="-120"/>
               </a:rPr>
-              <a:t>TAKEAWAY</a:t>
+              <a:t>SAFETY NET</a:t>
             </a:r>
             <a:endParaRPr lang="en-US" sz="1000" dirty="0"/>
           </a:p>
@@ -17669,7 +18160,7 @@
                 <a:ea typeface="Calibri" pitchFamily="34" charset="-122"/>
                 <a:cs typeface="Calibri" pitchFamily="34" charset="-120"/>
               </a:rPr>
-              <a:t>這週記住三件事</a:t>
+              <a:t>你不是一個人在防範這些</a:t>
             </a:r>
             <a:endParaRPr lang="en-US" sz="3000" dirty="0"/>
           </a:p>
@@ -17708,7 +18199,7 @@
                 <a:ea typeface="Calibri" pitchFamily="34" charset="-122"/>
                 <a:cs typeface="Calibri" pitchFamily="34" charset="-120"/>
               </a:rPr>
-              <a:t>Three things to remember from Week 2</a:t>
+              <a:t>You're not defending alone</a:t>
             </a:r>
             <a:endParaRPr lang="en-US" sz="1400" dirty="0"/>
           </a:p>
@@ -17716,14 +18207,158 @@
       </p:sp>
       <p:sp>
         <p:nvSpPr>
-          <p:cNvPr id="5" name="Text 3"/>
-          <p:cNvSpPr/>
-          <p:nvPr/>
-        </p:nvSpPr>
-        <p:spPr>
-          <a:xfrm>
-            <a:off x="548640" y="1965960"/>
-            <a:ext cx="1097280" cy="914400"/>
+          <p:cNvPr id="5" name="Shape 3"/>
+          <p:cNvSpPr/>
+          <p:nvPr/>
+        </p:nvSpPr>
+        <p:spPr>
+          <a:xfrm>
+            <a:off x="548640" y="1783080"/>
+            <a:ext cx="8229600" cy="1554480"/>
+          </a:xfrm>
+          <a:prstGeom prst="roundRect">
+            <a:avLst>
+              <a:gd name="adj" fmla="val 4706"/>
+            </a:avLst>
+          </a:prstGeom>
+          <a:solidFill>
+            <a:srgbClr val="ECFDF5"/>
+          </a:solidFill>
+          <a:ln w="12700">
+            <a:solidFill>
+              <a:srgbClr val="10B981"/>
+            </a:solidFill>
+            <a:prstDash val="solid"/>
+          </a:ln>
+        </p:spPr>
+      </p:sp>
+      <p:sp>
+        <p:nvSpPr>
+          <p:cNvPr id="6" name="Text 4"/>
+          <p:cNvSpPr/>
+          <p:nvPr/>
+        </p:nvSpPr>
+        <p:spPr>
+          <a:xfrm>
+            <a:off x="777240" y="1965960"/>
+            <a:ext cx="1097280" cy="1097280"/>
+          </a:xfrm>
+          <a:prstGeom prst="rect">
+            <a:avLst/>
+          </a:prstGeom>
+          <a:noFill/>
+          <a:ln/>
+        </p:spPr>
+        <p:txBody>
+          <a:bodyPr wrap="square" lIns="0" tIns="0" rIns="0" bIns="0" rtlCol="0" anchor="ctr"/>
+          <a:lstStyle/>
+          <a:p>
+            <a:pPr algn="ctr" indent="0" marL="0">
+              <a:buNone/>
+            </a:pPr>
+            <a:r>
+              <a:rPr lang="en-US" sz="6000" dirty="0">
+                <a:solidFill>
+                  <a:srgbClr val="000000"/>
+                </a:solidFill>
+                <a:latin typeface="Calibri" pitchFamily="34" charset="0"/>
+                <a:ea typeface="Calibri" pitchFamily="34" charset="-122"/>
+                <a:cs typeface="Calibri" pitchFamily="34" charset="-120"/>
+              </a:rPr>
+              <a:t>🛡️</a:t>
+            </a:r>
+            <a:endParaRPr lang="en-US" sz="6000" dirty="0"/>
+          </a:p>
+        </p:txBody>
+      </p:sp>
+      <p:sp>
+        <p:nvSpPr>
+          <p:cNvPr id="7" name="Text 5"/>
+          <p:cNvSpPr/>
+          <p:nvPr/>
+        </p:nvSpPr>
+        <p:spPr>
+          <a:xfrm>
+            <a:off x="2011680" y="1965960"/>
+            <a:ext cx="6583680" cy="365760"/>
+          </a:xfrm>
+          <a:prstGeom prst="rect">
+            <a:avLst/>
+          </a:prstGeom>
+          <a:noFill/>
+          <a:ln/>
+        </p:spPr>
+        <p:txBody>
+          <a:bodyPr wrap="square" lIns="0" tIns="0" rIns="0" bIns="0" rtlCol="0" anchor="ctr"/>
+          <a:lstStyle/>
+          <a:p>
+            <a:pPr algn="l" indent="0" marL="0">
+              <a:buNone/>
+            </a:pPr>
+            <a:r>
+              <a:rPr lang="en-US" sz="1800" b="1" dirty="0">
+                <a:solidFill>
+                  <a:srgbClr val="065F46"/>
+                </a:solidFill>
+                <a:latin typeface="Calibri" pitchFamily="34" charset="0"/>
+                <a:ea typeface="Calibri" pitchFamily="34" charset="-122"/>
+                <a:cs typeface="Calibri" pitchFamily="34" charset="-120"/>
+              </a:rPr>
+              <a:t>Michael 已經在這個 repo 裡寫了 git hooks</a:t>
+            </a:r>
+            <a:endParaRPr lang="en-US" sz="1800" dirty="0"/>
+          </a:p>
+        </p:txBody>
+      </p:sp>
+      <p:sp>
+        <p:nvSpPr>
+          <p:cNvPr id="8" name="Text 6"/>
+          <p:cNvSpPr/>
+          <p:nvPr/>
+        </p:nvSpPr>
+        <p:spPr>
+          <a:xfrm>
+            <a:off x="2011680" y="2331720"/>
+            <a:ext cx="6583680" cy="256032"/>
+          </a:xfrm>
+          <a:prstGeom prst="rect">
+            <a:avLst/>
+          </a:prstGeom>
+          <a:noFill/>
+          <a:ln/>
+        </p:spPr>
+        <p:txBody>
+          <a:bodyPr wrap="square" lIns="0" tIns="0" rIns="0" bIns="0" rtlCol="0" anchor="ctr"/>
+          <a:lstStyle/>
+          <a:p>
+            <a:pPr algn="l" indent="0" marL="0">
+              <a:buNone/>
+            </a:pPr>
+            <a:r>
+              <a:rPr lang="en-US" sz="1200" i="1" dirty="0">
+                <a:solidFill>
+                  <a:srgbClr val="047857"/>
+                </a:solidFill>
+                <a:latin typeface="Calibri" pitchFamily="34" charset="0"/>
+                <a:ea typeface="Calibri" pitchFamily="34" charset="-122"/>
+                <a:cs typeface="Calibri" pitchFamily="34" charset="-120"/>
+              </a:rPr>
+              <a:t>Michael set up git hooks for this repo</a:t>
+            </a:r>
+            <a:endParaRPr lang="en-US" sz="1200" dirty="0"/>
+          </a:p>
+        </p:txBody>
+      </p:sp>
+      <p:sp>
+        <p:nvSpPr>
+          <p:cNvPr id="9" name="Text 7"/>
+          <p:cNvSpPr/>
+          <p:nvPr/>
+        </p:nvSpPr>
+        <p:spPr>
+          <a:xfrm>
+            <a:off x="2011680" y="2697480"/>
+            <a:ext cx="6583680" cy="365760"/>
           </a:xfrm>
           <a:prstGeom prst="rect">
             <a:avLst/>
@@ -17739,46 +18374,293 @@
               <a:buNone/>
             </a:pPr>
             <a:r>
-              <a:rPr lang="en-US" sz="5600" b="1" dirty="0">
-                <a:solidFill>
-                  <a:srgbClr val="1A66FF"/>
-                </a:solidFill>
-                <a:latin typeface="Calibri" pitchFamily="34" charset="0"/>
-                <a:ea typeface="Calibri" pitchFamily="34" charset="-122"/>
-                <a:cs typeface="Calibri" pitchFamily="34" charset="-120"/>
-              </a:rPr>
-              <a:t>01</a:t>
-            </a:r>
-            <a:endParaRPr lang="en-US" sz="5600" dirty="0"/>
-          </a:p>
-        </p:txBody>
-      </p:sp>
-      <p:sp>
-        <p:nvSpPr>
-          <p:cNvPr id="6" name="Text 4"/>
-          <p:cNvSpPr/>
-          <p:nvPr/>
-        </p:nvSpPr>
-        <p:spPr>
-          <a:xfrm>
-            <a:off x="1783080" y="2011680"/>
-            <a:ext cx="6949440" cy="329184"/>
-          </a:xfrm>
-          <a:prstGeom prst="rect">
-            <a:avLst/>
-          </a:prstGeom>
-          <a:noFill/>
-          <a:ln/>
-        </p:spPr>
-        <p:txBody>
-          <a:bodyPr wrap="square" lIns="0" tIns="0" rIns="0" bIns="0" rtlCol="0" anchor="ctr"/>
-          <a:lstStyle/>
-          <a:p>
-            <a:pPr algn="l" indent="0" marL="0">
-              <a:buNone/>
-            </a:pPr>
-            <a:r>
-              <a:rPr lang="en-US" sz="1600" b="1" dirty="0">
+              <a:rPr lang="en-US" sz="1200" dirty="0">
+                <a:solidFill>
+                  <a:srgbClr val="065F46"/>
+                </a:solidFill>
+                <a:latin typeface="Calibri" pitchFamily="34" charset="0"/>
+                <a:ea typeface="Calibri" pitchFamily="34" charset="-122"/>
+                <a:cs typeface="Calibri" pitchFamily="34" charset="-120"/>
+              </a:rPr>
+              <a:t>AI 想做剛才提的那些危險操作（force push、git add . 全部、commit 含 secret⋯）會被自動擋下，不用擔心一不小心犯錯。</a:t>
+            </a:r>
+            <a:endParaRPr lang="en-US" sz="1200" dirty="0"/>
+          </a:p>
+        </p:txBody>
+      </p:sp>
+      <p:sp>
+        <p:nvSpPr>
+          <p:cNvPr id="10" name="Text 8"/>
+          <p:cNvSpPr/>
+          <p:nvPr/>
+        </p:nvSpPr>
+        <p:spPr>
+          <a:xfrm>
+            <a:off x="2011680" y="3035808"/>
+            <a:ext cx="6583680" cy="274320"/>
+          </a:xfrm>
+          <a:prstGeom prst="rect">
+            <a:avLst/>
+          </a:prstGeom>
+          <a:noFill/>
+          <a:ln/>
+        </p:spPr>
+        <p:txBody>
+          <a:bodyPr wrap="square" lIns="0" tIns="0" rIns="0" bIns="0" rtlCol="0" anchor="t"/>
+          <a:lstStyle/>
+          <a:p>
+            <a:pPr algn="l" indent="0" marL="0">
+              <a:buNone/>
+            </a:pPr>
+            <a:r>
+              <a:rPr lang="en-US" sz="1000" i="1" dirty="0">
+                <a:solidFill>
+                  <a:srgbClr val="047857"/>
+                </a:solidFill>
+                <a:latin typeface="Calibri" pitchFamily="34" charset="0"/>
+                <a:ea typeface="Calibri" pitchFamily="34" charset="-122"/>
+                <a:cs typeface="Calibri" pitchFamily="34" charset="-120"/>
+              </a:rPr>
+              <a:t>Hooks block AI from running the dangerous operations we just talked about — you can't accidentally break things.</a:t>
+            </a:r>
+            <a:endParaRPr lang="en-US" sz="1000" dirty="0"/>
+          </a:p>
+        </p:txBody>
+      </p:sp>
+      <p:sp>
+        <p:nvSpPr>
+          <p:cNvPr id="11" name="Shape 9"/>
+          <p:cNvSpPr/>
+          <p:nvPr/>
+        </p:nvSpPr>
+        <p:spPr>
+          <a:xfrm>
+            <a:off x="548640" y="3611880"/>
+            <a:ext cx="8229600" cy="1417320"/>
+          </a:xfrm>
+          <a:prstGeom prst="roundRect">
+            <a:avLst>
+              <a:gd name="adj" fmla="val 3871"/>
+            </a:avLst>
+          </a:prstGeom>
+          <a:solidFill>
+            <a:srgbClr val="FEF3C7"/>
+          </a:solidFill>
+          <a:ln w="12700">
+            <a:solidFill>
+              <a:srgbClr val="FEF3C7"/>
+            </a:solidFill>
+            <a:prstDash val="solid"/>
+          </a:ln>
+        </p:spPr>
+      </p:sp>
+      <p:sp>
+        <p:nvSpPr>
+          <p:cNvPr id="12" name="Shape 10"/>
+          <p:cNvSpPr/>
+          <p:nvPr/>
+        </p:nvSpPr>
+        <p:spPr>
+          <a:xfrm>
+            <a:off x="548640" y="3611880"/>
+            <a:ext cx="54864" cy="1417320"/>
+          </a:xfrm>
+          <a:prstGeom prst="rect">
+            <a:avLst/>
+          </a:prstGeom>
+          <a:solidFill>
+            <a:srgbClr val="D97706"/>
+          </a:solidFill>
+          <a:ln w="12700">
+            <a:solidFill>
+              <a:srgbClr val="D97706"/>
+            </a:solidFill>
+            <a:prstDash val="solid"/>
+          </a:ln>
+        </p:spPr>
+      </p:sp>
+      <p:sp>
+        <p:nvSpPr>
+          <p:cNvPr id="13" name="Text 11"/>
+          <p:cNvSpPr/>
+          <p:nvPr/>
+        </p:nvSpPr>
+        <p:spPr>
+          <a:xfrm>
+            <a:off x="777240" y="3703320"/>
+            <a:ext cx="7863840" cy="320040"/>
+          </a:xfrm>
+          <a:prstGeom prst="rect">
+            <a:avLst/>
+          </a:prstGeom>
+          <a:noFill/>
+          <a:ln/>
+        </p:spPr>
+        <p:txBody>
+          <a:bodyPr wrap="square" lIns="0" tIns="0" rIns="0" bIns="0" rtlCol="0" anchor="ctr"/>
+          <a:lstStyle/>
+          <a:p>
+            <a:pPr algn="l" indent="0" marL="0">
+              <a:buNone/>
+            </a:pPr>
+            <a:r>
+              <a:rPr lang="en-US" sz="1400" b="1" dirty="0">
+                <a:solidFill>
+                  <a:srgbClr val="78350F"/>
+                </a:solidFill>
+                <a:latin typeface="Calibri" pitchFamily="34" charset="0"/>
+                <a:ea typeface="Calibri" pitchFamily="34" charset="-122"/>
+                <a:cs typeface="Calibri" pitchFamily="34" charset="-120"/>
+              </a:rPr>
+              <a:t>⚠️  但是 — 這層保護只在這個 repo 裡有效</a:t>
+            </a:r>
+            <a:endParaRPr lang="en-US" sz="1400" dirty="0"/>
+          </a:p>
+        </p:txBody>
+      </p:sp>
+      <p:sp>
+        <p:nvSpPr>
+          <p:cNvPr id="14" name="Text 12"/>
+          <p:cNvSpPr/>
+          <p:nvPr/>
+        </p:nvSpPr>
+        <p:spPr>
+          <a:xfrm>
+            <a:off x="777240" y="4023360"/>
+            <a:ext cx="7863840" cy="237744"/>
+          </a:xfrm>
+          <a:prstGeom prst="rect">
+            <a:avLst/>
+          </a:prstGeom>
+          <a:noFill/>
+          <a:ln/>
+        </p:spPr>
+        <p:txBody>
+          <a:bodyPr wrap="square" lIns="0" tIns="0" rIns="0" bIns="0" rtlCol="0" anchor="ctr"/>
+          <a:lstStyle/>
+          <a:p>
+            <a:pPr algn="l" indent="0" marL="0">
+              <a:buNone/>
+            </a:pPr>
+            <a:r>
+              <a:rPr lang="en-US" sz="1050" i="1" dirty="0">
+                <a:solidFill>
+                  <a:srgbClr val="92400E"/>
+                </a:solidFill>
+                <a:latin typeface="Calibri" pitchFamily="34" charset="0"/>
+                <a:ea typeface="Calibri" pitchFamily="34" charset="-122"/>
+                <a:cs typeface="Calibri" pitchFamily="34" charset="-120"/>
+              </a:rPr>
+              <a:t>This safety net only applies inside this repo</a:t>
+            </a:r>
+            <a:endParaRPr lang="en-US" sz="1050" dirty="0"/>
+          </a:p>
+        </p:txBody>
+      </p:sp>
+      <p:sp>
+        <p:nvSpPr>
+          <p:cNvPr id="15" name="Text 13"/>
+          <p:cNvSpPr/>
+          <p:nvPr/>
+        </p:nvSpPr>
+        <p:spPr>
+          <a:xfrm>
+            <a:off x="777240" y="4370832"/>
+            <a:ext cx="7863840" cy="292608"/>
+          </a:xfrm>
+          <a:prstGeom prst="rect">
+            <a:avLst/>
+          </a:prstGeom>
+          <a:noFill/>
+          <a:ln/>
+        </p:spPr>
+        <p:txBody>
+          <a:bodyPr wrap="square" lIns="0" tIns="0" rIns="0" bIns="0" rtlCol="0" anchor="ctr"/>
+          <a:lstStyle/>
+          <a:p>
+            <a:pPr algn="l" indent="0" marL="0">
+              <a:buNone/>
+            </a:pPr>
+            <a:r>
+              <a:rPr lang="en-US" sz="1200" dirty="0">
+                <a:solidFill>
+                  <a:srgbClr val="78350F"/>
+                </a:solidFill>
+                <a:latin typeface="Calibri" pitchFamily="34" charset="0"/>
+                <a:ea typeface="Calibri" pitchFamily="34" charset="-122"/>
+                <a:cs typeface="Calibri" pitchFamily="34" charset="-120"/>
+              </a:rPr>
+              <a:t>離開這個 repo（你的個人專案、其他 team 的 repo）就沒有這套防呆。</a:t>
+            </a:r>
+            <a:endParaRPr lang="en-US" sz="1200" dirty="0"/>
+          </a:p>
+        </p:txBody>
+      </p:sp>
+      <p:sp>
+        <p:nvSpPr>
+          <p:cNvPr id="16" name="Text 14"/>
+          <p:cNvSpPr/>
+          <p:nvPr/>
+        </p:nvSpPr>
+        <p:spPr>
+          <a:xfrm>
+            <a:off x="777240" y="4690872"/>
+            <a:ext cx="7863840" cy="256032"/>
+          </a:xfrm>
+          <a:prstGeom prst="rect">
+            <a:avLst/>
+          </a:prstGeom>
+          <a:noFill/>
+          <a:ln/>
+        </p:spPr>
+        <p:txBody>
+          <a:bodyPr wrap="square" lIns="0" tIns="0" rIns="0" bIns="0" rtlCol="0" anchor="ctr"/>
+          <a:lstStyle/>
+          <a:p>
+            <a:pPr algn="l" indent="0" marL="0">
+              <a:buNone/>
+            </a:pPr>
+            <a:r>
+              <a:rPr lang="en-US" sz="1000" i="1" dirty="0">
+                <a:solidFill>
+                  <a:srgbClr val="92400E"/>
+                </a:solidFill>
+                <a:latin typeface="Calibri" pitchFamily="34" charset="0"/>
+                <a:ea typeface="Calibri" pitchFamily="34" charset="-122"/>
+                <a:cs typeface="Calibri" pitchFamily="34" charset="-120"/>
+              </a:rPr>
+              <a:t>Outside this repo (your own projects, other teams' repos), there's no safety net.</a:t>
+            </a:r>
+            <a:endParaRPr lang="en-US" sz="1000" dirty="0"/>
+          </a:p>
+        </p:txBody>
+      </p:sp>
+      <p:sp>
+        <p:nvSpPr>
+          <p:cNvPr id="17" name="Text 15"/>
+          <p:cNvSpPr/>
+          <p:nvPr/>
+        </p:nvSpPr>
+        <p:spPr>
+          <a:xfrm>
+            <a:off x="548640" y="5285232"/>
+            <a:ext cx="8229600" cy="274320"/>
+          </a:xfrm>
+          <a:prstGeom prst="rect">
+            <a:avLst/>
+          </a:prstGeom>
+          <a:noFill/>
+          <a:ln/>
+        </p:spPr>
+        <p:txBody>
+          <a:bodyPr wrap="square" lIns="0" tIns="0" rIns="0" bIns="0" rtlCol="0" anchor="ctr"/>
+          <a:lstStyle/>
+          <a:p>
+            <a:pPr algn="l" indent="0" marL="0">
+              <a:buNone/>
+            </a:pPr>
+            <a:r>
+              <a:rPr lang="en-US" sz="1150" b="1" dirty="0">
                 <a:solidFill>
                   <a:srgbClr val="111827"/>
                 </a:solidFill>
@@ -17786,438 +18668,9 @@
                 <a:ea typeface="Calibri" pitchFamily="34" charset="-122"/>
                 <a:cs typeface="Calibri" pitchFamily="34" charset="-120"/>
               </a:rPr>
-              <a:t>個人工作也要用 repo 管理</a:t>
-            </a:r>
-            <a:endParaRPr lang="en-US" sz="1600" dirty="0"/>
-          </a:p>
-        </p:txBody>
-      </p:sp>
-      <p:sp>
-        <p:nvSpPr>
-          <p:cNvPr id="7" name="Text 5"/>
-          <p:cNvSpPr/>
-          <p:nvPr/>
-        </p:nvSpPr>
-        <p:spPr>
-          <a:xfrm>
-            <a:off x="1783080" y="2331720"/>
-            <a:ext cx="6949440" cy="237744"/>
-          </a:xfrm>
-          <a:prstGeom prst="rect">
-            <a:avLst/>
-          </a:prstGeom>
-          <a:noFill/>
-          <a:ln/>
-        </p:spPr>
-        <p:txBody>
-          <a:bodyPr wrap="square" lIns="0" tIns="0" rIns="0" bIns="0" rtlCol="0" anchor="ctr"/>
-          <a:lstStyle/>
-          <a:p>
-            <a:pPr algn="l" indent="0" marL="0">
-              <a:buNone/>
-            </a:pPr>
-            <a:r>
-              <a:rPr lang="en-US" sz="1100" dirty="0">
-                <a:solidFill>
-                  <a:srgbClr val="6B7280"/>
-                </a:solidFill>
-                <a:latin typeface="Calibri" pitchFamily="34" charset="0"/>
-                <a:ea typeface="Calibri" pitchFamily="34" charset="-122"/>
-                <a:cs typeface="Calibri" pitchFamily="34" charset="-120"/>
-              </a:rPr>
-              <a:t>Use a repo for personal work too</a:t>
-            </a:r>
-            <a:endParaRPr lang="en-US" sz="1100" dirty="0"/>
-          </a:p>
-        </p:txBody>
-      </p:sp>
-      <p:sp>
-        <p:nvSpPr>
-          <p:cNvPr id="8" name="Text 6"/>
-          <p:cNvSpPr/>
-          <p:nvPr/>
-        </p:nvSpPr>
-        <p:spPr>
-          <a:xfrm>
-            <a:off x="1783080" y="2606040"/>
-            <a:ext cx="6949440" cy="292608"/>
-          </a:xfrm>
-          <a:prstGeom prst="rect">
-            <a:avLst/>
-          </a:prstGeom>
-          <a:noFill/>
-          <a:ln/>
-        </p:spPr>
-        <p:txBody>
-          <a:bodyPr wrap="square" lIns="0" tIns="0" rIns="0" bIns="0" rtlCol="0" anchor="t"/>
-          <a:lstStyle/>
-          <a:p>
-            <a:pPr algn="l" indent="0" marL="0">
-              <a:buNone/>
-            </a:pPr>
-            <a:r>
-              <a:rPr lang="en-US" sz="1100" dirty="0">
-                <a:solidFill>
-                  <a:srgbClr val="374151"/>
-                </a:solidFill>
-                <a:latin typeface="Calibri" pitchFamily="34" charset="0"/>
-                <a:ea typeface="Calibri" pitchFamily="34" charset="-122"/>
-                <a:cs typeface="Calibri" pitchFamily="34" charset="-120"/>
-              </a:rPr>
-              <a:t>不要只存在本機——電腦壞了、檔案誤刪就沒了。建立 personal repo，push 到 GitHub 當備份。</a:t>
-            </a:r>
-            <a:endParaRPr lang="en-US" sz="1100" dirty="0"/>
-          </a:p>
-        </p:txBody>
-      </p:sp>
-      <p:sp>
-        <p:nvSpPr>
-          <p:cNvPr id="9" name="Text 7"/>
-          <p:cNvSpPr/>
-          <p:nvPr/>
-        </p:nvSpPr>
-        <p:spPr>
-          <a:xfrm>
-            <a:off x="1783080" y="2880360"/>
-            <a:ext cx="6949440" cy="256032"/>
-          </a:xfrm>
-          <a:prstGeom prst="rect">
-            <a:avLst/>
-          </a:prstGeom>
-          <a:noFill/>
-          <a:ln/>
-        </p:spPr>
-        <p:txBody>
-          <a:bodyPr wrap="square" lIns="0" tIns="0" rIns="0" bIns="0" rtlCol="0" anchor="t"/>
-          <a:lstStyle/>
-          <a:p>
-            <a:pPr algn="l" indent="0" marL="0">
-              <a:buNone/>
-            </a:pPr>
-            <a:r>
-              <a:rPr lang="en-US" sz="1000" dirty="0">
-                <a:solidFill>
-                  <a:srgbClr val="6B7280"/>
-                </a:solidFill>
-                <a:latin typeface="Calibri" pitchFamily="34" charset="0"/>
-                <a:ea typeface="Calibri" pitchFamily="34" charset="-122"/>
-                <a:cs typeface="Calibri" pitchFamily="34" charset="-120"/>
-              </a:rPr>
-              <a:t>Don't rely on local-only files. Create a personal repo and push to GitHub as backup.</a:t>
-            </a:r>
-            <a:endParaRPr lang="en-US" sz="1000" dirty="0"/>
-          </a:p>
-        </p:txBody>
-      </p:sp>
-      <p:sp>
-        <p:nvSpPr>
-          <p:cNvPr id="10" name="Text 8"/>
-          <p:cNvSpPr/>
-          <p:nvPr/>
-        </p:nvSpPr>
-        <p:spPr>
-          <a:xfrm>
-            <a:off x="548640" y="3063240"/>
-            <a:ext cx="1097280" cy="914400"/>
-          </a:xfrm>
-          <a:prstGeom prst="rect">
-            <a:avLst/>
-          </a:prstGeom>
-          <a:noFill/>
-          <a:ln/>
-        </p:spPr>
-        <p:txBody>
-          <a:bodyPr wrap="square" lIns="0" tIns="0" rIns="0" bIns="0" rtlCol="0" anchor="t"/>
-          <a:lstStyle/>
-          <a:p>
-            <a:pPr algn="l" indent="0" marL="0">
-              <a:buNone/>
-            </a:pPr>
-            <a:r>
-              <a:rPr lang="en-US" sz="5600" b="1" dirty="0">
-                <a:solidFill>
-                  <a:srgbClr val="1A66FF"/>
-                </a:solidFill>
-                <a:latin typeface="Calibri" pitchFamily="34" charset="0"/>
-                <a:ea typeface="Calibri" pitchFamily="34" charset="-122"/>
-                <a:cs typeface="Calibri" pitchFamily="34" charset="-120"/>
-              </a:rPr>
-              <a:t>02</a:t>
-            </a:r>
-            <a:endParaRPr lang="en-US" sz="5600" dirty="0"/>
-          </a:p>
-        </p:txBody>
-      </p:sp>
-      <p:sp>
-        <p:nvSpPr>
-          <p:cNvPr id="11" name="Text 9"/>
-          <p:cNvSpPr/>
-          <p:nvPr/>
-        </p:nvSpPr>
-        <p:spPr>
-          <a:xfrm>
-            <a:off x="1783080" y="3108960"/>
-            <a:ext cx="6949440" cy="329184"/>
-          </a:xfrm>
-          <a:prstGeom prst="rect">
-            <a:avLst/>
-          </a:prstGeom>
-          <a:noFill/>
-          <a:ln/>
-        </p:spPr>
-        <p:txBody>
-          <a:bodyPr wrap="square" lIns="0" tIns="0" rIns="0" bIns="0" rtlCol="0" anchor="ctr"/>
-          <a:lstStyle/>
-          <a:p>
-            <a:pPr algn="l" indent="0" marL="0">
-              <a:buNone/>
-            </a:pPr>
-            <a:r>
-              <a:rPr lang="en-US" sz="1600" b="1" dirty="0">
-                <a:solidFill>
-                  <a:srgbClr val="111827"/>
-                </a:solidFill>
-                <a:latin typeface="Calibri" pitchFamily="34" charset="0"/>
-                <a:ea typeface="Calibri" pitchFamily="34" charset="-122"/>
-                <a:cs typeface="Calibri" pitchFamily="34" charset="-120"/>
-              </a:rPr>
-              <a:t>在 personal repo 練習 branch</a:t>
-            </a:r>
-            <a:endParaRPr lang="en-US" sz="1600" dirty="0"/>
-          </a:p>
-        </p:txBody>
-      </p:sp>
-      <p:sp>
-        <p:nvSpPr>
-          <p:cNvPr id="12" name="Text 10"/>
-          <p:cNvSpPr/>
-          <p:nvPr/>
-        </p:nvSpPr>
-        <p:spPr>
-          <a:xfrm>
-            <a:off x="1783080" y="3429000"/>
-            <a:ext cx="6949440" cy="237744"/>
-          </a:xfrm>
-          <a:prstGeom prst="rect">
-            <a:avLst/>
-          </a:prstGeom>
-          <a:noFill/>
-          <a:ln/>
-        </p:spPr>
-        <p:txBody>
-          <a:bodyPr wrap="square" lIns="0" tIns="0" rIns="0" bIns="0" rtlCol="0" anchor="ctr"/>
-          <a:lstStyle/>
-          <a:p>
-            <a:pPr algn="l" indent="0" marL="0">
-              <a:buNone/>
-            </a:pPr>
-            <a:r>
-              <a:rPr lang="en-US" sz="1100" dirty="0">
-                <a:solidFill>
-                  <a:srgbClr val="6B7280"/>
-                </a:solidFill>
-                <a:latin typeface="Calibri" pitchFamily="34" charset="0"/>
-                <a:ea typeface="Calibri" pitchFamily="34" charset="-122"/>
-                <a:cs typeface="Calibri" pitchFamily="34" charset="-120"/>
-              </a:rPr>
-              <a:t>Practice branching in your personal repo</a:t>
-            </a:r>
-            <a:endParaRPr lang="en-US" sz="1100" dirty="0"/>
-          </a:p>
-        </p:txBody>
-      </p:sp>
-      <p:sp>
-        <p:nvSpPr>
-          <p:cNvPr id="13" name="Text 11"/>
-          <p:cNvSpPr/>
-          <p:nvPr/>
-        </p:nvSpPr>
-        <p:spPr>
-          <a:xfrm>
-            <a:off x="1783080" y="3703320"/>
-            <a:ext cx="6949440" cy="292608"/>
-          </a:xfrm>
-          <a:prstGeom prst="rect">
-            <a:avLst/>
-          </a:prstGeom>
-          <a:noFill/>
-          <a:ln/>
-        </p:spPr>
-        <p:txBody>
-          <a:bodyPr wrap="square" lIns="0" tIns="0" rIns="0" bIns="0" rtlCol="0" anchor="t"/>
-          <a:lstStyle/>
-          <a:p>
-            <a:pPr algn="l" indent="0" marL="0">
-              <a:buNone/>
-            </a:pPr>
-            <a:r>
-              <a:rPr lang="en-US" sz="1100" dirty="0">
-                <a:solidFill>
-                  <a:srgbClr val="374151"/>
-                </a:solidFill>
-                <a:latin typeface="Calibri" pitchFamily="34" charset="0"/>
-                <a:ea typeface="Calibri" pitchFamily="34" charset="-122"/>
-                <a:cs typeface="Calibri" pitchFamily="34" charset="-120"/>
-              </a:rPr>
-              <a:t>個人 repo 最自由，怎麼玩都不影響別人。熟悉「開 branch → commit → merge」的流程。</a:t>
-            </a:r>
-            <a:endParaRPr lang="en-US" sz="1100" dirty="0"/>
-          </a:p>
-        </p:txBody>
-      </p:sp>
-      <p:sp>
-        <p:nvSpPr>
-          <p:cNvPr id="14" name="Text 12"/>
-          <p:cNvSpPr/>
-          <p:nvPr/>
-        </p:nvSpPr>
-        <p:spPr>
-          <a:xfrm>
-            <a:off x="1783080" y="3977640"/>
-            <a:ext cx="6949440" cy="256032"/>
-          </a:xfrm>
-          <a:prstGeom prst="rect">
-            <a:avLst/>
-          </a:prstGeom>
-          <a:noFill/>
-          <a:ln/>
-        </p:spPr>
-        <p:txBody>
-          <a:bodyPr wrap="square" lIns="0" tIns="0" rIns="0" bIns="0" rtlCol="0" anchor="t"/>
-          <a:lstStyle/>
-          <a:p>
-            <a:pPr algn="l" indent="0" marL="0">
-              <a:buNone/>
-            </a:pPr>
-            <a:r>
-              <a:rPr lang="en-US" sz="1000" dirty="0">
-                <a:solidFill>
-                  <a:srgbClr val="6B7280"/>
-                </a:solidFill>
-                <a:latin typeface="Calibri" pitchFamily="34" charset="0"/>
-                <a:ea typeface="Calibri" pitchFamily="34" charset="-122"/>
-                <a:cs typeface="Calibri" pitchFamily="34" charset="-120"/>
-              </a:rPr>
-              <a:t>Personal repos are the safest playground — master branch → commit → merge before team work.</a:t>
-            </a:r>
-            <a:endParaRPr lang="en-US" sz="1000" dirty="0"/>
-          </a:p>
-        </p:txBody>
-      </p:sp>
-      <p:sp>
-        <p:nvSpPr>
-          <p:cNvPr id="15" name="Text 13"/>
-          <p:cNvSpPr/>
-          <p:nvPr/>
-        </p:nvSpPr>
-        <p:spPr>
-          <a:xfrm>
-            <a:off x="548640" y="4160520"/>
-            <a:ext cx="1097280" cy="914400"/>
-          </a:xfrm>
-          <a:prstGeom prst="rect">
-            <a:avLst/>
-          </a:prstGeom>
-          <a:noFill/>
-          <a:ln/>
-        </p:spPr>
-        <p:txBody>
-          <a:bodyPr wrap="square" lIns="0" tIns="0" rIns="0" bIns="0" rtlCol="0" anchor="t"/>
-          <a:lstStyle/>
-          <a:p>
-            <a:pPr algn="l" indent="0" marL="0">
-              <a:buNone/>
-            </a:pPr>
-            <a:r>
-              <a:rPr lang="en-US" sz="5600" b="1" dirty="0">
-                <a:solidFill>
-                  <a:srgbClr val="1A66FF"/>
-                </a:solidFill>
-                <a:latin typeface="Calibri" pitchFamily="34" charset="0"/>
-                <a:ea typeface="Calibri" pitchFamily="34" charset="-122"/>
-                <a:cs typeface="Calibri" pitchFamily="34" charset="-120"/>
-              </a:rPr>
-              <a:t>03</a:t>
-            </a:r>
-            <a:endParaRPr lang="en-US" sz="5600" dirty="0"/>
-          </a:p>
-        </p:txBody>
-      </p:sp>
-      <p:sp>
-        <p:nvSpPr>
-          <p:cNvPr id="16" name="Text 14"/>
-          <p:cNvSpPr/>
-          <p:nvPr/>
-        </p:nvSpPr>
-        <p:spPr>
-          <a:xfrm>
-            <a:off x="1783080" y="4206240"/>
-            <a:ext cx="6949440" cy="329184"/>
-          </a:xfrm>
-          <a:prstGeom prst="rect">
-            <a:avLst/>
-          </a:prstGeom>
-          <a:noFill/>
-          <a:ln/>
-        </p:spPr>
-        <p:txBody>
-          <a:bodyPr wrap="square" lIns="0" tIns="0" rIns="0" bIns="0" rtlCol="0" anchor="ctr"/>
-          <a:lstStyle/>
-          <a:p>
-            <a:pPr algn="l" indent="0" marL="0">
-              <a:buNone/>
-            </a:pPr>
-            <a:r>
-              <a:rPr lang="en-US" sz="1600" b="1" dirty="0">
-                <a:solidFill>
-                  <a:srgbClr val="111827"/>
-                </a:solidFill>
-                <a:latin typeface="Calibri" pitchFamily="34" charset="0"/>
-                <a:ea typeface="Calibri" pitchFamily="34" charset="-122"/>
-                <a:cs typeface="Calibri" pitchFamily="34" charset="-120"/>
-              </a:rPr>
-              <a:t>用資料夾結構分層管理</a:t>
-            </a:r>
-            <a:endParaRPr lang="en-US" sz="1600" dirty="0"/>
-          </a:p>
-        </p:txBody>
-      </p:sp>
-      <p:sp>
-        <p:nvSpPr>
-          <p:cNvPr id="17" name="Text 15"/>
-          <p:cNvSpPr/>
-          <p:nvPr/>
-        </p:nvSpPr>
-        <p:spPr>
-          <a:xfrm>
-            <a:off x="1783080" y="4526280"/>
-            <a:ext cx="6949440" cy="237744"/>
-          </a:xfrm>
-          <a:prstGeom prst="rect">
-            <a:avLst/>
-          </a:prstGeom>
-          <a:noFill/>
-          <a:ln/>
-        </p:spPr>
-        <p:txBody>
-          <a:bodyPr wrap="square" lIns="0" tIns="0" rIns="0" bIns="0" rtlCol="0" anchor="ctr"/>
-          <a:lstStyle/>
-          <a:p>
-            <a:pPr algn="l" indent="0" marL="0">
-              <a:buNone/>
-            </a:pPr>
-            <a:r>
-              <a:rPr lang="en-US" sz="1100" dirty="0">
-                <a:solidFill>
-                  <a:srgbClr val="6B7280"/>
-                </a:solidFill>
-                <a:latin typeface="Calibri" pitchFamily="34" charset="0"/>
-                <a:ea typeface="Calibri" pitchFamily="34" charset="-122"/>
-                <a:cs typeface="Calibri" pitchFamily="34" charset="-120"/>
-              </a:rPr>
-              <a:t>Organize folders in layers</a:t>
-            </a:r>
-            <a:endParaRPr lang="en-US" sz="1100" dirty="0"/>
+              <a:t>→ 養成不對 AI 說「強推」「force」「直接覆蓋」的習慣，離開 repo 也帶得走。</a:t>
+            </a:r>
+            <a:endParaRPr lang="en-US" sz="1150" dirty="0"/>
           </a:p>
         </p:txBody>
       </p:sp>
@@ -18229,73 +18682,34 @@
         </p:nvSpPr>
         <p:spPr>
           <a:xfrm>
-            <a:off x="1783080" y="4800600"/>
-            <a:ext cx="6949440" cy="292608"/>
-          </a:xfrm>
-          <a:prstGeom prst="rect">
-            <a:avLst/>
-          </a:prstGeom>
-          <a:noFill/>
-          <a:ln/>
-        </p:spPr>
-        <p:txBody>
-          <a:bodyPr wrap="square" lIns="0" tIns="0" rIns="0" bIns="0" rtlCol="0" anchor="t"/>
-          <a:lstStyle/>
-          <a:p>
-            <a:pPr algn="l" indent="0" marL="0">
-              <a:buNone/>
-            </a:pPr>
-            <a:r>
-              <a:rPr lang="en-US" sz="1100" dirty="0">
-                <a:solidFill>
-                  <a:srgbClr val="374151"/>
-                </a:solidFill>
-                <a:latin typeface="Calibri" pitchFamily="34" charset="0"/>
-                <a:ea typeface="Calibri" pitchFamily="34" charset="-122"/>
-                <a:cs typeface="Calibri" pitchFamily="34" charset="-120"/>
-              </a:rPr>
-              <a:t>~/work/company/、~/work/personal/，看路徑就知道在哪一層。降低 push 錯 repo 的風險。</a:t>
-            </a:r>
-            <a:endParaRPr lang="en-US" sz="1100" dirty="0"/>
-          </a:p>
-        </p:txBody>
-      </p:sp>
-      <p:sp>
-        <p:nvSpPr>
-          <p:cNvPr id="19" name="Text 17"/>
-          <p:cNvSpPr/>
-          <p:nvPr/>
-        </p:nvSpPr>
-        <p:spPr>
-          <a:xfrm>
-            <a:off x="1783080" y="5074920"/>
-            <a:ext cx="6949440" cy="256032"/>
-          </a:xfrm>
-          <a:prstGeom prst="rect">
-            <a:avLst/>
-          </a:prstGeom>
-          <a:noFill/>
-          <a:ln/>
-        </p:spPr>
-        <p:txBody>
-          <a:bodyPr wrap="square" lIns="0" tIns="0" rIns="0" bIns="0" rtlCol="0" anchor="t"/>
-          <a:lstStyle/>
-          <a:p>
-            <a:pPr algn="l" indent="0" marL="0">
-              <a:buNone/>
-            </a:pPr>
-            <a:r>
-              <a:rPr lang="en-US" sz="1000" dirty="0">
-                <a:solidFill>
-                  <a:srgbClr val="6B7280"/>
-                </a:solidFill>
-                <a:latin typeface="Calibri" pitchFamily="34" charset="0"/>
-                <a:ea typeface="Calibri" pitchFamily="34" charset="-122"/>
-                <a:cs typeface="Calibri" pitchFamily="34" charset="-120"/>
-              </a:rPr>
-              <a:t>~/work/company/ vs ~/work/personal/ — the path alone tells you what layer you're in.</a:t>
-            </a:r>
-            <a:endParaRPr lang="en-US" sz="1000" dirty="0"/>
+            <a:off x="548640" y="5559552"/>
+            <a:ext cx="8229600" cy="201168"/>
+          </a:xfrm>
+          <a:prstGeom prst="rect">
+            <a:avLst/>
+          </a:prstGeom>
+          <a:noFill/>
+          <a:ln/>
+        </p:spPr>
+        <p:txBody>
+          <a:bodyPr wrap="square" lIns="0" tIns="0" rIns="0" bIns="0" rtlCol="0" anchor="ctr"/>
+          <a:lstStyle/>
+          <a:p>
+            <a:pPr algn="l" indent="0" marL="0">
+              <a:buNone/>
+            </a:pPr>
+            <a:r>
+              <a:rPr lang="en-US" sz="950" i="1" dirty="0">
+                <a:solidFill>
+                  <a:srgbClr val="9CA3AF"/>
+                </a:solidFill>
+                <a:latin typeface="Calibri" pitchFamily="34" charset="0"/>
+                <a:ea typeface="Calibri" pitchFamily="34" charset="-122"/>
+                <a:cs typeface="Calibri" pitchFamily="34" charset="-120"/>
+              </a:rPr>
+              <a:t>Build the habit of not saying "force" / "overwrite" — discipline travels with you.</a:t>
+            </a:r>
+            <a:endParaRPr lang="en-US" sz="950" dirty="0"/>
           </a:p>
         </p:txBody>
       </p:sp>
@@ -18310,6 +18724,740 @@
 <file path=ppt/slides/slide23.xml><?xml version="1.0" encoding="utf-8"?>
 <p:sld xmlns:a="http://schemas.openxmlformats.org/drawingml/2006/main" xmlns:r="http://schemas.openxmlformats.org/officeDocument/2006/relationships" xmlns:p="http://schemas.openxmlformats.org/presentationml/2006/main">
   <p:cSld name="Slide 23">
+    <p:bg>
+      <p:bgPr>
+        <a:solidFill>
+          <a:srgbClr val="F8FAFC"/>
+        </a:solidFill>
+      </p:bgPr>
+    </p:bg>
+    <p:spTree>
+      <p:nvGrpSpPr>
+        <p:cNvPr id="1" name=""/>
+        <p:cNvGrpSpPr/>
+        <p:nvPr/>
+      </p:nvGrpSpPr>
+      <p:grpSpPr>
+        <a:xfrm>
+          <a:off x="0" y="0"/>
+          <a:ext cx="0" cy="0"/>
+          <a:chOff x="0" y="0"/>
+          <a:chExt cx="0" cy="0"/>
+        </a:xfrm>
+      </p:grpSpPr>
+      <p:sp>
+        <p:nvSpPr>
+          <p:cNvPr id="2" name="Text 0"/>
+          <p:cNvSpPr/>
+          <p:nvPr/>
+        </p:nvSpPr>
+        <p:spPr>
+          <a:xfrm>
+            <a:off x="548640" y="411480"/>
+            <a:ext cx="8229600" cy="228600"/>
+          </a:xfrm>
+          <a:prstGeom prst="rect">
+            <a:avLst/>
+          </a:prstGeom>
+          <a:noFill/>
+          <a:ln/>
+        </p:spPr>
+        <p:txBody>
+          <a:bodyPr wrap="square" lIns="0" tIns="0" rIns="0" bIns="0" rtlCol="0" anchor="ctr"/>
+          <a:lstStyle/>
+          <a:p>
+            <a:pPr algn="l" indent="0" marL="0">
+              <a:buNone/>
+            </a:pPr>
+            <a:r>
+              <a:rPr lang="en-US" sz="1000" b="1" spc="300" kern="0" dirty="0">
+                <a:solidFill>
+                  <a:srgbClr val="1A66FF"/>
+                </a:solidFill>
+                <a:latin typeface="Calibri" pitchFamily="34" charset="0"/>
+                <a:ea typeface="Calibri" pitchFamily="34" charset="-122"/>
+                <a:cs typeface="Calibri" pitchFamily="34" charset="-120"/>
+              </a:rPr>
+              <a:t>TAKEAWAY</a:t>
+            </a:r>
+            <a:endParaRPr lang="en-US" sz="1000" dirty="0"/>
+          </a:p>
+        </p:txBody>
+      </p:sp>
+      <p:sp>
+        <p:nvSpPr>
+          <p:cNvPr id="3" name="Text 1"/>
+          <p:cNvSpPr/>
+          <p:nvPr/>
+        </p:nvSpPr>
+        <p:spPr>
+          <a:xfrm>
+            <a:off x="548640" y="731520"/>
+            <a:ext cx="8229600" cy="548640"/>
+          </a:xfrm>
+          <a:prstGeom prst="rect">
+            <a:avLst/>
+          </a:prstGeom>
+          <a:noFill/>
+          <a:ln/>
+        </p:spPr>
+        <p:txBody>
+          <a:bodyPr wrap="square" lIns="0" tIns="0" rIns="0" bIns="0" rtlCol="0" anchor="ctr"/>
+          <a:lstStyle/>
+          <a:p>
+            <a:pPr algn="l" indent="0" marL="0">
+              <a:buNone/>
+            </a:pPr>
+            <a:r>
+              <a:rPr lang="en-US" sz="3000" b="1" dirty="0">
+                <a:solidFill>
+                  <a:srgbClr val="111827"/>
+                </a:solidFill>
+                <a:latin typeface="Calibri" pitchFamily="34" charset="0"/>
+                <a:ea typeface="Calibri" pitchFamily="34" charset="-122"/>
+                <a:cs typeface="Calibri" pitchFamily="34" charset="-120"/>
+              </a:rPr>
+              <a:t>這週記住三件事</a:t>
+            </a:r>
+            <a:endParaRPr lang="en-US" sz="3000" dirty="0"/>
+          </a:p>
+        </p:txBody>
+      </p:sp>
+      <p:sp>
+        <p:nvSpPr>
+          <p:cNvPr id="4" name="Text 2"/>
+          <p:cNvSpPr/>
+          <p:nvPr/>
+        </p:nvSpPr>
+        <p:spPr>
+          <a:xfrm>
+            <a:off x="548640" y="1280160"/>
+            <a:ext cx="8229600" cy="292608"/>
+          </a:xfrm>
+          <a:prstGeom prst="rect">
+            <a:avLst/>
+          </a:prstGeom>
+          <a:noFill/>
+          <a:ln/>
+        </p:spPr>
+        <p:txBody>
+          <a:bodyPr wrap="square" lIns="0" tIns="0" rIns="0" bIns="0" rtlCol="0" anchor="ctr"/>
+          <a:lstStyle/>
+          <a:p>
+            <a:pPr algn="l" indent="0" marL="0">
+              <a:buNone/>
+            </a:pPr>
+            <a:r>
+              <a:rPr lang="en-US" sz="1400" dirty="0">
+                <a:solidFill>
+                  <a:srgbClr val="6B7280"/>
+                </a:solidFill>
+                <a:latin typeface="Calibri" pitchFamily="34" charset="0"/>
+                <a:ea typeface="Calibri" pitchFamily="34" charset="-122"/>
+                <a:cs typeface="Calibri" pitchFamily="34" charset="-120"/>
+              </a:rPr>
+              <a:t>Three things to remember from Week 2</a:t>
+            </a:r>
+            <a:endParaRPr lang="en-US" sz="1400" dirty="0"/>
+          </a:p>
+        </p:txBody>
+      </p:sp>
+      <p:sp>
+        <p:nvSpPr>
+          <p:cNvPr id="5" name="Text 3"/>
+          <p:cNvSpPr/>
+          <p:nvPr/>
+        </p:nvSpPr>
+        <p:spPr>
+          <a:xfrm>
+            <a:off x="548640" y="1965960"/>
+            <a:ext cx="1097280" cy="914400"/>
+          </a:xfrm>
+          <a:prstGeom prst="rect">
+            <a:avLst/>
+          </a:prstGeom>
+          <a:noFill/>
+          <a:ln/>
+        </p:spPr>
+        <p:txBody>
+          <a:bodyPr wrap="square" lIns="0" tIns="0" rIns="0" bIns="0" rtlCol="0" anchor="t"/>
+          <a:lstStyle/>
+          <a:p>
+            <a:pPr algn="l" indent="0" marL="0">
+              <a:buNone/>
+            </a:pPr>
+            <a:r>
+              <a:rPr lang="en-US" sz="5600" b="1" dirty="0">
+                <a:solidFill>
+                  <a:srgbClr val="1A66FF"/>
+                </a:solidFill>
+                <a:latin typeface="Calibri" pitchFamily="34" charset="0"/>
+                <a:ea typeface="Calibri" pitchFamily="34" charset="-122"/>
+                <a:cs typeface="Calibri" pitchFamily="34" charset="-120"/>
+              </a:rPr>
+              <a:t>01</a:t>
+            </a:r>
+            <a:endParaRPr lang="en-US" sz="5600" dirty="0"/>
+          </a:p>
+        </p:txBody>
+      </p:sp>
+      <p:sp>
+        <p:nvSpPr>
+          <p:cNvPr id="6" name="Text 4"/>
+          <p:cNvSpPr/>
+          <p:nvPr/>
+        </p:nvSpPr>
+        <p:spPr>
+          <a:xfrm>
+            <a:off x="1783080" y="2011680"/>
+            <a:ext cx="6949440" cy="329184"/>
+          </a:xfrm>
+          <a:prstGeom prst="rect">
+            <a:avLst/>
+          </a:prstGeom>
+          <a:noFill/>
+          <a:ln/>
+        </p:spPr>
+        <p:txBody>
+          <a:bodyPr wrap="square" lIns="0" tIns="0" rIns="0" bIns="0" rtlCol="0" anchor="ctr"/>
+          <a:lstStyle/>
+          <a:p>
+            <a:pPr algn="l" indent="0" marL="0">
+              <a:buNone/>
+            </a:pPr>
+            <a:r>
+              <a:rPr lang="en-US" sz="1600" b="1" dirty="0">
+                <a:solidFill>
+                  <a:srgbClr val="111827"/>
+                </a:solidFill>
+                <a:latin typeface="Calibri" pitchFamily="34" charset="0"/>
+                <a:ea typeface="Calibri" pitchFamily="34" charset="-122"/>
+                <a:cs typeface="Calibri" pitchFamily="34" charset="-120"/>
+              </a:rPr>
+              <a:t>個人工作也要用 repo 管理</a:t>
+            </a:r>
+            <a:endParaRPr lang="en-US" sz="1600" dirty="0"/>
+          </a:p>
+        </p:txBody>
+      </p:sp>
+      <p:sp>
+        <p:nvSpPr>
+          <p:cNvPr id="7" name="Text 5"/>
+          <p:cNvSpPr/>
+          <p:nvPr/>
+        </p:nvSpPr>
+        <p:spPr>
+          <a:xfrm>
+            <a:off x="1783080" y="2331720"/>
+            <a:ext cx="6949440" cy="237744"/>
+          </a:xfrm>
+          <a:prstGeom prst="rect">
+            <a:avLst/>
+          </a:prstGeom>
+          <a:noFill/>
+          <a:ln/>
+        </p:spPr>
+        <p:txBody>
+          <a:bodyPr wrap="square" lIns="0" tIns="0" rIns="0" bIns="0" rtlCol="0" anchor="ctr"/>
+          <a:lstStyle/>
+          <a:p>
+            <a:pPr algn="l" indent="0" marL="0">
+              <a:buNone/>
+            </a:pPr>
+            <a:r>
+              <a:rPr lang="en-US" sz="1100" dirty="0">
+                <a:solidFill>
+                  <a:srgbClr val="6B7280"/>
+                </a:solidFill>
+                <a:latin typeface="Calibri" pitchFamily="34" charset="0"/>
+                <a:ea typeface="Calibri" pitchFamily="34" charset="-122"/>
+                <a:cs typeface="Calibri" pitchFamily="34" charset="-120"/>
+              </a:rPr>
+              <a:t>Use a repo for personal work too</a:t>
+            </a:r>
+            <a:endParaRPr lang="en-US" sz="1100" dirty="0"/>
+          </a:p>
+        </p:txBody>
+      </p:sp>
+      <p:sp>
+        <p:nvSpPr>
+          <p:cNvPr id="8" name="Text 6"/>
+          <p:cNvSpPr/>
+          <p:nvPr/>
+        </p:nvSpPr>
+        <p:spPr>
+          <a:xfrm>
+            <a:off x="1783080" y="2606040"/>
+            <a:ext cx="6949440" cy="292608"/>
+          </a:xfrm>
+          <a:prstGeom prst="rect">
+            <a:avLst/>
+          </a:prstGeom>
+          <a:noFill/>
+          <a:ln/>
+        </p:spPr>
+        <p:txBody>
+          <a:bodyPr wrap="square" lIns="0" tIns="0" rIns="0" bIns="0" rtlCol="0" anchor="t"/>
+          <a:lstStyle/>
+          <a:p>
+            <a:pPr algn="l" indent="0" marL="0">
+              <a:buNone/>
+            </a:pPr>
+            <a:r>
+              <a:rPr lang="en-US" sz="1100" dirty="0">
+                <a:solidFill>
+                  <a:srgbClr val="374151"/>
+                </a:solidFill>
+                <a:latin typeface="Calibri" pitchFamily="34" charset="0"/>
+                <a:ea typeface="Calibri" pitchFamily="34" charset="-122"/>
+                <a:cs typeface="Calibri" pitchFamily="34" charset="-120"/>
+              </a:rPr>
+              <a:t>不要只存在本機——電腦壞了、檔案誤刪就沒了。建立 personal repo，push 到 GitHub 當備份。</a:t>
+            </a:r>
+            <a:endParaRPr lang="en-US" sz="1100" dirty="0"/>
+          </a:p>
+        </p:txBody>
+      </p:sp>
+      <p:sp>
+        <p:nvSpPr>
+          <p:cNvPr id="9" name="Text 7"/>
+          <p:cNvSpPr/>
+          <p:nvPr/>
+        </p:nvSpPr>
+        <p:spPr>
+          <a:xfrm>
+            <a:off x="1783080" y="2880360"/>
+            <a:ext cx="6949440" cy="256032"/>
+          </a:xfrm>
+          <a:prstGeom prst="rect">
+            <a:avLst/>
+          </a:prstGeom>
+          <a:noFill/>
+          <a:ln/>
+        </p:spPr>
+        <p:txBody>
+          <a:bodyPr wrap="square" lIns="0" tIns="0" rIns="0" bIns="0" rtlCol="0" anchor="t"/>
+          <a:lstStyle/>
+          <a:p>
+            <a:pPr algn="l" indent="0" marL="0">
+              <a:buNone/>
+            </a:pPr>
+            <a:r>
+              <a:rPr lang="en-US" sz="1000" dirty="0">
+                <a:solidFill>
+                  <a:srgbClr val="6B7280"/>
+                </a:solidFill>
+                <a:latin typeface="Calibri" pitchFamily="34" charset="0"/>
+                <a:ea typeface="Calibri" pitchFamily="34" charset="-122"/>
+                <a:cs typeface="Calibri" pitchFamily="34" charset="-120"/>
+              </a:rPr>
+              <a:t>Don't rely on local-only files. Create a personal repo and push to GitHub as backup.</a:t>
+            </a:r>
+            <a:endParaRPr lang="en-US" sz="1000" dirty="0"/>
+          </a:p>
+        </p:txBody>
+      </p:sp>
+      <p:sp>
+        <p:nvSpPr>
+          <p:cNvPr id="10" name="Text 8"/>
+          <p:cNvSpPr/>
+          <p:nvPr/>
+        </p:nvSpPr>
+        <p:spPr>
+          <a:xfrm>
+            <a:off x="548640" y="3063240"/>
+            <a:ext cx="1097280" cy="914400"/>
+          </a:xfrm>
+          <a:prstGeom prst="rect">
+            <a:avLst/>
+          </a:prstGeom>
+          <a:noFill/>
+          <a:ln/>
+        </p:spPr>
+        <p:txBody>
+          <a:bodyPr wrap="square" lIns="0" tIns="0" rIns="0" bIns="0" rtlCol="0" anchor="t"/>
+          <a:lstStyle/>
+          <a:p>
+            <a:pPr algn="l" indent="0" marL="0">
+              <a:buNone/>
+            </a:pPr>
+            <a:r>
+              <a:rPr lang="en-US" sz="5600" b="1" dirty="0">
+                <a:solidFill>
+                  <a:srgbClr val="1A66FF"/>
+                </a:solidFill>
+                <a:latin typeface="Calibri" pitchFamily="34" charset="0"/>
+                <a:ea typeface="Calibri" pitchFamily="34" charset="-122"/>
+                <a:cs typeface="Calibri" pitchFamily="34" charset="-120"/>
+              </a:rPr>
+              <a:t>02</a:t>
+            </a:r>
+            <a:endParaRPr lang="en-US" sz="5600" dirty="0"/>
+          </a:p>
+        </p:txBody>
+      </p:sp>
+      <p:sp>
+        <p:nvSpPr>
+          <p:cNvPr id="11" name="Text 9"/>
+          <p:cNvSpPr/>
+          <p:nvPr/>
+        </p:nvSpPr>
+        <p:spPr>
+          <a:xfrm>
+            <a:off x="1783080" y="3108960"/>
+            <a:ext cx="6949440" cy="329184"/>
+          </a:xfrm>
+          <a:prstGeom prst="rect">
+            <a:avLst/>
+          </a:prstGeom>
+          <a:noFill/>
+          <a:ln/>
+        </p:spPr>
+        <p:txBody>
+          <a:bodyPr wrap="square" lIns="0" tIns="0" rIns="0" bIns="0" rtlCol="0" anchor="ctr"/>
+          <a:lstStyle/>
+          <a:p>
+            <a:pPr algn="l" indent="0" marL="0">
+              <a:buNone/>
+            </a:pPr>
+            <a:r>
+              <a:rPr lang="en-US" sz="1600" b="1" dirty="0">
+                <a:solidFill>
+                  <a:srgbClr val="111827"/>
+                </a:solidFill>
+                <a:latin typeface="Calibri" pitchFamily="34" charset="0"/>
+                <a:ea typeface="Calibri" pitchFamily="34" charset="-122"/>
+                <a:cs typeface="Calibri" pitchFamily="34" charset="-120"/>
+              </a:rPr>
+              <a:t>在 personal repo 練習 branch</a:t>
+            </a:r>
+            <a:endParaRPr lang="en-US" sz="1600" dirty="0"/>
+          </a:p>
+        </p:txBody>
+      </p:sp>
+      <p:sp>
+        <p:nvSpPr>
+          <p:cNvPr id="12" name="Text 10"/>
+          <p:cNvSpPr/>
+          <p:nvPr/>
+        </p:nvSpPr>
+        <p:spPr>
+          <a:xfrm>
+            <a:off x="1783080" y="3429000"/>
+            <a:ext cx="6949440" cy="237744"/>
+          </a:xfrm>
+          <a:prstGeom prst="rect">
+            <a:avLst/>
+          </a:prstGeom>
+          <a:noFill/>
+          <a:ln/>
+        </p:spPr>
+        <p:txBody>
+          <a:bodyPr wrap="square" lIns="0" tIns="0" rIns="0" bIns="0" rtlCol="0" anchor="ctr"/>
+          <a:lstStyle/>
+          <a:p>
+            <a:pPr algn="l" indent="0" marL="0">
+              <a:buNone/>
+            </a:pPr>
+            <a:r>
+              <a:rPr lang="en-US" sz="1100" dirty="0">
+                <a:solidFill>
+                  <a:srgbClr val="6B7280"/>
+                </a:solidFill>
+                <a:latin typeface="Calibri" pitchFamily="34" charset="0"/>
+                <a:ea typeface="Calibri" pitchFamily="34" charset="-122"/>
+                <a:cs typeface="Calibri" pitchFamily="34" charset="-120"/>
+              </a:rPr>
+              <a:t>Practice branching in your personal repo</a:t>
+            </a:r>
+            <a:endParaRPr lang="en-US" sz="1100" dirty="0"/>
+          </a:p>
+        </p:txBody>
+      </p:sp>
+      <p:sp>
+        <p:nvSpPr>
+          <p:cNvPr id="13" name="Text 11"/>
+          <p:cNvSpPr/>
+          <p:nvPr/>
+        </p:nvSpPr>
+        <p:spPr>
+          <a:xfrm>
+            <a:off x="1783080" y="3703320"/>
+            <a:ext cx="6949440" cy="292608"/>
+          </a:xfrm>
+          <a:prstGeom prst="rect">
+            <a:avLst/>
+          </a:prstGeom>
+          <a:noFill/>
+          <a:ln/>
+        </p:spPr>
+        <p:txBody>
+          <a:bodyPr wrap="square" lIns="0" tIns="0" rIns="0" bIns="0" rtlCol="0" anchor="t"/>
+          <a:lstStyle/>
+          <a:p>
+            <a:pPr algn="l" indent="0" marL="0">
+              <a:buNone/>
+            </a:pPr>
+            <a:r>
+              <a:rPr lang="en-US" sz="1100" dirty="0">
+                <a:solidFill>
+                  <a:srgbClr val="374151"/>
+                </a:solidFill>
+                <a:latin typeface="Calibri" pitchFamily="34" charset="0"/>
+                <a:ea typeface="Calibri" pitchFamily="34" charset="-122"/>
+                <a:cs typeface="Calibri" pitchFamily="34" charset="-120"/>
+              </a:rPr>
+              <a:t>個人 repo 最自由，怎麼玩都不影響別人。熟悉「開 branch → commit → merge」的流程。</a:t>
+            </a:r>
+            <a:endParaRPr lang="en-US" sz="1100" dirty="0"/>
+          </a:p>
+        </p:txBody>
+      </p:sp>
+      <p:sp>
+        <p:nvSpPr>
+          <p:cNvPr id="14" name="Text 12"/>
+          <p:cNvSpPr/>
+          <p:nvPr/>
+        </p:nvSpPr>
+        <p:spPr>
+          <a:xfrm>
+            <a:off x="1783080" y="3977640"/>
+            <a:ext cx="6949440" cy="256032"/>
+          </a:xfrm>
+          <a:prstGeom prst="rect">
+            <a:avLst/>
+          </a:prstGeom>
+          <a:noFill/>
+          <a:ln/>
+        </p:spPr>
+        <p:txBody>
+          <a:bodyPr wrap="square" lIns="0" tIns="0" rIns="0" bIns="0" rtlCol="0" anchor="t"/>
+          <a:lstStyle/>
+          <a:p>
+            <a:pPr algn="l" indent="0" marL="0">
+              <a:buNone/>
+            </a:pPr>
+            <a:r>
+              <a:rPr lang="en-US" sz="1000" dirty="0">
+                <a:solidFill>
+                  <a:srgbClr val="6B7280"/>
+                </a:solidFill>
+                <a:latin typeface="Calibri" pitchFamily="34" charset="0"/>
+                <a:ea typeface="Calibri" pitchFamily="34" charset="-122"/>
+                <a:cs typeface="Calibri" pitchFamily="34" charset="-120"/>
+              </a:rPr>
+              <a:t>Personal repos are the safest playground — master branch → commit → merge before team work.</a:t>
+            </a:r>
+            <a:endParaRPr lang="en-US" sz="1000" dirty="0"/>
+          </a:p>
+        </p:txBody>
+      </p:sp>
+      <p:sp>
+        <p:nvSpPr>
+          <p:cNvPr id="15" name="Text 13"/>
+          <p:cNvSpPr/>
+          <p:nvPr/>
+        </p:nvSpPr>
+        <p:spPr>
+          <a:xfrm>
+            <a:off x="548640" y="4160520"/>
+            <a:ext cx="1097280" cy="914400"/>
+          </a:xfrm>
+          <a:prstGeom prst="rect">
+            <a:avLst/>
+          </a:prstGeom>
+          <a:noFill/>
+          <a:ln/>
+        </p:spPr>
+        <p:txBody>
+          <a:bodyPr wrap="square" lIns="0" tIns="0" rIns="0" bIns="0" rtlCol="0" anchor="t"/>
+          <a:lstStyle/>
+          <a:p>
+            <a:pPr algn="l" indent="0" marL="0">
+              <a:buNone/>
+            </a:pPr>
+            <a:r>
+              <a:rPr lang="en-US" sz="5600" b="1" dirty="0">
+                <a:solidFill>
+                  <a:srgbClr val="1A66FF"/>
+                </a:solidFill>
+                <a:latin typeface="Calibri" pitchFamily="34" charset="0"/>
+                <a:ea typeface="Calibri" pitchFamily="34" charset="-122"/>
+                <a:cs typeface="Calibri" pitchFamily="34" charset="-120"/>
+              </a:rPr>
+              <a:t>03</a:t>
+            </a:r>
+            <a:endParaRPr lang="en-US" sz="5600" dirty="0"/>
+          </a:p>
+        </p:txBody>
+      </p:sp>
+      <p:sp>
+        <p:nvSpPr>
+          <p:cNvPr id="16" name="Text 14"/>
+          <p:cNvSpPr/>
+          <p:nvPr/>
+        </p:nvSpPr>
+        <p:spPr>
+          <a:xfrm>
+            <a:off x="1783080" y="4206240"/>
+            <a:ext cx="6949440" cy="329184"/>
+          </a:xfrm>
+          <a:prstGeom prst="rect">
+            <a:avLst/>
+          </a:prstGeom>
+          <a:noFill/>
+          <a:ln/>
+        </p:spPr>
+        <p:txBody>
+          <a:bodyPr wrap="square" lIns="0" tIns="0" rIns="0" bIns="0" rtlCol="0" anchor="ctr"/>
+          <a:lstStyle/>
+          <a:p>
+            <a:pPr algn="l" indent="0" marL="0">
+              <a:buNone/>
+            </a:pPr>
+            <a:r>
+              <a:rPr lang="en-US" sz="1600" b="1" dirty="0">
+                <a:solidFill>
+                  <a:srgbClr val="111827"/>
+                </a:solidFill>
+                <a:latin typeface="Calibri" pitchFamily="34" charset="0"/>
+                <a:ea typeface="Calibri" pitchFamily="34" charset="-122"/>
+                <a:cs typeface="Calibri" pitchFamily="34" charset="-120"/>
+              </a:rPr>
+              <a:t>用資料夾結構分層管理</a:t>
+            </a:r>
+            <a:endParaRPr lang="en-US" sz="1600" dirty="0"/>
+          </a:p>
+        </p:txBody>
+      </p:sp>
+      <p:sp>
+        <p:nvSpPr>
+          <p:cNvPr id="17" name="Text 15"/>
+          <p:cNvSpPr/>
+          <p:nvPr/>
+        </p:nvSpPr>
+        <p:spPr>
+          <a:xfrm>
+            <a:off x="1783080" y="4526280"/>
+            <a:ext cx="6949440" cy="237744"/>
+          </a:xfrm>
+          <a:prstGeom prst="rect">
+            <a:avLst/>
+          </a:prstGeom>
+          <a:noFill/>
+          <a:ln/>
+        </p:spPr>
+        <p:txBody>
+          <a:bodyPr wrap="square" lIns="0" tIns="0" rIns="0" bIns="0" rtlCol="0" anchor="ctr"/>
+          <a:lstStyle/>
+          <a:p>
+            <a:pPr algn="l" indent="0" marL="0">
+              <a:buNone/>
+            </a:pPr>
+            <a:r>
+              <a:rPr lang="en-US" sz="1100" dirty="0">
+                <a:solidFill>
+                  <a:srgbClr val="6B7280"/>
+                </a:solidFill>
+                <a:latin typeface="Calibri" pitchFamily="34" charset="0"/>
+                <a:ea typeface="Calibri" pitchFamily="34" charset="-122"/>
+                <a:cs typeface="Calibri" pitchFamily="34" charset="-120"/>
+              </a:rPr>
+              <a:t>Organize folders in layers</a:t>
+            </a:r>
+            <a:endParaRPr lang="en-US" sz="1100" dirty="0"/>
+          </a:p>
+        </p:txBody>
+      </p:sp>
+      <p:sp>
+        <p:nvSpPr>
+          <p:cNvPr id="18" name="Text 16"/>
+          <p:cNvSpPr/>
+          <p:nvPr/>
+        </p:nvSpPr>
+        <p:spPr>
+          <a:xfrm>
+            <a:off x="1783080" y="4800600"/>
+            <a:ext cx="6949440" cy="292608"/>
+          </a:xfrm>
+          <a:prstGeom prst="rect">
+            <a:avLst/>
+          </a:prstGeom>
+          <a:noFill/>
+          <a:ln/>
+        </p:spPr>
+        <p:txBody>
+          <a:bodyPr wrap="square" lIns="0" tIns="0" rIns="0" bIns="0" rtlCol="0" anchor="t"/>
+          <a:lstStyle/>
+          <a:p>
+            <a:pPr algn="l" indent="0" marL="0">
+              <a:buNone/>
+            </a:pPr>
+            <a:r>
+              <a:rPr lang="en-US" sz="1100" dirty="0">
+                <a:solidFill>
+                  <a:srgbClr val="374151"/>
+                </a:solidFill>
+                <a:latin typeface="Calibri" pitchFamily="34" charset="0"/>
+                <a:ea typeface="Calibri" pitchFamily="34" charset="-122"/>
+                <a:cs typeface="Calibri" pitchFamily="34" charset="-120"/>
+              </a:rPr>
+              <a:t>~/work/company/、~/work/personal/，看路徑就知道在哪一層。降低 push 錯 repo 的風險。</a:t>
+            </a:r>
+            <a:endParaRPr lang="en-US" sz="1100" dirty="0"/>
+          </a:p>
+        </p:txBody>
+      </p:sp>
+      <p:sp>
+        <p:nvSpPr>
+          <p:cNvPr id="19" name="Text 17"/>
+          <p:cNvSpPr/>
+          <p:nvPr/>
+        </p:nvSpPr>
+        <p:spPr>
+          <a:xfrm>
+            <a:off x="1783080" y="5074920"/>
+            <a:ext cx="6949440" cy="256032"/>
+          </a:xfrm>
+          <a:prstGeom prst="rect">
+            <a:avLst/>
+          </a:prstGeom>
+          <a:noFill/>
+          <a:ln/>
+        </p:spPr>
+        <p:txBody>
+          <a:bodyPr wrap="square" lIns="0" tIns="0" rIns="0" bIns="0" rtlCol="0" anchor="t"/>
+          <a:lstStyle/>
+          <a:p>
+            <a:pPr algn="l" indent="0" marL="0">
+              <a:buNone/>
+            </a:pPr>
+            <a:r>
+              <a:rPr lang="en-US" sz="1000" dirty="0">
+                <a:solidFill>
+                  <a:srgbClr val="6B7280"/>
+                </a:solidFill>
+                <a:latin typeface="Calibri" pitchFamily="34" charset="0"/>
+                <a:ea typeface="Calibri" pitchFamily="34" charset="-122"/>
+                <a:cs typeface="Calibri" pitchFamily="34" charset="-120"/>
+              </a:rPr>
+              <a:t>~/work/company/ vs ~/work/personal/ — the path alone tells you what layer you're in.</a:t>
+            </a:r>
+            <a:endParaRPr lang="en-US" sz="1000" dirty="0"/>
+          </a:p>
+        </p:txBody>
+      </p:sp>
+    </p:spTree>
+  </p:cSld>
+  <p:clrMapOvr>
+    <a:masterClrMapping/>
+  </p:clrMapOvr>
+</p:sld>
+</file>
+
+<file path=ppt/slides/slide24.xml><?xml version="1.0" encoding="utf-8"?>
+<p:sld xmlns:a="http://schemas.openxmlformats.org/drawingml/2006/main" xmlns:r="http://schemas.openxmlformats.org/officeDocument/2006/relationships" xmlns:p="http://schemas.openxmlformats.org/presentationml/2006/main">
+  <p:cSld name="Slide 24">
     <p:bg>
       <p:bgPr>
         <a:solidFill>
